--- a/static/ppts/G6_Math_T5_Collecting_Data.pptx
+++ b/static/ppts/G6_Math_T5_Collecting_Data.pptx
@@ -9,9 +9,10 @@
     <p:sldId id="257" r:id="rId3"/>
     <p:sldId id="258" r:id="rId4"/>
     <p:sldId id="259" r:id="rId5"/>
+    <p:sldId id="260" r:id="rId6"/>
   </p:sldIdLst>
   <p:notesMasterIdLst>
-    <p:notesMasterId r:id="rId6"/>
+    <p:notesMasterId r:id="rId7"/>
   </p:notesMasterIdLst>
   <p:sldSz cx="9144000" cy="5143500"/>
   <p:notesSz cx="5143500" cy="9144000"/>
@@ -811,6 +812,94 @@
 </p:notes>
 </file>
 
+<file path=ppt/notesSlides/notesSlide5.xml><?xml version="1.0" encoding="utf-8"?>
+<p:notes xmlns:a="http://schemas.openxmlformats.org/drawingml/2006/main" xmlns:r="http://schemas.openxmlformats.org/officeDocument/2006/relationships" xmlns:p="http://schemas.openxmlformats.org/presentationml/2006/main">
+  <p:cSld>
+    <p:spTree>
+      <p:nvGrpSpPr>
+        <p:cNvPr id="1" name=""/>
+        <p:cNvGrpSpPr/>
+        <p:nvPr/>
+      </p:nvGrpSpPr>
+      <p:grpSpPr>
+        <a:xfrm>
+          <a:off x="0" y="0"/>
+          <a:ext cx="0" cy="0"/>
+          <a:chOff x="0" y="0"/>
+          <a:chExt cx="0" cy="0"/>
+        </a:xfrm>
+      </p:grpSpPr>
+      <p:sp>
+        <p:nvSpPr>
+          <p:cNvPr id="2" name="Slide Image Placeholder 1"/>
+          <p:cNvSpPr>
+            <a:spLocks noGrp="1" noRot="1" noChangeAspect="1"/>
+          </p:cNvSpPr>
+          <p:nvPr>
+            <p:ph type="sldImg"/>
+          </p:nvPr>
+        </p:nvSpPr>
+        <p:spPr/>
+      </p:sp>
+      <p:sp>
+        <p:nvSpPr>
+          <p:cNvPr id="3" name="Notes Placeholder 2"/>
+          <p:cNvSpPr>
+            <a:spLocks noGrp="1"/>
+          </p:cNvSpPr>
+          <p:nvPr>
+            <p:ph type="body" idx="1"/>
+          </p:nvPr>
+        </p:nvSpPr>
+        <p:spPr/>
+        <p:txBody>
+          <a:bodyPr/>
+          <a:lstStyle/>
+          <a:p>
+            <a:r>
+              <a:rPr lang="en-US" dirty="0"/>
+              <a:t/>
+            </a:r>
+            <a:endParaRPr lang="en-US" dirty="0"/>
+          </a:p>
+        </p:txBody>
+      </p:sp>
+      <p:sp>
+        <p:nvSpPr>
+          <p:cNvPr id="4" name="Slide Number Placeholder 3"/>
+          <p:cNvSpPr>
+            <a:spLocks noGrp="1"/>
+          </p:cNvSpPr>
+          <p:nvPr>
+            <p:ph type="sldNum" sz="quarter" idx="10"/>
+          </p:nvPr>
+        </p:nvSpPr>
+        <p:spPr/>
+        <p:txBody>
+          <a:bodyPr/>
+          <a:lstStyle/>
+          <a:p>
+            <a:fld id="{F7021451-1387-4CA6-816F-3879F97B5CBC}" type="slidenum">
+              <a:rPr lang="en-US"/>
+              <a:t>5</a:t>
+            </a:fld>
+            <a:endParaRPr lang="en-US"/>
+          </a:p>
+        </p:txBody>
+      </p:sp>
+    </p:spTree>
+    <p:extLst>
+      <p:ext uri="{BB962C8B-B14F-4D97-AF65-F5344CB8AC3E}">
+        <p14:creationId xmlns:p14="http://schemas.microsoft.com/office/powerpoint/2010/main" val="1024086991"/>
+      </p:ext>
+    </p:extLst>
+  </p:cSld>
+  <p:clrMapOvr>
+    <a:masterClrMapping/>
+  </p:clrMapOvr>
+</p:notes>
+</file>
+
 <file path=ppt/slideLayouts/slideLayout1.xml><?xml version="1.0" encoding="utf-8"?>
 <p:sldLayout xmlns:a="http://schemas.openxmlformats.org/drawingml/2006/main" xmlns:r="http://schemas.openxmlformats.org/officeDocument/2006/relationships" xmlns:p="http://schemas.openxmlformats.org/presentationml/2006/main" preserve="1">
   <p:cSld name="DEFAULT">
@@ -1170,7 +1259,7 @@
         </p:nvSpPr>
         <p:spPr>
           <a:xfrm>
-            <a:off x="731520" y="1280160"/>
+            <a:off x="731520" y="1097280"/>
             <a:ext cx="7772400" cy="1371600"/>
           </a:xfrm>
           <a:prstGeom prst="rect">
@@ -1187,7 +1276,7 @@
               <a:buNone/>
             </a:pPr>
             <a:r>
-              <a:rPr lang="en-US" sz="3600" b="1" dirty="0">
+              <a:rPr lang="en-US" sz="4000" b="1" dirty="0">
                 <a:solidFill>
                   <a:srgbClr val="FFFFFF"/>
                 </a:solidFill>
@@ -1197,7 +1286,7 @@
               </a:rPr>
               <a:t>Collecting &amp; Organising Data</a:t>
             </a:r>
-            <a:endParaRPr lang="en-US" sz="3600" dirty="0"/>
+            <a:endParaRPr lang="en-US" sz="4000" dirty="0"/>
           </a:p>
         </p:txBody>
       </p:sp>
@@ -1209,7 +1298,7 @@
         </p:nvSpPr>
         <p:spPr>
           <a:xfrm>
-            <a:off x="731520" y="2743200"/>
+            <a:off x="731520" y="2560320"/>
             <a:ext cx="7772400" cy="548640"/>
           </a:xfrm>
           <a:prstGeom prst="rect">
@@ -1228,13 +1317,13 @@
             <a:r>
               <a:rPr lang="en-US" sz="1600" dirty="0">
                 <a:solidFill>
-                  <a:srgbClr val="9B9690"/>
+                  <a:srgbClr val="E9C46A"/>
                 </a:solidFill>
                 <a:latin typeface="Calibri" pitchFamily="34" charset="0"/>
                 <a:ea typeface="Calibri" pitchFamily="34" charset="-122"/>
                 <a:cs typeface="Calibri" pitchFamily="34" charset="-120"/>
               </a:rPr>
-              <a:t>G6 Maths · Probability &amp; Statistics</a:t>
+              <a:t>Grade 6 Mathematics · Mr Zocchi</a:t>
             </a:r>
             <a:endParaRPr lang="en-US" sz="1600" dirty="0"/>
           </a:p>
@@ -1242,14 +1331,36 @@
       </p:sp>
       <p:sp>
         <p:nvSpPr>
-          <p:cNvPr id="5" name="Text 3"/>
-          <p:cNvSpPr/>
-          <p:nvPr/>
-        </p:nvSpPr>
-        <p:spPr>
-          <a:xfrm>
-            <a:off x="731520" y="4389120"/>
-            <a:ext cx="7772400" cy="457200"/>
+          <p:cNvPr id="5" name="Shape 3"/>
+          <p:cNvSpPr/>
+          <p:nvPr/>
+        </p:nvSpPr>
+        <p:spPr>
+          <a:xfrm>
+            <a:off x="731520" y="3474720"/>
+            <a:ext cx="2011680" cy="411480"/>
+          </a:xfrm>
+          <a:prstGeom prst="roundRect">
+            <a:avLst>
+              <a:gd name="adj" fmla="val 17778"/>
+            </a:avLst>
+          </a:prstGeom>
+          <a:solidFill>
+            <a:srgbClr val="2A9D8F"/>
+          </a:solidFill>
+          <a:ln/>
+        </p:spPr>
+      </p:sp>
+      <p:sp>
+        <p:nvSpPr>
+          <p:cNvPr id="6" name="Text 4"/>
+          <p:cNvSpPr/>
+          <p:nvPr/>
+        </p:nvSpPr>
+        <p:spPr>
+          <a:xfrm>
+            <a:off x="731520" y="3474720"/>
+            <a:ext cx="2011680" cy="411480"/>
           </a:xfrm>
           <a:prstGeom prst="rect">
             <a:avLst/>
@@ -1261,21 +1372,21 @@
           <a:bodyPr wrap="square" rtlCol="0" anchor="ctr"/>
           <a:lstStyle/>
           <a:p>
-            <a:pPr indent="0" marL="0">
+            <a:pPr algn="ctr" indent="0" marL="0">
               <a:buNone/>
             </a:pPr>
             <a:r>
-              <a:rPr lang="en-US" sz="1000" dirty="0">
-                <a:solidFill>
-                  <a:srgbClr val="6B6660"/>
+              <a:rPr lang="en-US" sz="1200" b="1" dirty="0">
+                <a:solidFill>
+                  <a:srgbClr val="FFFFFF"/>
                 </a:solidFill>
                 <a:latin typeface="Calibri" pitchFamily="34" charset="0"/>
                 <a:ea typeface="Calibri" pitchFamily="34" charset="-122"/>
                 <a:cs typeface="Calibri" pitchFamily="34" charset="-120"/>
               </a:rPr>
-              <a:t>Mr Zocchi · mrzocchi.com</a:t>
-            </a:r>
-            <a:endParaRPr lang="en-US" sz="1000" dirty="0"/>
+              <a:t>Term 5 · Probability &amp; Statistics</a:t>
+            </a:r>
+            <a:endParaRPr lang="en-US" sz="1200" dirty="0"/>
           </a:p>
         </p:txBody>
       </p:sp>
@@ -1293,7 +1404,7 @@
     <p:bg>
       <p:bgPr>
         <a:solidFill>
-          <a:srgbClr val="FFFFFF"/>
+          <a:srgbClr val="FAF8F5"/>
         </a:solidFill>
       </p:bgPr>
     </p:bg>
@@ -1339,8 +1450,8 @@
         </p:nvSpPr>
         <p:spPr>
           <a:xfrm>
-            <a:off x="548640" y="274320"/>
-            <a:ext cx="8046720" cy="640080"/>
+            <a:off x="7772400" y="4709160"/>
+            <a:ext cx="1097280" cy="320040"/>
           </a:xfrm>
           <a:prstGeom prst="rect">
             <a:avLst/>
@@ -1349,14 +1460,105 @@
           <a:ln/>
         </p:spPr>
         <p:txBody>
-          <a:bodyPr wrap="square" lIns="0" tIns="0" rIns="0" bIns="0" rtlCol="0" anchor="ctr"/>
+          <a:bodyPr wrap="square" rtlCol="0" anchor="ctr"/>
+          <a:lstStyle/>
+          <a:p>
+            <a:pPr algn="r" indent="0" marL="0">
+              <a:buNone/>
+            </a:pPr>
+            <a:r>
+              <a:rPr lang="en-US" sz="900" dirty="0">
+                <a:solidFill>
+                  <a:srgbClr val="6B6660"/>
+                </a:solidFill>
+                <a:latin typeface="Calibri" pitchFamily="34" charset="0"/>
+                <a:ea typeface="Calibri" pitchFamily="34" charset="-122"/>
+                <a:cs typeface="Calibri" pitchFamily="34" charset="-120"/>
+              </a:rPr>
+              <a:t>2 / 5</a:t>
+            </a:r>
+            <a:endParaRPr lang="en-US" sz="900" dirty="0"/>
+          </a:p>
+        </p:txBody>
+      </p:sp>
+      <p:sp>
+        <p:nvSpPr>
+          <p:cNvPr id="4" name="Shape 2"/>
+          <p:cNvSpPr/>
+          <p:nvPr/>
+        </p:nvSpPr>
+        <p:spPr>
+          <a:xfrm>
+            <a:off x="1371600" y="914400"/>
+            <a:ext cx="6400800" cy="3200400"/>
+          </a:xfrm>
+          <a:prstGeom prst="rect">
+            <a:avLst/>
+          </a:prstGeom>
+          <a:solidFill>
+            <a:srgbClr val="FFFFFF"/>
+          </a:solidFill>
+          <a:ln w="12700">
+            <a:solidFill>
+              <a:srgbClr val="E5E2DC"/>
+            </a:solidFill>
+            <a:prstDash val="solid"/>
+          </a:ln>
+          <a:effectLst>
+            <a:outerShdw sx="100000" sy="100000" kx="0" ky="0" algn="bl" rotWithShape="0" blurRad="50800" dist="25400" dir="8100000">
+              <a:srgbClr val="000000">
+                <a:alpha val="10000"/>
+              </a:srgbClr>
+            </a:outerShdw>
+          </a:effectLst>
+        </p:spPr>
+      </p:sp>
+      <p:sp>
+        <p:nvSpPr>
+          <p:cNvPr id="5" name="Shape 3"/>
+          <p:cNvSpPr/>
+          <p:nvPr/>
+        </p:nvSpPr>
+        <p:spPr>
+          <a:xfrm>
+            <a:off x="1371600" y="914400"/>
+            <a:ext cx="91440" cy="3200400"/>
+          </a:xfrm>
+          <a:prstGeom prst="rect">
+            <a:avLst/>
+          </a:prstGeom>
+          <a:solidFill>
+            <a:srgbClr val="2A9D8F"/>
+          </a:solidFill>
+          <a:ln/>
+        </p:spPr>
+      </p:sp>
+      <p:sp>
+        <p:nvSpPr>
+          <p:cNvPr id="6" name="Text 4"/>
+          <p:cNvSpPr/>
+          <p:nvPr/>
+        </p:nvSpPr>
+        <p:spPr>
+          <a:xfrm>
+            <a:off x="1828800" y="1097280"/>
+            <a:ext cx="5669280" cy="640080"/>
+          </a:xfrm>
+          <a:prstGeom prst="rect">
+            <a:avLst/>
+          </a:prstGeom>
+          <a:noFill/>
+          <a:ln/>
+        </p:spPr>
+        <p:txBody>
+          <a:bodyPr wrap="square" rtlCol="0" anchor="ctr"/>
           <a:lstStyle/>
           <a:p>
             <a:pPr indent="0" marL="0">
               <a:buNone/>
             </a:pPr>
             <a:r>
-              <a:rPr lang="en-US" sz="2600" b="1" dirty="0">
+              <a:rPr lang="en-US" sz="2400" b="1" dirty="0">
                 <a:solidFill>
                   <a:srgbClr val="1B2A4A"/>
                 </a:solidFill>
@@ -1364,22 +1566,22 @@
                 <a:ea typeface="Georgia" pitchFamily="34" charset="-122"/>
                 <a:cs typeface="Georgia" pitchFamily="34" charset="-120"/>
               </a:rPr>
-              <a:t>Types of Data</a:t>
-            </a:r>
-            <a:endParaRPr lang="en-US" sz="2600" dirty="0"/>
-          </a:p>
-        </p:txBody>
-      </p:sp>
-      <p:sp>
-        <p:nvSpPr>
-          <p:cNvPr id="4" name="Text 2"/>
-          <p:cNvSpPr/>
-          <p:nvPr/>
-        </p:nvSpPr>
-        <p:spPr>
-          <a:xfrm>
-            <a:off x="548640" y="1097280"/>
-            <a:ext cx="8046720" cy="3474720"/>
+              <a:t>Data Collection</a:t>
+            </a:r>
+            <a:endParaRPr lang="en-US" sz="2400" dirty="0"/>
+          </a:p>
+        </p:txBody>
+      </p:sp>
+      <p:sp>
+        <p:nvSpPr>
+          <p:cNvPr id="7" name="Text 5"/>
+          <p:cNvSpPr/>
+          <p:nvPr/>
+        </p:nvSpPr>
+        <p:spPr>
+          <a:xfrm>
+            <a:off x="1828800" y="1828800"/>
+            <a:ext cx="5669280" cy="2011680"/>
           </a:xfrm>
           <a:prstGeom prst="rect">
             <a:avLst/>
@@ -1391,12 +1593,11 @@
           <a:bodyPr wrap="square" rtlCol="0" anchor="t"/>
           <a:lstStyle/>
           <a:p>
-            <a:pPr marL="342900" indent="-342900">
-              <a:spcAft>
-                <a:spcPts val="800"/>
-              </a:spcAft>
-              <a:buSzPct val="100000"/>
-              <a:buChar char="•"/>
+            <a:pPr indent="0" marL="0">
+              <a:lnSpc>
+                <a:spcPct val="130000"/>
+              </a:lnSpc>
+              <a:buNone/>
             </a:pPr>
             <a:r>
               <a:rPr lang="en-US" sz="1500" dirty="0">
@@ -1407,150 +1608,9 @@
                 <a:ea typeface="Calibri" pitchFamily="34" charset="-122"/>
                 <a:cs typeface="Calibri" pitchFamily="34" charset="-120"/>
               </a:rPr>
-              <a:t>Qualitative: descriptive, not numbers (e.g., colour, favourite food)</a:t>
+              <a:t>Statistics is about collecting, organising, and interpreting data to answer questions. Good data collection uses clear questions, appropriate methods, and large enough samples. The two main types of data are qualitative (descriptive) and quantitative (numerical).</a:t>
             </a:r>
             <a:endParaRPr lang="en-US" sz="1500" dirty="0"/>
-          </a:p>
-          <a:p>
-            <a:pPr marL="342900" indent="-342900">
-              <a:spcAft>
-                <a:spcPts val="800"/>
-              </a:spcAft>
-              <a:buSzPct val="100000"/>
-              <a:buChar char="•"/>
-            </a:pPr>
-            <a:r>
-              <a:rPr lang="en-US" sz="1500" dirty="0">
-                <a:solidFill>
-                  <a:srgbClr val="3D3A36"/>
-                </a:solidFill>
-                <a:latin typeface="Calibri" pitchFamily="34" charset="0"/>
-                <a:ea typeface="Calibri" pitchFamily="34" charset="-122"/>
-                <a:cs typeface="Calibri" pitchFamily="34" charset="-120"/>
-              </a:rPr>
-              <a:t>Quantitative: numerical data</a:t>
-            </a:r>
-            <a:endParaRPr lang="en-US" sz="1500" dirty="0"/>
-          </a:p>
-          <a:p>
-            <a:pPr marL="342900" indent="-342900">
-              <a:spcAft>
-                <a:spcPts val="800"/>
-              </a:spcAft>
-              <a:buSzPct val="100000"/>
-              <a:buChar char="•"/>
-            </a:pPr>
-            <a:r>
-              <a:rPr lang="en-US" sz="1500" dirty="0">
-                <a:solidFill>
-                  <a:srgbClr val="3D3A36"/>
-                </a:solidFill>
-                <a:latin typeface="Calibri" pitchFamily="34" charset="0"/>
-                <a:ea typeface="Calibri" pitchFamily="34" charset="-122"/>
-                <a:cs typeface="Calibri" pitchFamily="34" charset="-120"/>
-              </a:rPr>
-              <a:t>Discrete: counted, whole numbers (e.g., number of pets)</a:t>
-            </a:r>
-            <a:endParaRPr lang="en-US" sz="1500" dirty="0"/>
-          </a:p>
-          <a:p>
-            <a:pPr marL="342900" indent="-342900">
-              <a:spcAft>
-                <a:spcPts val="800"/>
-              </a:spcAft>
-              <a:buSzPct val="100000"/>
-              <a:buChar char="•"/>
-            </a:pPr>
-            <a:r>
-              <a:rPr lang="en-US" sz="1500" dirty="0">
-                <a:solidFill>
-                  <a:srgbClr val="3D3A36"/>
-                </a:solidFill>
-                <a:latin typeface="Calibri" pitchFamily="34" charset="0"/>
-                <a:ea typeface="Calibri" pitchFamily="34" charset="-122"/>
-                <a:cs typeface="Calibri" pitchFamily="34" charset="-120"/>
-              </a:rPr>
-              <a:t>Continuous: measured, can be any value (e.g., height, weight)</a:t>
-            </a:r>
-            <a:endParaRPr lang="en-US" sz="1500" dirty="0"/>
-          </a:p>
-          <a:p>
-            <a:pPr marL="342900" indent="-342900">
-              <a:spcAft>
-                <a:spcPts val="800"/>
-              </a:spcAft>
-              <a:buSzPct val="100000"/>
-              <a:buChar char="•"/>
-            </a:pPr>
-            <a:r>
-              <a:rPr lang="en-US" sz="1500" dirty="0">
-                <a:solidFill>
-                  <a:srgbClr val="3D3A36"/>
-                </a:solidFill>
-                <a:latin typeface="Calibri" pitchFamily="34" charset="0"/>
-                <a:ea typeface="Calibri" pitchFamily="34" charset="-122"/>
-                <a:cs typeface="Calibri" pitchFamily="34" charset="-120"/>
-              </a:rPr>
-              <a:t>Primary data: you collect it yourself</a:t>
-            </a:r>
-            <a:endParaRPr lang="en-US" sz="1500" dirty="0"/>
-          </a:p>
-          <a:p>
-            <a:pPr marL="342900" indent="-342900">
-              <a:spcAft>
-                <a:spcPts val="800"/>
-              </a:spcAft>
-              <a:buSzPct val="100000"/>
-              <a:buChar char="•"/>
-            </a:pPr>
-            <a:r>
-              <a:rPr lang="en-US" sz="1500" dirty="0">
-                <a:solidFill>
-                  <a:srgbClr val="3D3A36"/>
-                </a:solidFill>
-                <a:latin typeface="Calibri" pitchFamily="34" charset="0"/>
-                <a:ea typeface="Calibri" pitchFamily="34" charset="-122"/>
-                <a:cs typeface="Calibri" pitchFamily="34" charset="-120"/>
-              </a:rPr>
-              <a:t>Secondary data: someone else collected it</a:t>
-            </a:r>
-            <a:endParaRPr lang="en-US" sz="1500" dirty="0"/>
-          </a:p>
-        </p:txBody>
-      </p:sp>
-      <p:sp>
-        <p:nvSpPr>
-          <p:cNvPr id="5" name="Text 3"/>
-          <p:cNvSpPr/>
-          <p:nvPr/>
-        </p:nvSpPr>
-        <p:spPr>
-          <a:xfrm>
-            <a:off x="548640" y="4800600"/>
-            <a:ext cx="3657600" cy="274320"/>
-          </a:xfrm>
-          <a:prstGeom prst="rect">
-            <a:avLst/>
-          </a:prstGeom>
-          <a:noFill/>
-          <a:ln/>
-        </p:spPr>
-        <p:txBody>
-          <a:bodyPr wrap="square" rtlCol="0" anchor="ctr"/>
-          <a:lstStyle/>
-          <a:p>
-            <a:pPr indent="0" marL="0">
-              <a:buNone/>
-            </a:pPr>
-            <a:r>
-              <a:rPr lang="en-US" sz="800" dirty="0">
-                <a:solidFill>
-                  <a:srgbClr val="9B9690"/>
-                </a:solidFill>
-              </a:rPr>
-              <a:t>mrzocchi.com</a:t>
-            </a:r>
-            <a:endParaRPr lang="en-US" sz="800" dirty="0"/>
           </a:p>
         </p:txBody>
       </p:sp>
@@ -1568,7 +1628,7 @@
     <p:bg>
       <p:bgPr>
         <a:solidFill>
-          <a:srgbClr val="FFFFFF"/>
+          <a:srgbClr val="FAF8F5"/>
         </a:solidFill>
       </p:bgPr>
     </p:bg>
@@ -1614,8 +1674,8 @@
         </p:nvSpPr>
         <p:spPr>
           <a:xfrm>
-            <a:off x="548640" y="274320"/>
-            <a:ext cx="8046720" cy="640080"/>
+            <a:off x="7772400" y="4709160"/>
+            <a:ext cx="1097280" cy="320040"/>
           </a:xfrm>
           <a:prstGeom prst="rect">
             <a:avLst/>
@@ -1624,7 +1684,46 @@
           <a:ln/>
         </p:spPr>
         <p:txBody>
-          <a:bodyPr wrap="square" lIns="0" tIns="0" rIns="0" bIns="0" rtlCol="0" anchor="ctr"/>
+          <a:bodyPr wrap="square" rtlCol="0" anchor="ctr"/>
+          <a:lstStyle/>
+          <a:p>
+            <a:pPr algn="r" indent="0" marL="0">
+              <a:buNone/>
+            </a:pPr>
+            <a:r>
+              <a:rPr lang="en-US" sz="900" dirty="0">
+                <a:solidFill>
+                  <a:srgbClr val="6B6660"/>
+                </a:solidFill>
+                <a:latin typeface="Calibri" pitchFamily="34" charset="0"/>
+                <a:ea typeface="Calibri" pitchFamily="34" charset="-122"/>
+                <a:cs typeface="Calibri" pitchFamily="34" charset="-120"/>
+              </a:rPr>
+              <a:t>3 / 5</a:t>
+            </a:r>
+            <a:endParaRPr lang="en-US" sz="900" dirty="0"/>
+          </a:p>
+        </p:txBody>
+      </p:sp>
+      <p:sp>
+        <p:nvSpPr>
+          <p:cNvPr id="4" name="Text 2"/>
+          <p:cNvSpPr/>
+          <p:nvPr/>
+        </p:nvSpPr>
+        <p:spPr>
+          <a:xfrm>
+            <a:off x="457200" y="274320"/>
+            <a:ext cx="8229600" cy="640080"/>
+          </a:xfrm>
+          <a:prstGeom prst="rect">
+            <a:avLst/>
+          </a:prstGeom>
+          <a:noFill/>
+          <a:ln/>
+        </p:spPr>
+        <p:txBody>
+          <a:bodyPr wrap="square" rtlCol="0" anchor="ctr"/>
           <a:lstStyle/>
           <a:p>
             <a:pPr indent="0" marL="0">
@@ -1639,7 +1738,7 @@
                 <a:ea typeface="Georgia" pitchFamily="34" charset="-122"/>
                 <a:cs typeface="Georgia" pitchFamily="34" charset="-120"/>
               </a:rPr>
-              <a:t>Collecting &amp; Organising</a:t>
+              <a:t>Types of Data</a:t>
             </a:r>
             <a:endParaRPr lang="en-US" sz="2600" dirty="0"/>
           </a:p>
@@ -1647,14 +1746,66 @@
       </p:sp>
       <p:sp>
         <p:nvSpPr>
-          <p:cNvPr id="4" name="Text 2"/>
-          <p:cNvSpPr/>
-          <p:nvPr/>
-        </p:nvSpPr>
-        <p:spPr>
-          <a:xfrm>
-            <a:off x="548640" y="1097280"/>
-            <a:ext cx="8046720" cy="3474720"/>
+          <p:cNvPr id="5" name="Shape 3"/>
+          <p:cNvSpPr/>
+          <p:nvPr/>
+        </p:nvSpPr>
+        <p:spPr>
+          <a:xfrm>
+            <a:off x="457200" y="1188720"/>
+            <a:ext cx="2560320" cy="1828800"/>
+          </a:xfrm>
+          <a:prstGeom prst="rect">
+            <a:avLst/>
+          </a:prstGeom>
+          <a:solidFill>
+            <a:srgbClr val="FFFFFF"/>
+          </a:solidFill>
+          <a:ln w="12700">
+            <a:solidFill>
+              <a:srgbClr val="E5E2DC"/>
+            </a:solidFill>
+            <a:prstDash val="solid"/>
+          </a:ln>
+          <a:effectLst>
+            <a:outerShdw sx="100000" sy="100000" kx="0" ky="0" algn="bl" rotWithShape="0" blurRad="50800" dist="25400" dir="8100000">
+              <a:srgbClr val="000000">
+                <a:alpha val="10000"/>
+              </a:srgbClr>
+            </a:outerShdw>
+          </a:effectLst>
+        </p:spPr>
+      </p:sp>
+      <p:sp>
+        <p:nvSpPr>
+          <p:cNvPr id="6" name="Shape 4"/>
+          <p:cNvSpPr/>
+          <p:nvPr/>
+        </p:nvSpPr>
+        <p:spPr>
+          <a:xfrm>
+            <a:off x="457200" y="1188720"/>
+            <a:ext cx="2560320" cy="54864"/>
+          </a:xfrm>
+          <a:prstGeom prst="rect">
+            <a:avLst/>
+          </a:prstGeom>
+          <a:solidFill>
+            <a:srgbClr val="2A9D8F"/>
+          </a:solidFill>
+          <a:ln/>
+        </p:spPr>
+      </p:sp>
+      <p:sp>
+        <p:nvSpPr>
+          <p:cNvPr id="7" name="Text 5"/>
+          <p:cNvSpPr/>
+          <p:nvPr/>
+        </p:nvSpPr>
+        <p:spPr>
+          <a:xfrm>
+            <a:off x="594360" y="1325880"/>
+            <a:ext cx="2286000" cy="365760"/>
           </a:xfrm>
           <a:prstGeom prst="rect">
             <a:avLst/>
@@ -1663,39 +1814,53 @@
           <a:ln/>
         </p:spPr>
         <p:txBody>
-          <a:bodyPr wrap="square" rtlCol="0" anchor="t"/>
-          <a:lstStyle/>
-          <a:p>
-            <a:pPr marL="342900" indent="-342900">
-              <a:spcAft>
-                <a:spcPts val="800"/>
-              </a:spcAft>
-              <a:buSzPct val="100000"/>
-              <a:buChar char="•"/>
-            </a:pPr>
-            <a:r>
-              <a:rPr lang="en-US" sz="1500" dirty="0">
-                <a:solidFill>
-                  <a:srgbClr val="3D3A36"/>
+          <a:bodyPr wrap="square" rtlCol="0" anchor="ctr"/>
+          <a:lstStyle/>
+          <a:p>
+            <a:pPr indent="0" marL="0">
+              <a:buNone/>
+            </a:pPr>
+            <a:r>
+              <a:rPr lang="en-US" sz="1400" b="1" dirty="0">
+                <a:solidFill>
+                  <a:srgbClr val="1B2A4A"/>
                 </a:solidFill>
                 <a:latin typeface="Calibri" pitchFamily="34" charset="0"/>
                 <a:ea typeface="Calibri" pitchFamily="34" charset="-122"/>
                 <a:cs typeface="Calibri" pitchFamily="34" charset="-120"/>
               </a:rPr>
-              <a:t>Tally charts: use marks (||||) to count — group in fives</a:t>
-            </a:r>
-            <a:endParaRPr lang="en-US" sz="1500" dirty="0"/>
-          </a:p>
-          <a:p>
-            <a:pPr marL="342900" indent="-342900">
-              <a:spcAft>
-                <a:spcPts val="800"/>
-              </a:spcAft>
-              <a:buSzPct val="100000"/>
-              <a:buChar char="•"/>
-            </a:pPr>
-            <a:r>
-              <a:rPr lang="en-US" sz="1500" dirty="0">
+              <a:t>Qualitative</a:t>
+            </a:r>
+            <a:endParaRPr lang="en-US" sz="1400" dirty="0"/>
+          </a:p>
+        </p:txBody>
+      </p:sp>
+      <p:sp>
+        <p:nvSpPr>
+          <p:cNvPr id="8" name="Text 6"/>
+          <p:cNvSpPr/>
+          <p:nvPr/>
+        </p:nvSpPr>
+        <p:spPr>
+          <a:xfrm>
+            <a:off x="594360" y="1737360"/>
+            <a:ext cx="2286000" cy="1097280"/>
+          </a:xfrm>
+          <a:prstGeom prst="rect">
+            <a:avLst/>
+          </a:prstGeom>
+          <a:noFill/>
+          <a:ln/>
+        </p:spPr>
+        <p:txBody>
+          <a:bodyPr wrap="square" rtlCol="0" anchor="t"/>
+          <a:lstStyle/>
+          <a:p>
+            <a:pPr indent="0" marL="0">
+              <a:buNone/>
+            </a:pPr>
+            <a:r>
+              <a:rPr lang="en-US" sz="1100" dirty="0">
                 <a:solidFill>
                   <a:srgbClr val="3D3A36"/>
                 </a:solidFill>
@@ -1703,41 +1868,129 @@
                 <a:ea typeface="Calibri" pitchFamily="34" charset="-122"/>
                 <a:cs typeface="Calibri" pitchFamily="34" charset="-120"/>
               </a:rPr>
-              <a:t>Frequency tables: show how often each value appears</a:t>
-            </a:r>
-            <a:endParaRPr lang="en-US" sz="1500" dirty="0"/>
-          </a:p>
-          <a:p>
-            <a:pPr marL="342900" indent="-342900">
-              <a:spcAft>
-                <a:spcPts val="800"/>
-              </a:spcAft>
-              <a:buSzPct val="100000"/>
-              <a:buChar char="•"/>
-            </a:pPr>
-            <a:r>
-              <a:rPr lang="en-US" sz="1500" dirty="0">
-                <a:solidFill>
-                  <a:srgbClr val="3D3A36"/>
+              <a:t>Descriptive, non-numerical. Colours, names, opinions. Example: 'What is your favourite sport?' Answers: football, basketball, swimming.</a:t>
+            </a:r>
+            <a:endParaRPr lang="en-US" sz="1100" dirty="0"/>
+          </a:p>
+        </p:txBody>
+      </p:sp>
+      <p:sp>
+        <p:nvSpPr>
+          <p:cNvPr id="9" name="Shape 7"/>
+          <p:cNvSpPr/>
+          <p:nvPr/>
+        </p:nvSpPr>
+        <p:spPr>
+          <a:xfrm>
+            <a:off x="3291840" y="1188720"/>
+            <a:ext cx="2560320" cy="1828800"/>
+          </a:xfrm>
+          <a:prstGeom prst="rect">
+            <a:avLst/>
+          </a:prstGeom>
+          <a:solidFill>
+            <a:srgbClr val="FFFFFF"/>
+          </a:solidFill>
+          <a:ln w="12700">
+            <a:solidFill>
+              <a:srgbClr val="E5E2DC"/>
+            </a:solidFill>
+            <a:prstDash val="solid"/>
+          </a:ln>
+          <a:effectLst>
+            <a:outerShdw sx="100000" sy="100000" kx="0" ky="0" algn="bl" rotWithShape="0" blurRad="50800" dist="25400" dir="8100000">
+              <a:srgbClr val="000000">
+                <a:alpha val="10000"/>
+              </a:srgbClr>
+            </a:outerShdw>
+          </a:effectLst>
+        </p:spPr>
+      </p:sp>
+      <p:sp>
+        <p:nvSpPr>
+          <p:cNvPr id="10" name="Shape 8"/>
+          <p:cNvSpPr/>
+          <p:nvPr/>
+        </p:nvSpPr>
+        <p:spPr>
+          <a:xfrm>
+            <a:off x="3291840" y="1188720"/>
+            <a:ext cx="2560320" cy="54864"/>
+          </a:xfrm>
+          <a:prstGeom prst="rect">
+            <a:avLst/>
+          </a:prstGeom>
+          <a:solidFill>
+            <a:srgbClr val="2A9D8F"/>
+          </a:solidFill>
+          <a:ln/>
+        </p:spPr>
+      </p:sp>
+      <p:sp>
+        <p:nvSpPr>
+          <p:cNvPr id="11" name="Text 9"/>
+          <p:cNvSpPr/>
+          <p:nvPr/>
+        </p:nvSpPr>
+        <p:spPr>
+          <a:xfrm>
+            <a:off x="3429000" y="1325880"/>
+            <a:ext cx="2286000" cy="365760"/>
+          </a:xfrm>
+          <a:prstGeom prst="rect">
+            <a:avLst/>
+          </a:prstGeom>
+          <a:noFill/>
+          <a:ln/>
+        </p:spPr>
+        <p:txBody>
+          <a:bodyPr wrap="square" rtlCol="0" anchor="ctr"/>
+          <a:lstStyle/>
+          <a:p>
+            <a:pPr indent="0" marL="0">
+              <a:buNone/>
+            </a:pPr>
+            <a:r>
+              <a:rPr lang="en-US" sz="1400" b="1" dirty="0">
+                <a:solidFill>
+                  <a:srgbClr val="1B2A4A"/>
                 </a:solidFill>
                 <a:latin typeface="Calibri" pitchFamily="34" charset="0"/>
                 <a:ea typeface="Calibri" pitchFamily="34" charset="-122"/>
                 <a:cs typeface="Calibri" pitchFamily="34" charset="-120"/>
               </a:rPr>
-              <a:t>Two-way tables: organise data by two categories</a:t>
-            </a:r>
-            <a:endParaRPr lang="en-US" sz="1500" dirty="0"/>
-          </a:p>
-          <a:p>
-            <a:pPr marL="342900" indent="-342900">
-              <a:spcAft>
-                <a:spcPts val="800"/>
-              </a:spcAft>
-              <a:buSzPct val="100000"/>
-              <a:buChar char="•"/>
-            </a:pPr>
-            <a:r>
-              <a:rPr lang="en-US" sz="1500" dirty="0">
+              <a:t>Discrete</a:t>
+            </a:r>
+            <a:endParaRPr lang="en-US" sz="1400" dirty="0"/>
+          </a:p>
+        </p:txBody>
+      </p:sp>
+      <p:sp>
+        <p:nvSpPr>
+          <p:cNvPr id="12" name="Text 10"/>
+          <p:cNvSpPr/>
+          <p:nvPr/>
+        </p:nvSpPr>
+        <p:spPr>
+          <a:xfrm>
+            <a:off x="3429000" y="1737360"/>
+            <a:ext cx="2286000" cy="1097280"/>
+          </a:xfrm>
+          <a:prstGeom prst="rect">
+            <a:avLst/>
+          </a:prstGeom>
+          <a:noFill/>
+          <a:ln/>
+        </p:spPr>
+        <p:txBody>
+          <a:bodyPr wrap="square" rtlCol="0" anchor="t"/>
+          <a:lstStyle/>
+          <a:p>
+            <a:pPr indent="0" marL="0">
+              <a:buNone/>
+            </a:pPr>
+            <a:r>
+              <a:rPr lang="en-US" sz="1100" dirty="0">
                 <a:solidFill>
                   <a:srgbClr val="3D3A36"/>
                 </a:solidFill>
@@ -1745,43 +1998,113 @@
                 <a:ea typeface="Calibri" pitchFamily="34" charset="-122"/>
                 <a:cs typeface="Calibri" pitchFamily="34" charset="-120"/>
               </a:rPr>
-              <a:t>Make sure your data collection is FAIR (no bias)</a:t>
-            </a:r>
-            <a:endParaRPr lang="en-US" sz="1500" dirty="0"/>
-          </a:p>
-          <a:p>
-            <a:pPr marL="342900" indent="-342900">
-              <a:spcAft>
-                <a:spcPts val="800"/>
-              </a:spcAft>
-              <a:buSzPct val="100000"/>
-              <a:buChar char="•"/>
-            </a:pPr>
-            <a:r>
-              <a:rPr lang="en-US" sz="1500" dirty="0">
-                <a:solidFill>
-                  <a:srgbClr val="3D3A36"/>
+              <a:t>Countable numbers. Can only take specific values. Example: number of pets (0, 1, 2, 3...). You can't have 2.5 pets.</a:t>
+            </a:r>
+            <a:endParaRPr lang="en-US" sz="1100" dirty="0"/>
+          </a:p>
+        </p:txBody>
+      </p:sp>
+      <p:sp>
+        <p:nvSpPr>
+          <p:cNvPr id="13" name="Shape 11"/>
+          <p:cNvSpPr/>
+          <p:nvPr/>
+        </p:nvSpPr>
+        <p:spPr>
+          <a:xfrm>
+            <a:off x="6126480" y="1188720"/>
+            <a:ext cx="2560320" cy="1828800"/>
+          </a:xfrm>
+          <a:prstGeom prst="rect">
+            <a:avLst/>
+          </a:prstGeom>
+          <a:solidFill>
+            <a:srgbClr val="FFFFFF"/>
+          </a:solidFill>
+          <a:ln w="12700">
+            <a:solidFill>
+              <a:srgbClr val="E5E2DC"/>
+            </a:solidFill>
+            <a:prstDash val="solid"/>
+          </a:ln>
+          <a:effectLst>
+            <a:outerShdw sx="100000" sy="100000" kx="0" ky="0" algn="bl" rotWithShape="0" blurRad="50800" dist="25400" dir="8100000">
+              <a:srgbClr val="000000">
+                <a:alpha val="10000"/>
+              </a:srgbClr>
+            </a:outerShdw>
+          </a:effectLst>
+        </p:spPr>
+      </p:sp>
+      <p:sp>
+        <p:nvSpPr>
+          <p:cNvPr id="14" name="Shape 12"/>
+          <p:cNvSpPr/>
+          <p:nvPr/>
+        </p:nvSpPr>
+        <p:spPr>
+          <a:xfrm>
+            <a:off x="6126480" y="1188720"/>
+            <a:ext cx="2560320" cy="54864"/>
+          </a:xfrm>
+          <a:prstGeom prst="rect">
+            <a:avLst/>
+          </a:prstGeom>
+          <a:solidFill>
+            <a:srgbClr val="2A9D8F"/>
+          </a:solidFill>
+          <a:ln/>
+        </p:spPr>
+      </p:sp>
+      <p:sp>
+        <p:nvSpPr>
+          <p:cNvPr id="15" name="Text 13"/>
+          <p:cNvSpPr/>
+          <p:nvPr/>
+        </p:nvSpPr>
+        <p:spPr>
+          <a:xfrm>
+            <a:off x="6263640" y="1325880"/>
+            <a:ext cx="2286000" cy="365760"/>
+          </a:xfrm>
+          <a:prstGeom prst="rect">
+            <a:avLst/>
+          </a:prstGeom>
+          <a:noFill/>
+          <a:ln/>
+        </p:spPr>
+        <p:txBody>
+          <a:bodyPr wrap="square" rtlCol="0" anchor="ctr"/>
+          <a:lstStyle/>
+          <a:p>
+            <a:pPr indent="0" marL="0">
+              <a:buNone/>
+            </a:pPr>
+            <a:r>
+              <a:rPr lang="en-US" sz="1400" b="1" dirty="0">
+                <a:solidFill>
+                  <a:srgbClr val="1B2A4A"/>
                 </a:solidFill>
                 <a:latin typeface="Calibri" pitchFamily="34" charset="0"/>
                 <a:ea typeface="Calibri" pitchFamily="34" charset="-122"/>
                 <a:cs typeface="Calibri" pitchFamily="34" charset="-120"/>
               </a:rPr>
-              <a:t>Ask clear questions with distinct categories</a:t>
-            </a:r>
-            <a:endParaRPr lang="en-US" sz="1500" dirty="0"/>
-          </a:p>
-        </p:txBody>
-      </p:sp>
-      <p:sp>
-        <p:nvSpPr>
-          <p:cNvPr id="5" name="Text 3"/>
-          <p:cNvSpPr/>
-          <p:nvPr/>
-        </p:nvSpPr>
-        <p:spPr>
-          <a:xfrm>
-            <a:off x="548640" y="4800600"/>
-            <a:ext cx="3657600" cy="274320"/>
+              <a:t>Continuous</a:t>
+            </a:r>
+            <a:endParaRPr lang="en-US" sz="1400" dirty="0"/>
+          </a:p>
+        </p:txBody>
+      </p:sp>
+      <p:sp>
+        <p:nvSpPr>
+          <p:cNvPr id="16" name="Text 14"/>
+          <p:cNvSpPr/>
+          <p:nvPr/>
+        </p:nvSpPr>
+        <p:spPr>
+          <a:xfrm>
+            <a:off x="6263640" y="1737360"/>
+            <a:ext cx="2286000" cy="1097280"/>
           </a:xfrm>
           <a:prstGeom prst="rect">
             <a:avLst/>
@@ -1790,21 +2113,24 @@
           <a:ln/>
         </p:spPr>
         <p:txBody>
-          <a:bodyPr wrap="square" rtlCol="0" anchor="ctr"/>
+          <a:bodyPr wrap="square" rtlCol="0" anchor="t"/>
           <a:lstStyle/>
           <a:p>
             <a:pPr indent="0" marL="0">
               <a:buNone/>
             </a:pPr>
             <a:r>
-              <a:rPr lang="en-US" sz="800" dirty="0">
-                <a:solidFill>
-                  <a:srgbClr val="9B9690"/>
-                </a:solidFill>
-              </a:rPr>
-              <a:t>mrzocchi.com</a:t>
-            </a:r>
-            <a:endParaRPr lang="en-US" sz="800" dirty="0"/>
+              <a:rPr lang="en-US" sz="1100" dirty="0">
+                <a:solidFill>
+                  <a:srgbClr val="3D3A36"/>
+                </a:solidFill>
+                <a:latin typeface="Calibri" pitchFamily="34" charset="0"/>
+                <a:ea typeface="Calibri" pitchFamily="34" charset="-122"/>
+                <a:cs typeface="Calibri" pitchFamily="34" charset="-120"/>
+              </a:rPr>
+              <a:t>Measured numbers. Can take ANY value in a range. Example: height (162.5 cm), temperature (37.2°C). Need measuring instruments.</a:t>
+            </a:r>
+            <a:endParaRPr lang="en-US" sz="1100" dirty="0"/>
           </a:p>
         </p:txBody>
       </p:sp>
@@ -1819,6 +2145,466 @@
 <file path=ppt/slides/slide4.xml><?xml version="1.0" encoding="utf-8"?>
 <p:sld xmlns:a="http://schemas.openxmlformats.org/drawingml/2006/main" xmlns:r="http://schemas.openxmlformats.org/officeDocument/2006/relationships" xmlns:p="http://schemas.openxmlformats.org/presentationml/2006/main">
   <p:cSld name="Slide 4">
+    <p:bg>
+      <p:bgPr>
+        <a:solidFill>
+          <a:srgbClr val="FAF8F5"/>
+        </a:solidFill>
+      </p:bgPr>
+    </p:bg>
+    <p:spTree>
+      <p:nvGrpSpPr>
+        <p:cNvPr id="1" name=""/>
+        <p:cNvGrpSpPr/>
+        <p:nvPr/>
+      </p:nvGrpSpPr>
+      <p:grpSpPr>
+        <a:xfrm>
+          <a:off x="0" y="0"/>
+          <a:ext cx="0" cy="0"/>
+          <a:chOff x="0" y="0"/>
+          <a:chExt cx="0" cy="0"/>
+        </a:xfrm>
+      </p:grpSpPr>
+      <p:sp>
+        <p:nvSpPr>
+          <p:cNvPr id="2" name="Shape 0"/>
+          <p:cNvSpPr/>
+          <p:nvPr/>
+        </p:nvSpPr>
+        <p:spPr>
+          <a:xfrm>
+            <a:off x="0" y="0"/>
+            <a:ext cx="9144000" cy="54864"/>
+          </a:xfrm>
+          <a:prstGeom prst="rect">
+            <a:avLst/>
+          </a:prstGeom>
+          <a:solidFill>
+            <a:srgbClr val="2A9D8F"/>
+          </a:solidFill>
+          <a:ln/>
+        </p:spPr>
+      </p:sp>
+      <p:sp>
+        <p:nvSpPr>
+          <p:cNvPr id="3" name="Text 1"/>
+          <p:cNvSpPr/>
+          <p:nvPr/>
+        </p:nvSpPr>
+        <p:spPr>
+          <a:xfrm>
+            <a:off x="7772400" y="4709160"/>
+            <a:ext cx="1097280" cy="320040"/>
+          </a:xfrm>
+          <a:prstGeom prst="rect">
+            <a:avLst/>
+          </a:prstGeom>
+          <a:noFill/>
+          <a:ln/>
+        </p:spPr>
+        <p:txBody>
+          <a:bodyPr wrap="square" rtlCol="0" anchor="ctr"/>
+          <a:lstStyle/>
+          <a:p>
+            <a:pPr algn="r" indent="0" marL="0">
+              <a:buNone/>
+            </a:pPr>
+            <a:r>
+              <a:rPr lang="en-US" sz="900" dirty="0">
+                <a:solidFill>
+                  <a:srgbClr val="6B6660"/>
+                </a:solidFill>
+                <a:latin typeface="Calibri" pitchFamily="34" charset="0"/>
+                <a:ea typeface="Calibri" pitchFamily="34" charset="-122"/>
+                <a:cs typeface="Calibri" pitchFamily="34" charset="-120"/>
+              </a:rPr>
+              <a:t>4 / 5</a:t>
+            </a:r>
+            <a:endParaRPr lang="en-US" sz="900" dirty="0"/>
+          </a:p>
+        </p:txBody>
+      </p:sp>
+      <p:sp>
+        <p:nvSpPr>
+          <p:cNvPr id="4" name="Text 2"/>
+          <p:cNvSpPr/>
+          <p:nvPr/>
+        </p:nvSpPr>
+        <p:spPr>
+          <a:xfrm>
+            <a:off x="457200" y="274320"/>
+            <a:ext cx="8229600" cy="640080"/>
+          </a:xfrm>
+          <a:prstGeom prst="rect">
+            <a:avLst/>
+          </a:prstGeom>
+          <a:noFill/>
+          <a:ln/>
+        </p:spPr>
+        <p:txBody>
+          <a:bodyPr wrap="square" rtlCol="0" anchor="ctr"/>
+          <a:lstStyle/>
+          <a:p>
+            <a:pPr indent="0" marL="0">
+              <a:buNone/>
+            </a:pPr>
+            <a:r>
+              <a:rPr lang="en-US" sz="2600" b="1" dirty="0">
+                <a:solidFill>
+                  <a:srgbClr val="1B2A4A"/>
+                </a:solidFill>
+                <a:latin typeface="Georgia" pitchFamily="34" charset="0"/>
+                <a:ea typeface="Georgia" pitchFamily="34" charset="-122"/>
+                <a:cs typeface="Georgia" pitchFamily="34" charset="-120"/>
+              </a:rPr>
+              <a:t>Data Collection Methods</a:t>
+            </a:r>
+            <a:endParaRPr lang="en-US" sz="2600" dirty="0"/>
+          </a:p>
+        </p:txBody>
+      </p:sp>
+      <p:sp>
+        <p:nvSpPr>
+          <p:cNvPr id="5" name="Text 3"/>
+          <p:cNvSpPr/>
+          <p:nvPr/>
+        </p:nvSpPr>
+        <p:spPr>
+          <a:xfrm>
+            <a:off x="457200" y="1188720"/>
+            <a:ext cx="3840480" cy="3474720"/>
+          </a:xfrm>
+          <a:prstGeom prst="rect">
+            <a:avLst/>
+          </a:prstGeom>
+          <a:noFill/>
+          <a:ln/>
+        </p:spPr>
+        <p:txBody>
+          <a:bodyPr wrap="square" rtlCol="0" anchor="t"/>
+          <a:lstStyle/>
+          <a:p>
+            <a:pPr marL="342900" indent="-342900">
+              <a:spcAft>
+                <a:spcPts val="600"/>
+              </a:spcAft>
+              <a:buSzPct val="100000"/>
+              <a:buChar char="•"/>
+            </a:pPr>
+            <a:r>
+              <a:rPr lang="en-US" sz="1400" dirty="0">
+                <a:solidFill>
+                  <a:srgbClr val="3D3A36"/>
+                </a:solidFill>
+                <a:latin typeface="Calibri" pitchFamily="34" charset="0"/>
+                <a:ea typeface="Calibri" pitchFamily="34" charset="-122"/>
+                <a:cs typeface="Calibri" pitchFamily="34" charset="-120"/>
+              </a:rPr>
+              <a:t>Surveys/questionnaires: ask questions to a sample</a:t>
+            </a:r>
+            <a:endParaRPr lang="en-US" sz="1400" dirty="0"/>
+          </a:p>
+          <a:p>
+            <a:pPr marL="342900" indent="-342900">
+              <a:spcAft>
+                <a:spcPts val="600"/>
+              </a:spcAft>
+              <a:buSzPct val="100000"/>
+              <a:buChar char="•"/>
+            </a:pPr>
+            <a:r>
+              <a:rPr lang="en-US" sz="1400" dirty="0">
+                <a:solidFill>
+                  <a:srgbClr val="3D3A36"/>
+                </a:solidFill>
+                <a:latin typeface="Calibri" pitchFamily="34" charset="0"/>
+                <a:ea typeface="Calibri" pitchFamily="34" charset="-122"/>
+                <a:cs typeface="Calibri" pitchFamily="34" charset="-120"/>
+              </a:rPr>
+              <a:t>Observation: watch and record what happens</a:t>
+            </a:r>
+            <a:endParaRPr lang="en-US" sz="1400" dirty="0"/>
+          </a:p>
+          <a:p>
+            <a:pPr marL="342900" indent="-342900">
+              <a:spcAft>
+                <a:spcPts val="600"/>
+              </a:spcAft>
+              <a:buSzPct val="100000"/>
+              <a:buChar char="•"/>
+            </a:pPr>
+            <a:r>
+              <a:rPr lang="en-US" sz="1400" dirty="0">
+                <a:solidFill>
+                  <a:srgbClr val="3D3A36"/>
+                </a:solidFill>
+                <a:latin typeface="Calibri" pitchFamily="34" charset="0"/>
+                <a:ea typeface="Calibri" pitchFamily="34" charset="-122"/>
+                <a:cs typeface="Calibri" pitchFamily="34" charset="-120"/>
+              </a:rPr>
+              <a:t>Experiments: test variables, collect results</a:t>
+            </a:r>
+            <a:endParaRPr lang="en-US" sz="1400" dirty="0"/>
+          </a:p>
+          <a:p>
+            <a:pPr marL="342900" indent="-342900">
+              <a:spcAft>
+                <a:spcPts val="600"/>
+              </a:spcAft>
+              <a:buSzPct val="100000"/>
+              <a:buChar char="•"/>
+            </a:pPr>
+            <a:r>
+              <a:rPr lang="en-US" sz="1400" dirty="0">
+                <a:solidFill>
+                  <a:srgbClr val="3D3A36"/>
+                </a:solidFill>
+                <a:latin typeface="Calibri" pitchFamily="34" charset="0"/>
+                <a:ea typeface="Calibri" pitchFamily="34" charset="-122"/>
+                <a:cs typeface="Calibri" pitchFamily="34" charset="-120"/>
+              </a:rPr>
+              <a:t>Databases/secondary data: use existing data sources</a:t>
+            </a:r>
+            <a:endParaRPr lang="en-US" sz="1400" dirty="0"/>
+          </a:p>
+          <a:p>
+            <a:pPr marL="342900" indent="-342900">
+              <a:spcAft>
+                <a:spcPts val="600"/>
+              </a:spcAft>
+              <a:buSzPct val="100000"/>
+              <a:buChar char="•"/>
+            </a:pPr>
+            <a:r>
+              <a:rPr lang="en-US" sz="1400" dirty="0">
+                <a:solidFill>
+                  <a:srgbClr val="3D3A36"/>
+                </a:solidFill>
+                <a:latin typeface="Calibri" pitchFamily="34" charset="0"/>
+                <a:ea typeface="Calibri" pitchFamily="34" charset="-122"/>
+                <a:cs typeface="Calibri" pitchFamily="34" charset="-120"/>
+              </a:rPr>
+              <a:t>Key: questions must be clear, unbiased, with limited options</a:t>
+            </a:r>
+            <a:endParaRPr lang="en-US" sz="1400" dirty="0"/>
+          </a:p>
+        </p:txBody>
+      </p:sp>
+      <p:sp>
+        <p:nvSpPr>
+          <p:cNvPr id="6" name="Shape 4"/>
+          <p:cNvSpPr/>
+          <p:nvPr/>
+        </p:nvSpPr>
+        <p:spPr>
+          <a:xfrm>
+            <a:off x="4846320" y="1188720"/>
+            <a:ext cx="3840480" cy="3474720"/>
+          </a:xfrm>
+          <a:prstGeom prst="rect">
+            <a:avLst/>
+          </a:prstGeom>
+          <a:solidFill>
+            <a:srgbClr val="FFFFFF"/>
+          </a:solidFill>
+          <a:ln w="12700">
+            <a:solidFill>
+              <a:srgbClr val="E5E2DC"/>
+            </a:solidFill>
+            <a:prstDash val="solid"/>
+          </a:ln>
+          <a:effectLst>
+            <a:outerShdw sx="100000" sy="100000" kx="0" ky="0" algn="bl" rotWithShape="0" blurRad="50800" dist="25400" dir="8100000">
+              <a:srgbClr val="000000">
+                <a:alpha val="10000"/>
+              </a:srgbClr>
+            </a:outerShdw>
+          </a:effectLst>
+        </p:spPr>
+      </p:sp>
+      <p:sp>
+        <p:nvSpPr>
+          <p:cNvPr id="7" name="Shape 5"/>
+          <p:cNvSpPr/>
+          <p:nvPr/>
+        </p:nvSpPr>
+        <p:spPr>
+          <a:xfrm>
+            <a:off x="4846320" y="1188720"/>
+            <a:ext cx="3840480" cy="54864"/>
+          </a:xfrm>
+          <a:prstGeom prst="rect">
+            <a:avLst/>
+          </a:prstGeom>
+          <a:solidFill>
+            <a:srgbClr val="2A9D8F"/>
+          </a:solidFill>
+          <a:ln/>
+        </p:spPr>
+      </p:sp>
+      <p:sp>
+        <p:nvSpPr>
+          <p:cNvPr id="8" name="Text 6"/>
+          <p:cNvSpPr/>
+          <p:nvPr/>
+        </p:nvSpPr>
+        <p:spPr>
+          <a:xfrm>
+            <a:off x="5120640" y="1371600"/>
+            <a:ext cx="3291840" cy="3108960"/>
+          </a:xfrm>
+          <a:prstGeom prst="rect">
+            <a:avLst/>
+          </a:prstGeom>
+          <a:noFill/>
+          <a:ln/>
+        </p:spPr>
+        <p:txBody>
+          <a:bodyPr wrap="square" rtlCol="0" anchor="t"/>
+          <a:lstStyle/>
+          <a:p>
+            <a:pPr indent="0" marL="0">
+              <a:spcAft>
+                <a:spcPts val="400"/>
+              </a:spcAft>
+              <a:buNone/>
+            </a:pPr>
+            <a:r>
+              <a:rPr lang="en-US" sz="1600" b="1" dirty="0">
+                <a:solidFill>
+                  <a:srgbClr val="1B2A4A"/>
+                </a:solidFill>
+                <a:latin typeface="Calibri" pitchFamily="34" charset="0"/>
+                <a:ea typeface="Calibri" pitchFamily="34" charset="-122"/>
+                <a:cs typeface="Calibri" pitchFamily="34" charset="-120"/>
+              </a:rPr>
+              <a:t>Organising Data</a:t>
+            </a:r>
+            <a:endParaRPr lang="en-US" sz="1600" dirty="0"/>
+          </a:p>
+          <a:p>
+            <a:pPr indent="0" marL="0">
+              <a:spcAft>
+                <a:spcPts val="400"/>
+              </a:spcAft>
+              <a:buNone/>
+            </a:pPr>
+            <a:endParaRPr lang="en-US" sz="1600" dirty="0"/>
+          </a:p>
+          <a:p>
+            <a:pPr indent="0" marL="0">
+              <a:spcAft>
+                <a:spcPts val="400"/>
+              </a:spcAft>
+              <a:buNone/>
+            </a:pPr>
+            <a:r>
+              <a:rPr lang="en-US" sz="1300" dirty="0">
+                <a:solidFill>
+                  <a:srgbClr val="3D3A36"/>
+                </a:solidFill>
+                <a:latin typeface="Calibri" pitchFamily="34" charset="0"/>
+                <a:ea typeface="Calibri" pitchFamily="34" charset="-122"/>
+                <a:cs typeface="Calibri" pitchFamily="34" charset="-120"/>
+              </a:rPr>
+              <a:t>Tally charts: quick counting, group in fives</a:t>
+            </a:r>
+            <a:endParaRPr lang="en-US" sz="1600" dirty="0"/>
+          </a:p>
+          <a:p>
+            <a:pPr indent="0" marL="0">
+              <a:spcAft>
+                <a:spcPts val="400"/>
+              </a:spcAft>
+              <a:buNone/>
+            </a:pPr>
+            <a:r>
+              <a:rPr lang="en-US" sz="1300" dirty="0">
+                <a:solidFill>
+                  <a:srgbClr val="3D3A36"/>
+                </a:solidFill>
+                <a:latin typeface="Calibri" pitchFamily="34" charset="0"/>
+                <a:ea typeface="Calibri" pitchFamily="34" charset="-122"/>
+                <a:cs typeface="Calibri" pitchFamily="34" charset="-120"/>
+              </a:rPr>
+              <a:t>Frequency tables: list categories with their counts</a:t>
+            </a:r>
+            <a:endParaRPr lang="en-US" sz="1600" dirty="0"/>
+          </a:p>
+          <a:p>
+            <a:pPr indent="0" marL="0">
+              <a:spcAft>
+                <a:spcPts val="400"/>
+              </a:spcAft>
+              <a:buNone/>
+            </a:pPr>
+            <a:r>
+              <a:rPr lang="en-US" sz="1300" dirty="0">
+                <a:solidFill>
+                  <a:srgbClr val="3D3A36"/>
+                </a:solidFill>
+                <a:latin typeface="Calibri" pitchFamily="34" charset="0"/>
+                <a:ea typeface="Calibri" pitchFamily="34" charset="-122"/>
+                <a:cs typeface="Calibri" pitchFamily="34" charset="-120"/>
+              </a:rPr>
+              <a:t>Two-way tables: compare two categories</a:t>
+            </a:r>
+            <a:endParaRPr lang="en-US" sz="1600" dirty="0"/>
+          </a:p>
+          <a:p>
+            <a:pPr indent="0" marL="0">
+              <a:spcAft>
+                <a:spcPts val="400"/>
+              </a:spcAft>
+              <a:buNone/>
+            </a:pPr>
+            <a:r>
+              <a:rPr lang="en-US" sz="1300" dirty="0">
+                <a:solidFill>
+                  <a:srgbClr val="3D3A36"/>
+                </a:solidFill>
+                <a:latin typeface="Calibri" pitchFamily="34" charset="0"/>
+                <a:ea typeface="Calibri" pitchFamily="34" charset="-122"/>
+                <a:cs typeface="Calibri" pitchFamily="34" charset="-120"/>
+              </a:rPr>
+              <a:t>Grouped frequency tables: for continuous data (e.g. 0–9, 10–19, 20–29)</a:t>
+            </a:r>
+            <a:endParaRPr lang="en-US" sz="1600" dirty="0"/>
+          </a:p>
+          <a:p>
+            <a:pPr indent="0" marL="0">
+              <a:spcAft>
+                <a:spcPts val="400"/>
+              </a:spcAft>
+              <a:buNone/>
+            </a:pPr>
+            <a:r>
+              <a:rPr lang="en-US" sz="1300" dirty="0">
+                <a:solidFill>
+                  <a:srgbClr val="3D3A36"/>
+                </a:solidFill>
+                <a:latin typeface="Calibri" pitchFamily="34" charset="0"/>
+                <a:ea typeface="Calibri" pitchFamily="34" charset="-122"/>
+                <a:cs typeface="Calibri" pitchFamily="34" charset="-120"/>
+              </a:rPr>
+              <a:t>Choose groups of equal width, no gaps, no overlaps</a:t>
+            </a:r>
+            <a:endParaRPr lang="en-US" sz="1600" dirty="0"/>
+          </a:p>
+        </p:txBody>
+      </p:sp>
+    </p:spTree>
+  </p:cSld>
+  <p:clrMapOvr>
+    <a:masterClrMapping/>
+  </p:clrMapOvr>
+</p:sld>
+</file>
+
+<file path=ppt/slides/slide5.xml><?xml version="1.0" encoding="utf-8"?>
+<p:sld xmlns:a="http://schemas.openxmlformats.org/drawingml/2006/main" xmlns:r="http://schemas.openxmlformats.org/officeDocument/2006/relationships" xmlns:p="http://schemas.openxmlformats.org/presentationml/2006/main">
+  <p:cSld name="Slide 5">
     <p:bg>
       <p:bgPr>
         <a:solidFill>
@@ -1849,13 +2635,13 @@
         <p:spPr>
           <a:xfrm>
             <a:off x="0" y="0"/>
-            <a:ext cx="9144000" cy="54864"/>
-          </a:xfrm>
-          <a:prstGeom prst="rect">
-            <a:avLst/>
-          </a:prstGeom>
-          <a:solidFill>
-            <a:srgbClr val="2A9D8F"/>
+            <a:ext cx="109728" cy="5143500"/>
+          </a:xfrm>
+          <a:prstGeom prst="rect">
+            <a:avLst/>
+          </a:prstGeom>
+          <a:solidFill>
+            <a:srgbClr val="E9C46A"/>
           </a:solidFill>
           <a:ln/>
         </p:spPr>
@@ -1868,8 +2654,8 @@
         </p:nvSpPr>
         <p:spPr>
           <a:xfrm>
-            <a:off x="548640" y="457200"/>
-            <a:ext cx="8046720" cy="640080"/>
+            <a:off x="731520" y="457200"/>
+            <a:ext cx="7772400" cy="731520"/>
           </a:xfrm>
           <a:prstGeom prst="rect">
             <a:avLst/>
@@ -1885,7 +2671,7 @@
               <a:buNone/>
             </a:pPr>
             <a:r>
-              <a:rPr lang="en-US" sz="2800" b="1" dirty="0">
+              <a:rPr lang="en-US" sz="3200" b="1" dirty="0">
                 <a:solidFill>
                   <a:srgbClr val="FFFFFF"/>
                 </a:solidFill>
@@ -1895,7 +2681,7 @@
               </a:rPr>
               <a:t>Key Takeaways</a:t>
             </a:r>
-            <a:endParaRPr lang="en-US" sz="2800" dirty="0"/>
+            <a:endParaRPr lang="en-US" sz="3200" dirty="0"/>
           </a:p>
         </p:txBody>
       </p:sp>
@@ -1907,8 +2693,8 @@
         </p:nvSpPr>
         <p:spPr>
           <a:xfrm>
-            <a:off x="731520" y="1371600"/>
-            <a:ext cx="7680960" cy="3200400"/>
+            <a:off x="731520" y="1463040"/>
+            <a:ext cx="7772400" cy="3200400"/>
           </a:xfrm>
           <a:prstGeom prst="rect">
             <a:avLst/>
@@ -1928,7 +2714,7 @@
               <a:buChar char="•"/>
             </a:pPr>
             <a:r>
-              <a:rPr lang="en-US" sz="1600" dirty="0">
+              <a:rPr lang="en-US" sz="1500" dirty="0">
                 <a:solidFill>
                   <a:srgbClr val="CADCFC"/>
                 </a:solidFill>
@@ -1936,9 +2722,9 @@
                 <a:ea typeface="Calibri" pitchFamily="34" charset="-122"/>
                 <a:cs typeface="Calibri" pitchFamily="34" charset="-120"/>
               </a:rPr>
-              <a:t>Data can be qualitative or quantitative (discrete or continuous)</a:t>
-            </a:r>
-            <a:endParaRPr lang="en-US" sz="1600" dirty="0"/>
+              <a:t>Qualitative = descriptive; quantitative = numerical (discrete or continuous)</a:t>
+            </a:r>
+            <a:endParaRPr lang="en-US" sz="1500" dirty="0"/>
           </a:p>
           <a:p>
             <a:pPr marL="342900" indent="-342900">
@@ -1949,7 +2735,7 @@
               <a:buChar char="•"/>
             </a:pPr>
             <a:r>
-              <a:rPr lang="en-US" sz="1600" dirty="0">
+              <a:rPr lang="en-US" sz="1500" dirty="0">
                 <a:solidFill>
                   <a:srgbClr val="CADCFC"/>
                 </a:solidFill>
@@ -1957,9 +2743,9 @@
                 <a:ea typeface="Calibri" pitchFamily="34" charset="-122"/>
                 <a:cs typeface="Calibri" pitchFamily="34" charset="-120"/>
               </a:rPr>
-              <a:t>Use tally charts and frequency tables to organise data</a:t>
-            </a:r>
-            <a:endParaRPr lang="en-US" sz="1600" dirty="0"/>
+              <a:t>Good surveys: clear questions, no bias, appropriate sample size</a:t>
+            </a:r>
+            <a:endParaRPr lang="en-US" sz="1500" dirty="0"/>
           </a:p>
           <a:p>
             <a:pPr marL="342900" indent="-342900">
@@ -1970,7 +2756,7 @@
               <a:buChar char="•"/>
             </a:pPr>
             <a:r>
-              <a:rPr lang="en-US" sz="1600" dirty="0">
+              <a:rPr lang="en-US" sz="1500" dirty="0">
                 <a:solidFill>
                   <a:srgbClr val="CADCFC"/>
                 </a:solidFill>
@@ -1978,9 +2764,9 @@
                 <a:ea typeface="Calibri" pitchFamily="34" charset="-122"/>
                 <a:cs typeface="Calibri" pitchFamily="34" charset="-120"/>
               </a:rPr>
-              <a:t>Primary = you collect; Secondary = others collected</a:t>
-            </a:r>
-            <a:endParaRPr lang="en-US" sz="1600" dirty="0"/>
+              <a:t>Tally charts, frequency tables, two-way tables for organising</a:t>
+            </a:r>
+            <a:endParaRPr lang="en-US" sz="1500" dirty="0"/>
           </a:p>
           <a:p>
             <a:pPr marL="342900" indent="-342900">
@@ -1991,7 +2777,7 @@
               <a:buChar char="•"/>
             </a:pPr>
             <a:r>
-              <a:rPr lang="en-US" sz="1600" dirty="0">
+              <a:rPr lang="en-US" sz="1500" dirty="0">
                 <a:solidFill>
                   <a:srgbClr val="CADCFC"/>
                 </a:solidFill>
@@ -1999,9 +2785,30 @@
                 <a:ea typeface="Calibri" pitchFamily="34" charset="-122"/>
                 <a:cs typeface="Calibri" pitchFamily="34" charset="-120"/>
               </a:rPr>
-              <a:t>Avoid bias: ask fair questions, use random samples</a:t>
-            </a:r>
-            <a:endParaRPr lang="en-US" sz="1600" dirty="0"/>
+              <a:t>Grouped data: equal width groups, no gaps or overlaps</a:t>
+            </a:r>
+            <a:endParaRPr lang="en-US" sz="1500" dirty="0"/>
+          </a:p>
+          <a:p>
+            <a:pPr marL="342900" indent="-342900">
+              <a:spcAft>
+                <a:spcPts val="1000"/>
+              </a:spcAft>
+              <a:buSzPct val="100000"/>
+              <a:buChar char="•"/>
+            </a:pPr>
+            <a:r>
+              <a:rPr lang="en-US" sz="1500" dirty="0">
+                <a:solidFill>
+                  <a:srgbClr val="CADCFC"/>
+                </a:solidFill>
+                <a:latin typeface="Calibri" pitchFamily="34" charset="0"/>
+                <a:ea typeface="Calibri" pitchFamily="34" charset="-122"/>
+                <a:cs typeface="Calibri" pitchFamily="34" charset="-120"/>
+              </a:rPr>
+              <a:t>Always consider whether data collection method is fair and reliable</a:t>
+            </a:r>
+            <a:endParaRPr lang="en-US" sz="1500" dirty="0"/>
           </a:p>
         </p:txBody>
       </p:sp>
@@ -2013,8 +2820,8 @@
         </p:nvSpPr>
         <p:spPr>
           <a:xfrm>
-            <a:off x="548640" y="4572000"/>
-            <a:ext cx="3657600" cy="274320"/>
+            <a:off x="731520" y="4572000"/>
+            <a:ext cx="7772400" cy="365760"/>
           </a:xfrm>
           <a:prstGeom prst="rect">
             <a:avLst/>
@@ -2030,14 +2837,17 @@
               <a:buNone/>
             </a:pPr>
             <a:r>
-              <a:rPr lang="en-US" sz="1000" dirty="0">
-                <a:solidFill>
-                  <a:srgbClr val="6B6660"/>
-                </a:solidFill>
+              <a:rPr lang="en-US" sz="1100" dirty="0">
+                <a:solidFill>
+                  <a:srgbClr val="E9C46A"/>
+                </a:solidFill>
+                <a:latin typeface="Calibri" pitchFamily="34" charset="0"/>
+                <a:ea typeface="Calibri" pitchFamily="34" charset="-122"/>
+                <a:cs typeface="Calibri" pitchFamily="34" charset="-120"/>
               </a:rPr>
               <a:t>mrzocchi.com</a:t>
             </a:r>
-            <a:endParaRPr lang="en-US" sz="1000" dirty="0"/>
+            <a:endParaRPr lang="en-US" sz="1100" dirty="0"/>
           </a:p>
         </p:txBody>
       </p:sp>

--- a/static/ppts/G6_Math_T5_Collecting_Data.pptx
+++ b/static/ppts/G6_Math_T5_Collecting_Data.pptx
@@ -10,9 +10,11 @@
     <p:sldId id="258" r:id="rId4"/>
     <p:sldId id="259" r:id="rId5"/>
     <p:sldId id="260" r:id="rId6"/>
+    <p:sldId id="261" r:id="rId7"/>
+    <p:sldId id="262" r:id="rId8"/>
   </p:sldIdLst>
   <p:notesMasterIdLst>
-    <p:notesMasterId r:id="rId7"/>
+    <p:notesMasterId r:id="rId9"/>
   </p:notesMasterIdLst>
   <p:sldSz cx="9144000" cy="5143500"/>
   <p:notesSz cx="5143500" cy="9144000"/>
@@ -900,6 +902,182 @@
 </p:notes>
 </file>
 
+<file path=ppt/notesSlides/notesSlide6.xml><?xml version="1.0" encoding="utf-8"?>
+<p:notes xmlns:a="http://schemas.openxmlformats.org/drawingml/2006/main" xmlns:r="http://schemas.openxmlformats.org/officeDocument/2006/relationships" xmlns:p="http://schemas.openxmlformats.org/presentationml/2006/main">
+  <p:cSld>
+    <p:spTree>
+      <p:nvGrpSpPr>
+        <p:cNvPr id="1" name=""/>
+        <p:cNvGrpSpPr/>
+        <p:nvPr/>
+      </p:nvGrpSpPr>
+      <p:grpSpPr>
+        <a:xfrm>
+          <a:off x="0" y="0"/>
+          <a:ext cx="0" cy="0"/>
+          <a:chOff x="0" y="0"/>
+          <a:chExt cx="0" cy="0"/>
+        </a:xfrm>
+      </p:grpSpPr>
+      <p:sp>
+        <p:nvSpPr>
+          <p:cNvPr id="2" name="Slide Image Placeholder 1"/>
+          <p:cNvSpPr>
+            <a:spLocks noGrp="1" noRot="1" noChangeAspect="1"/>
+          </p:cNvSpPr>
+          <p:nvPr>
+            <p:ph type="sldImg"/>
+          </p:nvPr>
+        </p:nvSpPr>
+        <p:spPr/>
+      </p:sp>
+      <p:sp>
+        <p:nvSpPr>
+          <p:cNvPr id="3" name="Notes Placeholder 2"/>
+          <p:cNvSpPr>
+            <a:spLocks noGrp="1"/>
+          </p:cNvSpPr>
+          <p:nvPr>
+            <p:ph type="body" idx="1"/>
+          </p:nvPr>
+        </p:nvSpPr>
+        <p:spPr/>
+        <p:txBody>
+          <a:bodyPr/>
+          <a:lstStyle/>
+          <a:p>
+            <a:r>
+              <a:rPr lang="en-US" dirty="0"/>
+              <a:t/>
+            </a:r>
+            <a:endParaRPr lang="en-US" dirty="0"/>
+          </a:p>
+        </p:txBody>
+      </p:sp>
+      <p:sp>
+        <p:nvSpPr>
+          <p:cNvPr id="4" name="Slide Number Placeholder 3"/>
+          <p:cNvSpPr>
+            <a:spLocks noGrp="1"/>
+          </p:cNvSpPr>
+          <p:nvPr>
+            <p:ph type="sldNum" sz="quarter" idx="10"/>
+          </p:nvPr>
+        </p:nvSpPr>
+        <p:spPr/>
+        <p:txBody>
+          <a:bodyPr/>
+          <a:lstStyle/>
+          <a:p>
+            <a:fld id="{F7021451-1387-4CA6-816F-3879F97B5CBC}" type="slidenum">
+              <a:rPr lang="en-US"/>
+              <a:t>6</a:t>
+            </a:fld>
+            <a:endParaRPr lang="en-US"/>
+          </a:p>
+        </p:txBody>
+      </p:sp>
+    </p:spTree>
+    <p:extLst>
+      <p:ext uri="{BB962C8B-B14F-4D97-AF65-F5344CB8AC3E}">
+        <p14:creationId xmlns:p14="http://schemas.microsoft.com/office/powerpoint/2010/main" val="1024086991"/>
+      </p:ext>
+    </p:extLst>
+  </p:cSld>
+  <p:clrMapOvr>
+    <a:masterClrMapping/>
+  </p:clrMapOvr>
+</p:notes>
+</file>
+
+<file path=ppt/notesSlides/notesSlide7.xml><?xml version="1.0" encoding="utf-8"?>
+<p:notes xmlns:a="http://schemas.openxmlformats.org/drawingml/2006/main" xmlns:r="http://schemas.openxmlformats.org/officeDocument/2006/relationships" xmlns:p="http://schemas.openxmlformats.org/presentationml/2006/main">
+  <p:cSld>
+    <p:spTree>
+      <p:nvGrpSpPr>
+        <p:cNvPr id="1" name=""/>
+        <p:cNvGrpSpPr/>
+        <p:nvPr/>
+      </p:nvGrpSpPr>
+      <p:grpSpPr>
+        <a:xfrm>
+          <a:off x="0" y="0"/>
+          <a:ext cx="0" cy="0"/>
+          <a:chOff x="0" y="0"/>
+          <a:chExt cx="0" cy="0"/>
+        </a:xfrm>
+      </p:grpSpPr>
+      <p:sp>
+        <p:nvSpPr>
+          <p:cNvPr id="2" name="Slide Image Placeholder 1"/>
+          <p:cNvSpPr>
+            <a:spLocks noGrp="1" noRot="1" noChangeAspect="1"/>
+          </p:cNvSpPr>
+          <p:nvPr>
+            <p:ph type="sldImg"/>
+          </p:nvPr>
+        </p:nvSpPr>
+        <p:spPr/>
+      </p:sp>
+      <p:sp>
+        <p:nvSpPr>
+          <p:cNvPr id="3" name="Notes Placeholder 2"/>
+          <p:cNvSpPr>
+            <a:spLocks noGrp="1"/>
+          </p:cNvSpPr>
+          <p:nvPr>
+            <p:ph type="body" idx="1"/>
+          </p:nvPr>
+        </p:nvSpPr>
+        <p:spPr/>
+        <p:txBody>
+          <a:bodyPr/>
+          <a:lstStyle/>
+          <a:p>
+            <a:r>
+              <a:rPr lang="en-US" dirty="0"/>
+              <a:t/>
+            </a:r>
+            <a:endParaRPr lang="en-US" dirty="0"/>
+          </a:p>
+        </p:txBody>
+      </p:sp>
+      <p:sp>
+        <p:nvSpPr>
+          <p:cNvPr id="4" name="Slide Number Placeholder 3"/>
+          <p:cNvSpPr>
+            <a:spLocks noGrp="1"/>
+          </p:cNvSpPr>
+          <p:nvPr>
+            <p:ph type="sldNum" sz="quarter" idx="10"/>
+          </p:nvPr>
+        </p:nvSpPr>
+        <p:spPr/>
+        <p:txBody>
+          <a:bodyPr/>
+          <a:lstStyle/>
+          <a:p>
+            <a:fld id="{F7021451-1387-4CA6-816F-3879F97B5CBC}" type="slidenum">
+              <a:rPr lang="en-US"/>
+              <a:t>7</a:t>
+            </a:fld>
+            <a:endParaRPr lang="en-US"/>
+          </a:p>
+        </p:txBody>
+      </p:sp>
+    </p:spTree>
+    <p:extLst>
+      <p:ext uri="{BB962C8B-B14F-4D97-AF65-F5344CB8AC3E}">
+        <p14:creationId xmlns:p14="http://schemas.microsoft.com/office/powerpoint/2010/main" val="1024086991"/>
+      </p:ext>
+    </p:extLst>
+  </p:cSld>
+  <p:clrMapOvr>
+    <a:masterClrMapping/>
+  </p:clrMapOvr>
+</p:notes>
+</file>
+
 <file path=ppt/slideLayouts/slideLayout1.xml><?xml version="1.0" encoding="utf-8"?>
 <p:sldLayout xmlns:a="http://schemas.openxmlformats.org/drawingml/2006/main" xmlns:r="http://schemas.openxmlformats.org/officeDocument/2006/relationships" xmlns:p="http://schemas.openxmlformats.org/presentationml/2006/main" preserve="1">
   <p:cSld name="DEFAULT">
@@ -1210,13 +1388,6 @@
 <file path=ppt/slides/slide1.xml><?xml version="1.0" encoding="utf-8"?>
 <p:sld xmlns:a="http://schemas.openxmlformats.org/drawingml/2006/main" xmlns:r="http://schemas.openxmlformats.org/officeDocument/2006/relationships" xmlns:p="http://schemas.openxmlformats.org/presentationml/2006/main">
   <p:cSld name="Slide 1">
-    <p:bg>
-      <p:bgPr>
-        <a:solidFill>
-          <a:srgbClr val="1B2A4A"/>
-        </a:solidFill>
-      </p:bgPr>
-    </p:bg>
     <p:spTree>
       <p:nvGrpSpPr>
         <p:cNvPr id="1" name=""/>
@@ -1240,7 +1411,27 @@
         <p:spPr>
           <a:xfrm>
             <a:off x="0" y="0"/>
-            <a:ext cx="109728" cy="5143500"/>
+            <a:ext cx="9144000" cy="5143500"/>
+          </a:xfrm>
+          <a:prstGeom prst="rect">
+            <a:avLst/>
+          </a:prstGeom>
+          <a:solidFill>
+            <a:srgbClr val="1B2A4A"/>
+          </a:solidFill>
+          <a:ln/>
+        </p:spPr>
+      </p:sp>
+      <p:sp>
+        <p:nvSpPr>
+          <p:cNvPr id="3" name="Shape 1"/>
+          <p:cNvSpPr/>
+          <p:nvPr/>
+        </p:nvSpPr>
+        <p:spPr>
+          <a:xfrm>
+            <a:off x="0" y="4777740"/>
+            <a:ext cx="9144000" cy="365760"/>
           </a:xfrm>
           <a:prstGeom prst="rect">
             <a:avLst/>
@@ -1253,14 +1444,36 @@
       </p:sp>
       <p:sp>
         <p:nvSpPr>
-          <p:cNvPr id="3" name="Text 1"/>
-          <p:cNvSpPr/>
-          <p:nvPr/>
-        </p:nvSpPr>
-        <p:spPr>
-          <a:xfrm>
-            <a:off x="731520" y="1097280"/>
-            <a:ext cx="7772400" cy="1371600"/>
+          <p:cNvPr id="4" name="Shape 2"/>
+          <p:cNvSpPr/>
+          <p:nvPr/>
+        </p:nvSpPr>
+        <p:spPr>
+          <a:xfrm>
+            <a:off x="6858000" y="-1371600"/>
+            <a:ext cx="4572000" cy="4572000"/>
+          </a:xfrm>
+          <a:prstGeom prst="ellipse">
+            <a:avLst/>
+          </a:prstGeom>
+          <a:solidFill>
+            <a:srgbClr val="2A9D8F">
+              <a:alpha val="12000"/>
+            </a:srgbClr>
+          </a:solidFill>
+          <a:ln/>
+        </p:spPr>
+      </p:sp>
+      <p:sp>
+        <p:nvSpPr>
+          <p:cNvPr id="5" name="Text 3"/>
+          <p:cNvSpPr/>
+          <p:nvPr/>
+        </p:nvSpPr>
+        <p:spPr>
+          <a:xfrm>
+            <a:off x="731520" y="914400"/>
+            <a:ext cx="7680960" cy="457200"/>
           </a:xfrm>
           <a:prstGeom prst="rect">
             <a:avLst/>
@@ -1276,7 +1489,46 @@
               <a:buNone/>
             </a:pPr>
             <a:r>
-              <a:rPr lang="en-US" sz="4000" b="1" dirty="0">
+              <a:rPr lang="en-US" sz="1300" b="1" spc="500" kern="0" dirty="0">
+                <a:solidFill>
+                  <a:srgbClr val="2A9D8F"/>
+                </a:solidFill>
+                <a:latin typeface="Calibri" pitchFamily="34" charset="0"/>
+                <a:ea typeface="Calibri" pitchFamily="34" charset="-122"/>
+                <a:cs typeface="Calibri" pitchFamily="34" charset="-120"/>
+              </a:rPr>
+              <a:t>GRADE 6 MATHEMATICS</a:t>
+            </a:r>
+            <a:endParaRPr lang="en-US" sz="1300" dirty="0"/>
+          </a:p>
+        </p:txBody>
+      </p:sp>
+      <p:sp>
+        <p:nvSpPr>
+          <p:cNvPr id="6" name="Text 4"/>
+          <p:cNvSpPr/>
+          <p:nvPr/>
+        </p:nvSpPr>
+        <p:spPr>
+          <a:xfrm>
+            <a:off x="731520" y="1463040"/>
+            <a:ext cx="6858000" cy="1645920"/>
+          </a:xfrm>
+          <a:prstGeom prst="rect">
+            <a:avLst/>
+          </a:prstGeom>
+          <a:noFill/>
+          <a:ln/>
+        </p:spPr>
+        <p:txBody>
+          <a:bodyPr wrap="square" rtlCol="0" anchor="t"/>
+          <a:lstStyle/>
+          <a:p>
+            <a:pPr indent="0" marL="0">
+              <a:buNone/>
+            </a:pPr>
+            <a:r>
+              <a:rPr lang="en-US" sz="3800" b="1" dirty="0">
                 <a:solidFill>
                   <a:srgbClr val="FFFFFF"/>
                 </a:solidFill>
@@ -1284,46 +1536,63 @@
                 <a:ea typeface="Georgia" pitchFamily="34" charset="-122"/>
                 <a:cs typeface="Georgia" pitchFamily="34" charset="-120"/>
               </a:rPr>
-              <a:t>Collecting &amp; Organising Data</a:t>
-            </a:r>
-            <a:endParaRPr lang="en-US" sz="4000" dirty="0"/>
-          </a:p>
-        </p:txBody>
-      </p:sp>
-      <p:sp>
-        <p:nvSpPr>
-          <p:cNvPr id="4" name="Text 2"/>
-          <p:cNvSpPr/>
-          <p:nvPr/>
-        </p:nvSpPr>
-        <p:spPr>
-          <a:xfrm>
-            <a:off x="731520" y="2560320"/>
-            <a:ext cx="7772400" cy="548640"/>
-          </a:xfrm>
-          <a:prstGeom prst="rect">
-            <a:avLst/>
-          </a:prstGeom>
-          <a:noFill/>
-          <a:ln/>
-        </p:spPr>
-        <p:txBody>
-          <a:bodyPr wrap="square" rtlCol="0" anchor="ctr"/>
-          <a:lstStyle/>
+              <a:t>Collecting &amp;</a:t>
+            </a:r>
+            <a:endParaRPr lang="en-US" sz="3800" dirty="0"/>
+          </a:p>
           <a:p>
             <a:pPr indent="0" marL="0">
               <a:buNone/>
             </a:pPr>
             <a:r>
-              <a:rPr lang="en-US" sz="1600" dirty="0">
-                <a:solidFill>
-                  <a:srgbClr val="E9C46A"/>
+              <a:rPr lang="en-US" sz="3800" b="1" dirty="0">
+                <a:solidFill>
+                  <a:srgbClr val="FFFFFF"/>
+                </a:solidFill>
+                <a:latin typeface="Georgia" pitchFamily="34" charset="0"/>
+                <a:ea typeface="Georgia" pitchFamily="34" charset="-122"/>
+                <a:cs typeface="Georgia" pitchFamily="34" charset="-120"/>
+              </a:rPr>
+              <a:t>Organising Data</a:t>
+            </a:r>
+            <a:endParaRPr lang="en-US" sz="3800" dirty="0"/>
+          </a:p>
+        </p:txBody>
+      </p:sp>
+      <p:sp>
+        <p:nvSpPr>
+          <p:cNvPr id="7" name="Text 5"/>
+          <p:cNvSpPr/>
+          <p:nvPr/>
+        </p:nvSpPr>
+        <p:spPr>
+          <a:xfrm>
+            <a:off x="731520" y="3200400"/>
+            <a:ext cx="6400800" cy="548640"/>
+          </a:xfrm>
+          <a:prstGeom prst="rect">
+            <a:avLst/>
+          </a:prstGeom>
+          <a:noFill/>
+          <a:ln/>
+        </p:spPr>
+        <p:txBody>
+          <a:bodyPr wrap="square" rtlCol="0" anchor="ctr"/>
+          <a:lstStyle/>
+          <a:p>
+            <a:pPr indent="0" marL="0">
+              <a:buNone/>
+            </a:pPr>
+            <a:r>
+              <a:rPr lang="en-US" sz="1600" i="1" dirty="0">
+                <a:solidFill>
+                  <a:srgbClr val="9B9690"/>
                 </a:solidFill>
                 <a:latin typeface="Calibri" pitchFamily="34" charset="0"/>
                 <a:ea typeface="Calibri" pitchFamily="34" charset="-122"/>
                 <a:cs typeface="Calibri" pitchFamily="34" charset="-120"/>
               </a:rPr>
-              <a:t>Grade 6 Mathematics · Mr Zocchi</a:t>
+              <a:t>Planning surveys and organising results</a:t>
             </a:r>
             <a:endParaRPr lang="en-US" sz="1600" dirty="0"/>
           </a:p>
@@ -1331,36 +1600,14 @@
       </p:sp>
       <p:sp>
         <p:nvSpPr>
-          <p:cNvPr id="5" name="Shape 3"/>
-          <p:cNvSpPr/>
-          <p:nvPr/>
-        </p:nvSpPr>
-        <p:spPr>
-          <a:xfrm>
-            <a:off x="731520" y="3474720"/>
-            <a:ext cx="2011680" cy="411480"/>
-          </a:xfrm>
-          <a:prstGeom prst="roundRect">
-            <a:avLst>
-              <a:gd name="adj" fmla="val 17778"/>
-            </a:avLst>
-          </a:prstGeom>
-          <a:solidFill>
-            <a:srgbClr val="2A9D8F"/>
-          </a:solidFill>
-          <a:ln/>
-        </p:spPr>
-      </p:sp>
-      <p:sp>
-        <p:nvSpPr>
-          <p:cNvPr id="6" name="Text 4"/>
-          <p:cNvSpPr/>
-          <p:nvPr/>
-        </p:nvSpPr>
-        <p:spPr>
-          <a:xfrm>
-            <a:off x="731520" y="3474720"/>
-            <a:ext cx="2011680" cy="411480"/>
+          <p:cNvPr id="8" name="Text 6"/>
+          <p:cNvSpPr/>
+          <p:nvPr/>
+        </p:nvSpPr>
+        <p:spPr>
+          <a:xfrm>
+            <a:off x="731520" y="4297680"/>
+            <a:ext cx="2743200" cy="365760"/>
           </a:xfrm>
           <a:prstGeom prst="rect">
             <a:avLst/>
@@ -1372,21 +1619,21 @@
           <a:bodyPr wrap="square" rtlCol="0" anchor="ctr"/>
           <a:lstStyle/>
           <a:p>
-            <a:pPr algn="ctr" indent="0" marL="0">
+            <a:pPr indent="0" marL="0">
               <a:buNone/>
             </a:pPr>
             <a:r>
-              <a:rPr lang="en-US" sz="1200" b="1" dirty="0">
-                <a:solidFill>
-                  <a:srgbClr val="FFFFFF"/>
+              <a:rPr lang="en-US" sz="1100" dirty="0">
+                <a:solidFill>
+                  <a:srgbClr val="9B9690"/>
                 </a:solidFill>
                 <a:latin typeface="Calibri" pitchFamily="34" charset="0"/>
                 <a:ea typeface="Calibri" pitchFamily="34" charset="-122"/>
                 <a:cs typeface="Calibri" pitchFamily="34" charset="-120"/>
               </a:rPr>
-              <a:t>Term 5 · Probability &amp; Statistics</a:t>
-            </a:r>
-            <a:endParaRPr lang="en-US" sz="1200" dirty="0"/>
+              <a:t>mrzocchi.com</a:t>
+            </a:r>
+            <a:endParaRPr lang="en-US" sz="1100" dirty="0"/>
           </a:p>
         </p:txBody>
       </p:sp>
@@ -1431,7 +1678,47 @@
         <p:spPr>
           <a:xfrm>
             <a:off x="0" y="0"/>
-            <a:ext cx="9144000" cy="54864"/>
+            <a:ext cx="9144000" cy="822960"/>
+          </a:xfrm>
+          <a:prstGeom prst="rect">
+            <a:avLst/>
+          </a:prstGeom>
+          <a:solidFill>
+            <a:srgbClr val="FFFFFF"/>
+          </a:solidFill>
+          <a:ln/>
+        </p:spPr>
+      </p:sp>
+      <p:sp>
+        <p:nvSpPr>
+          <p:cNvPr id="3" name="Shape 1"/>
+          <p:cNvSpPr/>
+          <p:nvPr/>
+        </p:nvSpPr>
+        <p:spPr>
+          <a:xfrm>
+            <a:off x="0" y="804672"/>
+            <a:ext cx="9144000" cy="27432"/>
+          </a:xfrm>
+          <a:prstGeom prst="rect">
+            <a:avLst/>
+          </a:prstGeom>
+          <a:solidFill>
+            <a:srgbClr val="E5E2DC"/>
+          </a:solidFill>
+          <a:ln/>
+        </p:spPr>
+      </p:sp>
+      <p:sp>
+        <p:nvSpPr>
+          <p:cNvPr id="4" name="Shape 2"/>
+          <p:cNvSpPr/>
+          <p:nvPr/>
+        </p:nvSpPr>
+        <p:spPr>
+          <a:xfrm>
+            <a:off x="548640" y="201168"/>
+            <a:ext cx="54864" cy="420624"/>
           </a:xfrm>
           <a:prstGeom prst="rect">
             <a:avLst/>
@@ -1444,14 +1731,14 @@
       </p:sp>
       <p:sp>
         <p:nvSpPr>
-          <p:cNvPr id="3" name="Text 1"/>
-          <p:cNvSpPr/>
-          <p:nvPr/>
-        </p:nvSpPr>
-        <p:spPr>
-          <a:xfrm>
-            <a:off x="7772400" y="4709160"/>
-            <a:ext cx="1097280" cy="320040"/>
+          <p:cNvPr id="5" name="Text 3"/>
+          <p:cNvSpPr/>
+          <p:nvPr/>
+        </p:nvSpPr>
+        <p:spPr>
+          <a:xfrm>
+            <a:off x="777240" y="137160"/>
+            <a:ext cx="7772400" cy="548640"/>
           </a:xfrm>
           <a:prstGeom prst="rect">
             <a:avLst/>
@@ -1460,37 +1747,37 @@
           <a:ln/>
         </p:spPr>
         <p:txBody>
-          <a:bodyPr wrap="square" rtlCol="0" anchor="ctr"/>
-          <a:lstStyle/>
-          <a:p>
-            <a:pPr algn="r" indent="0" marL="0">
+          <a:bodyPr wrap="square" lIns="0" tIns="0" rIns="0" bIns="0" rtlCol="0" anchor="ctr"/>
+          <a:lstStyle/>
+          <a:p>
+            <a:pPr indent="0" marL="0">
               <a:buNone/>
             </a:pPr>
             <a:r>
-              <a:rPr lang="en-US" sz="900" dirty="0">
-                <a:solidFill>
-                  <a:srgbClr val="6B6660"/>
-                </a:solidFill>
-                <a:latin typeface="Calibri" pitchFamily="34" charset="0"/>
-                <a:ea typeface="Calibri" pitchFamily="34" charset="-122"/>
-                <a:cs typeface="Calibri" pitchFamily="34" charset="-120"/>
-              </a:rPr>
-              <a:t>2 / 5</a:t>
-            </a:r>
-            <a:endParaRPr lang="en-US" sz="900" dirty="0"/>
-          </a:p>
-        </p:txBody>
-      </p:sp>
-      <p:sp>
-        <p:nvSpPr>
-          <p:cNvPr id="4" name="Shape 2"/>
-          <p:cNvSpPr/>
-          <p:nvPr/>
-        </p:nvSpPr>
-        <p:spPr>
-          <a:xfrm>
-            <a:off x="1371600" y="914400"/>
-            <a:ext cx="6400800" cy="3200400"/>
+              <a:rPr lang="en-US" sz="2000" b="1" dirty="0">
+                <a:solidFill>
+                  <a:srgbClr val="1B2A4A"/>
+                </a:solidFill>
+                <a:latin typeface="Georgia" pitchFamily="34" charset="0"/>
+                <a:ea typeface="Georgia" pitchFamily="34" charset="-122"/>
+                <a:cs typeface="Georgia" pitchFamily="34" charset="-120"/>
+              </a:rPr>
+              <a:t>Key Vocabulary</a:t>
+            </a:r>
+            <a:endParaRPr lang="en-US" sz="2000" dirty="0"/>
+          </a:p>
+        </p:txBody>
+      </p:sp>
+      <p:sp>
+        <p:nvSpPr>
+          <p:cNvPr id="6" name="Shape 4"/>
+          <p:cNvSpPr/>
+          <p:nvPr/>
+        </p:nvSpPr>
+        <p:spPr>
+          <a:xfrm>
+            <a:off x="731520" y="1051560"/>
+            <a:ext cx="3657600" cy="658368"/>
           </a:xfrm>
           <a:prstGeom prst="rect">
             <a:avLst/>
@@ -1498,12 +1785,7 @@
           <a:solidFill>
             <a:srgbClr val="FFFFFF"/>
           </a:solidFill>
-          <a:ln w="12700">
-            <a:solidFill>
-              <a:srgbClr val="E5E2DC"/>
-            </a:solidFill>
-            <a:prstDash val="solid"/>
-          </a:ln>
+          <a:ln/>
           <a:effectLst>
             <a:outerShdw sx="100000" sy="100000" kx="0" ky="0" algn="bl" rotWithShape="0" blurRad="50800" dist="25400" dir="8100000">
               <a:srgbClr val="000000">
@@ -1515,14 +1797,14 @@
       </p:sp>
       <p:sp>
         <p:nvSpPr>
-          <p:cNvPr id="5" name="Shape 3"/>
-          <p:cNvSpPr/>
-          <p:nvPr/>
-        </p:nvSpPr>
-        <p:spPr>
-          <a:xfrm>
-            <a:off x="1371600" y="914400"/>
-            <a:ext cx="91440" cy="3200400"/>
+          <p:cNvPr id="7" name="Shape 5"/>
+          <p:cNvSpPr/>
+          <p:nvPr/>
+        </p:nvSpPr>
+        <p:spPr>
+          <a:xfrm>
+            <a:off x="731520" y="1051560"/>
+            <a:ext cx="54864" cy="658368"/>
           </a:xfrm>
           <a:prstGeom prst="rect">
             <a:avLst/>
@@ -1535,14 +1817,14 @@
       </p:sp>
       <p:sp>
         <p:nvSpPr>
-          <p:cNvPr id="6" name="Text 4"/>
-          <p:cNvSpPr/>
-          <p:nvPr/>
-        </p:nvSpPr>
-        <p:spPr>
-          <a:xfrm>
-            <a:off x="1828800" y="1097280"/>
-            <a:ext cx="5669280" cy="640080"/>
+          <p:cNvPr id="8" name="Text 6"/>
+          <p:cNvSpPr/>
+          <p:nvPr/>
+        </p:nvSpPr>
+        <p:spPr>
+          <a:xfrm>
+            <a:off x="914400" y="1051560"/>
+            <a:ext cx="1463040" cy="658368"/>
           </a:xfrm>
           <a:prstGeom prst="rect">
             <a:avLst/>
@@ -1551,14 +1833,14 @@
           <a:ln/>
         </p:spPr>
         <p:txBody>
-          <a:bodyPr wrap="square" rtlCol="0" anchor="ctr"/>
+          <a:bodyPr wrap="square" lIns="0" tIns="0" rIns="0" bIns="0" rtlCol="0" anchor="ctr"/>
           <a:lstStyle/>
           <a:p>
             <a:pPr indent="0" marL="0">
               <a:buNone/>
             </a:pPr>
             <a:r>
-              <a:rPr lang="en-US" sz="2400" b="1" dirty="0">
+              <a:rPr lang="en-US" sz="1300" b="1" dirty="0">
                 <a:solidFill>
                   <a:srgbClr val="1B2A4A"/>
                 </a:solidFill>
@@ -1566,22 +1848,22 @@
                 <a:ea typeface="Georgia" pitchFamily="34" charset="-122"/>
                 <a:cs typeface="Georgia" pitchFamily="34" charset="-120"/>
               </a:rPr>
-              <a:t>Data Collection</a:t>
-            </a:r>
-            <a:endParaRPr lang="en-US" sz="2400" dirty="0"/>
-          </a:p>
-        </p:txBody>
-      </p:sp>
-      <p:sp>
-        <p:nvSpPr>
-          <p:cNvPr id="7" name="Text 5"/>
-          <p:cNvSpPr/>
-          <p:nvPr/>
-        </p:nvSpPr>
-        <p:spPr>
-          <a:xfrm>
-            <a:off x="1828800" y="1828800"/>
-            <a:ext cx="5669280" cy="2011680"/>
+              <a:t>Data</a:t>
+            </a:r>
+            <a:endParaRPr lang="en-US" sz="1300" dirty="0"/>
+          </a:p>
+        </p:txBody>
+      </p:sp>
+      <p:sp>
+        <p:nvSpPr>
+          <p:cNvPr id="9" name="Text 7"/>
+          <p:cNvSpPr/>
+          <p:nvPr/>
+        </p:nvSpPr>
+        <p:spPr>
+          <a:xfrm>
+            <a:off x="2377440" y="1051560"/>
+            <a:ext cx="1920240" cy="658368"/>
           </a:xfrm>
           <a:prstGeom prst="rect">
             <a:avLst/>
@@ -1590,27 +1872,649 @@
           <a:ln/>
         </p:spPr>
         <p:txBody>
-          <a:bodyPr wrap="square" rtlCol="0" anchor="t"/>
+          <a:bodyPr wrap="square" lIns="0" tIns="0" rIns="0" bIns="0" rtlCol="0" anchor="ctr"/>
           <a:lstStyle/>
           <a:p>
             <a:pPr indent="0" marL="0">
-              <a:lnSpc>
-                <a:spcPct val="130000"/>
-              </a:lnSpc>
               <a:buNone/>
             </a:pPr>
             <a:r>
-              <a:rPr lang="en-US" sz="1500" dirty="0">
-                <a:solidFill>
-                  <a:srgbClr val="3D3A36"/>
+              <a:rPr lang="en-US" sz="1100" dirty="0">
+                <a:solidFill>
+                  <a:srgbClr val="6B6660"/>
                 </a:solidFill>
                 <a:latin typeface="Calibri" pitchFamily="34" charset="0"/>
                 <a:ea typeface="Calibri" pitchFamily="34" charset="-122"/>
                 <a:cs typeface="Calibri" pitchFamily="34" charset="-120"/>
               </a:rPr>
-              <a:t>Statistics is about collecting, organising, and interpreting data to answer questions. Good data collection uses clear questions, appropriate methods, and large enough samples. The two main types of data are qualitative (descriptive) and quantitative (numerical).</a:t>
-            </a:r>
-            <a:endParaRPr lang="en-US" sz="1500" dirty="0"/>
+              <a:t>Information collected for analysis</a:t>
+            </a:r>
+            <a:endParaRPr lang="en-US" sz="1100" dirty="0"/>
+          </a:p>
+        </p:txBody>
+      </p:sp>
+      <p:sp>
+        <p:nvSpPr>
+          <p:cNvPr id="10" name="Shape 8"/>
+          <p:cNvSpPr/>
+          <p:nvPr/>
+        </p:nvSpPr>
+        <p:spPr>
+          <a:xfrm>
+            <a:off x="4754880" y="1051560"/>
+            <a:ext cx="3657600" cy="658368"/>
+          </a:xfrm>
+          <a:prstGeom prst="rect">
+            <a:avLst/>
+          </a:prstGeom>
+          <a:solidFill>
+            <a:srgbClr val="FFFFFF"/>
+          </a:solidFill>
+          <a:ln/>
+          <a:effectLst>
+            <a:outerShdw sx="100000" sy="100000" kx="0" ky="0" algn="bl" rotWithShape="0" blurRad="50800" dist="25400" dir="8100000">
+              <a:srgbClr val="000000">
+                <a:alpha val="10000"/>
+              </a:srgbClr>
+            </a:outerShdw>
+          </a:effectLst>
+        </p:spPr>
+      </p:sp>
+      <p:sp>
+        <p:nvSpPr>
+          <p:cNvPr id="11" name="Shape 9"/>
+          <p:cNvSpPr/>
+          <p:nvPr/>
+        </p:nvSpPr>
+        <p:spPr>
+          <a:xfrm>
+            <a:off x="4754880" y="1051560"/>
+            <a:ext cx="54864" cy="658368"/>
+          </a:xfrm>
+          <a:prstGeom prst="rect">
+            <a:avLst/>
+          </a:prstGeom>
+          <a:solidFill>
+            <a:srgbClr val="2A9D8F"/>
+          </a:solidFill>
+          <a:ln/>
+        </p:spPr>
+      </p:sp>
+      <p:sp>
+        <p:nvSpPr>
+          <p:cNvPr id="12" name="Text 10"/>
+          <p:cNvSpPr/>
+          <p:nvPr/>
+        </p:nvSpPr>
+        <p:spPr>
+          <a:xfrm>
+            <a:off x="4937760" y="1051560"/>
+            <a:ext cx="1463040" cy="658368"/>
+          </a:xfrm>
+          <a:prstGeom prst="rect">
+            <a:avLst/>
+          </a:prstGeom>
+          <a:noFill/>
+          <a:ln/>
+        </p:spPr>
+        <p:txBody>
+          <a:bodyPr wrap="square" lIns="0" tIns="0" rIns="0" bIns="0" rtlCol="0" anchor="ctr"/>
+          <a:lstStyle/>
+          <a:p>
+            <a:pPr indent="0" marL="0">
+              <a:buNone/>
+            </a:pPr>
+            <a:r>
+              <a:rPr lang="en-US" sz="1300" b="1" dirty="0">
+                <a:solidFill>
+                  <a:srgbClr val="1B2A4A"/>
+                </a:solidFill>
+                <a:latin typeface="Georgia" pitchFamily="34" charset="0"/>
+                <a:ea typeface="Georgia" pitchFamily="34" charset="-122"/>
+                <a:cs typeface="Georgia" pitchFamily="34" charset="-120"/>
+              </a:rPr>
+              <a:t>Survey</a:t>
+            </a:r>
+            <a:endParaRPr lang="en-US" sz="1300" dirty="0"/>
+          </a:p>
+        </p:txBody>
+      </p:sp>
+      <p:sp>
+        <p:nvSpPr>
+          <p:cNvPr id="13" name="Text 11"/>
+          <p:cNvSpPr/>
+          <p:nvPr/>
+        </p:nvSpPr>
+        <p:spPr>
+          <a:xfrm>
+            <a:off x="6400800" y="1051560"/>
+            <a:ext cx="1920240" cy="658368"/>
+          </a:xfrm>
+          <a:prstGeom prst="rect">
+            <a:avLst/>
+          </a:prstGeom>
+          <a:noFill/>
+          <a:ln/>
+        </p:spPr>
+        <p:txBody>
+          <a:bodyPr wrap="square" lIns="0" tIns="0" rIns="0" bIns="0" rtlCol="0" anchor="ctr"/>
+          <a:lstStyle/>
+          <a:p>
+            <a:pPr indent="0" marL="0">
+              <a:buNone/>
+            </a:pPr>
+            <a:r>
+              <a:rPr lang="en-US" sz="1100" dirty="0">
+                <a:solidFill>
+                  <a:srgbClr val="6B6660"/>
+                </a:solidFill>
+                <a:latin typeface="Calibri" pitchFamily="34" charset="0"/>
+                <a:ea typeface="Calibri" pitchFamily="34" charset="-122"/>
+                <a:cs typeface="Calibri" pitchFamily="34" charset="-120"/>
+              </a:rPr>
+              <a:t>Questions asked to collect data</a:t>
+            </a:r>
+            <a:endParaRPr lang="en-US" sz="1100" dirty="0"/>
+          </a:p>
+        </p:txBody>
+      </p:sp>
+      <p:sp>
+        <p:nvSpPr>
+          <p:cNvPr id="14" name="Shape 12"/>
+          <p:cNvSpPr/>
+          <p:nvPr/>
+        </p:nvSpPr>
+        <p:spPr>
+          <a:xfrm>
+            <a:off x="731520" y="1819656"/>
+            <a:ext cx="3657600" cy="658368"/>
+          </a:xfrm>
+          <a:prstGeom prst="rect">
+            <a:avLst/>
+          </a:prstGeom>
+          <a:solidFill>
+            <a:srgbClr val="FFFFFF"/>
+          </a:solidFill>
+          <a:ln/>
+          <a:effectLst>
+            <a:outerShdw sx="100000" sy="100000" kx="0" ky="0" algn="bl" rotWithShape="0" blurRad="50800" dist="25400" dir="8100000">
+              <a:srgbClr val="000000">
+                <a:alpha val="10000"/>
+              </a:srgbClr>
+            </a:outerShdw>
+          </a:effectLst>
+        </p:spPr>
+      </p:sp>
+      <p:sp>
+        <p:nvSpPr>
+          <p:cNvPr id="15" name="Shape 13"/>
+          <p:cNvSpPr/>
+          <p:nvPr/>
+        </p:nvSpPr>
+        <p:spPr>
+          <a:xfrm>
+            <a:off x="731520" y="1819656"/>
+            <a:ext cx="54864" cy="658368"/>
+          </a:xfrm>
+          <a:prstGeom prst="rect">
+            <a:avLst/>
+          </a:prstGeom>
+          <a:solidFill>
+            <a:srgbClr val="2A9D8F"/>
+          </a:solidFill>
+          <a:ln/>
+        </p:spPr>
+      </p:sp>
+      <p:sp>
+        <p:nvSpPr>
+          <p:cNvPr id="16" name="Text 14"/>
+          <p:cNvSpPr/>
+          <p:nvPr/>
+        </p:nvSpPr>
+        <p:spPr>
+          <a:xfrm>
+            <a:off x="914400" y="1819656"/>
+            <a:ext cx="1463040" cy="658368"/>
+          </a:xfrm>
+          <a:prstGeom prst="rect">
+            <a:avLst/>
+          </a:prstGeom>
+          <a:noFill/>
+          <a:ln/>
+        </p:spPr>
+        <p:txBody>
+          <a:bodyPr wrap="square" lIns="0" tIns="0" rIns="0" bIns="0" rtlCol="0" anchor="ctr"/>
+          <a:lstStyle/>
+          <a:p>
+            <a:pPr indent="0" marL="0">
+              <a:buNone/>
+            </a:pPr>
+            <a:r>
+              <a:rPr lang="en-US" sz="1300" b="1" dirty="0">
+                <a:solidFill>
+                  <a:srgbClr val="1B2A4A"/>
+                </a:solidFill>
+                <a:latin typeface="Georgia" pitchFamily="34" charset="0"/>
+                <a:ea typeface="Georgia" pitchFamily="34" charset="-122"/>
+                <a:cs typeface="Georgia" pitchFamily="34" charset="-120"/>
+              </a:rPr>
+              <a:t>Tally chart</a:t>
+            </a:r>
+            <a:endParaRPr lang="en-US" sz="1300" dirty="0"/>
+          </a:p>
+        </p:txBody>
+      </p:sp>
+      <p:sp>
+        <p:nvSpPr>
+          <p:cNvPr id="17" name="Text 15"/>
+          <p:cNvSpPr/>
+          <p:nvPr/>
+        </p:nvSpPr>
+        <p:spPr>
+          <a:xfrm>
+            <a:off x="2377440" y="1819656"/>
+            <a:ext cx="1920240" cy="658368"/>
+          </a:xfrm>
+          <a:prstGeom prst="rect">
+            <a:avLst/>
+          </a:prstGeom>
+          <a:noFill/>
+          <a:ln/>
+        </p:spPr>
+        <p:txBody>
+          <a:bodyPr wrap="square" lIns="0" tIns="0" rIns="0" bIns="0" rtlCol="0" anchor="ctr"/>
+          <a:lstStyle/>
+          <a:p>
+            <a:pPr indent="0" marL="0">
+              <a:buNone/>
+            </a:pPr>
+            <a:r>
+              <a:rPr lang="en-US" sz="1100" dirty="0">
+                <a:solidFill>
+                  <a:srgbClr val="6B6660"/>
+                </a:solidFill>
+                <a:latin typeface="Calibri" pitchFamily="34" charset="0"/>
+                <a:ea typeface="Calibri" pitchFamily="34" charset="-122"/>
+                <a:cs typeface="Calibri" pitchFamily="34" charset="-120"/>
+              </a:rPr>
+              <a:t>Marks used to count data</a:t>
+            </a:r>
+            <a:endParaRPr lang="en-US" sz="1100" dirty="0"/>
+          </a:p>
+        </p:txBody>
+      </p:sp>
+      <p:sp>
+        <p:nvSpPr>
+          <p:cNvPr id="18" name="Shape 16"/>
+          <p:cNvSpPr/>
+          <p:nvPr/>
+        </p:nvSpPr>
+        <p:spPr>
+          <a:xfrm>
+            <a:off x="4754880" y="1819656"/>
+            <a:ext cx="3657600" cy="658368"/>
+          </a:xfrm>
+          <a:prstGeom prst="rect">
+            <a:avLst/>
+          </a:prstGeom>
+          <a:solidFill>
+            <a:srgbClr val="FFFFFF"/>
+          </a:solidFill>
+          <a:ln/>
+          <a:effectLst>
+            <a:outerShdw sx="100000" sy="100000" kx="0" ky="0" algn="bl" rotWithShape="0" blurRad="50800" dist="25400" dir="8100000">
+              <a:srgbClr val="000000">
+                <a:alpha val="10000"/>
+              </a:srgbClr>
+            </a:outerShdw>
+          </a:effectLst>
+        </p:spPr>
+      </p:sp>
+      <p:sp>
+        <p:nvSpPr>
+          <p:cNvPr id="19" name="Shape 17"/>
+          <p:cNvSpPr/>
+          <p:nvPr/>
+        </p:nvSpPr>
+        <p:spPr>
+          <a:xfrm>
+            <a:off x="4754880" y="1819656"/>
+            <a:ext cx="54864" cy="658368"/>
+          </a:xfrm>
+          <a:prstGeom prst="rect">
+            <a:avLst/>
+          </a:prstGeom>
+          <a:solidFill>
+            <a:srgbClr val="2A9D8F"/>
+          </a:solidFill>
+          <a:ln/>
+        </p:spPr>
+      </p:sp>
+      <p:sp>
+        <p:nvSpPr>
+          <p:cNvPr id="20" name="Text 18"/>
+          <p:cNvSpPr/>
+          <p:nvPr/>
+        </p:nvSpPr>
+        <p:spPr>
+          <a:xfrm>
+            <a:off x="4937760" y="1819656"/>
+            <a:ext cx="1463040" cy="658368"/>
+          </a:xfrm>
+          <a:prstGeom prst="rect">
+            <a:avLst/>
+          </a:prstGeom>
+          <a:noFill/>
+          <a:ln/>
+        </p:spPr>
+        <p:txBody>
+          <a:bodyPr wrap="square" lIns="0" tIns="0" rIns="0" bIns="0" rtlCol="0" anchor="ctr"/>
+          <a:lstStyle/>
+          <a:p>
+            <a:pPr indent="0" marL="0">
+              <a:buNone/>
+            </a:pPr>
+            <a:r>
+              <a:rPr lang="en-US" sz="1300" b="1" dirty="0">
+                <a:solidFill>
+                  <a:srgbClr val="1B2A4A"/>
+                </a:solidFill>
+                <a:latin typeface="Georgia" pitchFamily="34" charset="0"/>
+                <a:ea typeface="Georgia" pitchFamily="34" charset="-122"/>
+                <a:cs typeface="Georgia" pitchFamily="34" charset="-120"/>
+              </a:rPr>
+              <a:t>Frequency</a:t>
+            </a:r>
+            <a:endParaRPr lang="en-US" sz="1300" dirty="0"/>
+          </a:p>
+        </p:txBody>
+      </p:sp>
+      <p:sp>
+        <p:nvSpPr>
+          <p:cNvPr id="21" name="Text 19"/>
+          <p:cNvSpPr/>
+          <p:nvPr/>
+        </p:nvSpPr>
+        <p:spPr>
+          <a:xfrm>
+            <a:off x="6400800" y="1819656"/>
+            <a:ext cx="1920240" cy="658368"/>
+          </a:xfrm>
+          <a:prstGeom prst="rect">
+            <a:avLst/>
+          </a:prstGeom>
+          <a:noFill/>
+          <a:ln/>
+        </p:spPr>
+        <p:txBody>
+          <a:bodyPr wrap="square" lIns="0" tIns="0" rIns="0" bIns="0" rtlCol="0" anchor="ctr"/>
+          <a:lstStyle/>
+          <a:p>
+            <a:pPr indent="0" marL="0">
+              <a:buNone/>
+            </a:pPr>
+            <a:r>
+              <a:rPr lang="en-US" sz="1100" dirty="0">
+                <a:solidFill>
+                  <a:srgbClr val="6B6660"/>
+                </a:solidFill>
+                <a:latin typeface="Calibri" pitchFamily="34" charset="0"/>
+                <a:ea typeface="Calibri" pitchFamily="34" charset="-122"/>
+                <a:cs typeface="Calibri" pitchFamily="34" charset="-120"/>
+              </a:rPr>
+              <a:t>How many times something occurs</a:t>
+            </a:r>
+            <a:endParaRPr lang="en-US" sz="1100" dirty="0"/>
+          </a:p>
+        </p:txBody>
+      </p:sp>
+      <p:sp>
+        <p:nvSpPr>
+          <p:cNvPr id="22" name="Shape 20"/>
+          <p:cNvSpPr/>
+          <p:nvPr/>
+        </p:nvSpPr>
+        <p:spPr>
+          <a:xfrm>
+            <a:off x="731520" y="2587752"/>
+            <a:ext cx="3657600" cy="658368"/>
+          </a:xfrm>
+          <a:prstGeom prst="rect">
+            <a:avLst/>
+          </a:prstGeom>
+          <a:solidFill>
+            <a:srgbClr val="FFFFFF"/>
+          </a:solidFill>
+          <a:ln/>
+          <a:effectLst>
+            <a:outerShdw sx="100000" sy="100000" kx="0" ky="0" algn="bl" rotWithShape="0" blurRad="50800" dist="25400" dir="8100000">
+              <a:srgbClr val="000000">
+                <a:alpha val="10000"/>
+              </a:srgbClr>
+            </a:outerShdw>
+          </a:effectLst>
+        </p:spPr>
+      </p:sp>
+      <p:sp>
+        <p:nvSpPr>
+          <p:cNvPr id="23" name="Shape 21"/>
+          <p:cNvSpPr/>
+          <p:nvPr/>
+        </p:nvSpPr>
+        <p:spPr>
+          <a:xfrm>
+            <a:off x="731520" y="2587752"/>
+            <a:ext cx="54864" cy="658368"/>
+          </a:xfrm>
+          <a:prstGeom prst="rect">
+            <a:avLst/>
+          </a:prstGeom>
+          <a:solidFill>
+            <a:srgbClr val="2A9D8F"/>
+          </a:solidFill>
+          <a:ln/>
+        </p:spPr>
+      </p:sp>
+      <p:sp>
+        <p:nvSpPr>
+          <p:cNvPr id="24" name="Text 22"/>
+          <p:cNvSpPr/>
+          <p:nvPr/>
+        </p:nvSpPr>
+        <p:spPr>
+          <a:xfrm>
+            <a:off x="914400" y="2587752"/>
+            <a:ext cx="1463040" cy="658368"/>
+          </a:xfrm>
+          <a:prstGeom prst="rect">
+            <a:avLst/>
+          </a:prstGeom>
+          <a:noFill/>
+          <a:ln/>
+        </p:spPr>
+        <p:txBody>
+          <a:bodyPr wrap="square" lIns="0" tIns="0" rIns="0" bIns="0" rtlCol="0" anchor="ctr"/>
+          <a:lstStyle/>
+          <a:p>
+            <a:pPr indent="0" marL="0">
+              <a:buNone/>
+            </a:pPr>
+            <a:r>
+              <a:rPr lang="en-US" sz="1300" b="1" dirty="0">
+                <a:solidFill>
+                  <a:srgbClr val="1B2A4A"/>
+                </a:solidFill>
+                <a:latin typeface="Georgia" pitchFamily="34" charset="0"/>
+                <a:ea typeface="Georgia" pitchFamily="34" charset="-122"/>
+                <a:cs typeface="Georgia" pitchFamily="34" charset="-120"/>
+              </a:rPr>
+              <a:t>Qualitative</a:t>
+            </a:r>
+            <a:endParaRPr lang="en-US" sz="1300" dirty="0"/>
+          </a:p>
+        </p:txBody>
+      </p:sp>
+      <p:sp>
+        <p:nvSpPr>
+          <p:cNvPr id="25" name="Text 23"/>
+          <p:cNvSpPr/>
+          <p:nvPr/>
+        </p:nvSpPr>
+        <p:spPr>
+          <a:xfrm>
+            <a:off x="2377440" y="2587752"/>
+            <a:ext cx="1920240" cy="658368"/>
+          </a:xfrm>
+          <a:prstGeom prst="rect">
+            <a:avLst/>
+          </a:prstGeom>
+          <a:noFill/>
+          <a:ln/>
+        </p:spPr>
+        <p:txBody>
+          <a:bodyPr wrap="square" lIns="0" tIns="0" rIns="0" bIns="0" rtlCol="0" anchor="ctr"/>
+          <a:lstStyle/>
+          <a:p>
+            <a:pPr indent="0" marL="0">
+              <a:buNone/>
+            </a:pPr>
+            <a:r>
+              <a:rPr lang="en-US" sz="1100" dirty="0">
+                <a:solidFill>
+                  <a:srgbClr val="6B6660"/>
+                </a:solidFill>
+                <a:latin typeface="Calibri" pitchFamily="34" charset="0"/>
+                <a:ea typeface="Calibri" pitchFamily="34" charset="-122"/>
+                <a:cs typeface="Calibri" pitchFamily="34" charset="-120"/>
+              </a:rPr>
+              <a:t>Data described in words (e.g. colour)</a:t>
+            </a:r>
+            <a:endParaRPr lang="en-US" sz="1100" dirty="0"/>
+          </a:p>
+        </p:txBody>
+      </p:sp>
+      <p:sp>
+        <p:nvSpPr>
+          <p:cNvPr id="26" name="Shape 24"/>
+          <p:cNvSpPr/>
+          <p:nvPr/>
+        </p:nvSpPr>
+        <p:spPr>
+          <a:xfrm>
+            <a:off x="4754880" y="2587752"/>
+            <a:ext cx="3657600" cy="658368"/>
+          </a:xfrm>
+          <a:prstGeom prst="rect">
+            <a:avLst/>
+          </a:prstGeom>
+          <a:solidFill>
+            <a:srgbClr val="FFFFFF"/>
+          </a:solidFill>
+          <a:ln/>
+          <a:effectLst>
+            <a:outerShdw sx="100000" sy="100000" kx="0" ky="0" algn="bl" rotWithShape="0" blurRad="50800" dist="25400" dir="8100000">
+              <a:srgbClr val="000000">
+                <a:alpha val="10000"/>
+              </a:srgbClr>
+            </a:outerShdw>
+          </a:effectLst>
+        </p:spPr>
+      </p:sp>
+      <p:sp>
+        <p:nvSpPr>
+          <p:cNvPr id="27" name="Shape 25"/>
+          <p:cNvSpPr/>
+          <p:nvPr/>
+        </p:nvSpPr>
+        <p:spPr>
+          <a:xfrm>
+            <a:off x="4754880" y="2587752"/>
+            <a:ext cx="54864" cy="658368"/>
+          </a:xfrm>
+          <a:prstGeom prst="rect">
+            <a:avLst/>
+          </a:prstGeom>
+          <a:solidFill>
+            <a:srgbClr val="2A9D8F"/>
+          </a:solidFill>
+          <a:ln/>
+        </p:spPr>
+      </p:sp>
+      <p:sp>
+        <p:nvSpPr>
+          <p:cNvPr id="28" name="Text 26"/>
+          <p:cNvSpPr/>
+          <p:nvPr/>
+        </p:nvSpPr>
+        <p:spPr>
+          <a:xfrm>
+            <a:off x="4937760" y="2587752"/>
+            <a:ext cx="1463040" cy="658368"/>
+          </a:xfrm>
+          <a:prstGeom prst="rect">
+            <a:avLst/>
+          </a:prstGeom>
+          <a:noFill/>
+          <a:ln/>
+        </p:spPr>
+        <p:txBody>
+          <a:bodyPr wrap="square" lIns="0" tIns="0" rIns="0" bIns="0" rtlCol="0" anchor="ctr"/>
+          <a:lstStyle/>
+          <a:p>
+            <a:pPr indent="0" marL="0">
+              <a:buNone/>
+            </a:pPr>
+            <a:r>
+              <a:rPr lang="en-US" sz="1300" b="1" dirty="0">
+                <a:solidFill>
+                  <a:srgbClr val="1B2A4A"/>
+                </a:solidFill>
+                <a:latin typeface="Georgia" pitchFamily="34" charset="0"/>
+                <a:ea typeface="Georgia" pitchFamily="34" charset="-122"/>
+                <a:cs typeface="Georgia" pitchFamily="34" charset="-120"/>
+              </a:rPr>
+              <a:t>Quantitative</a:t>
+            </a:r>
+            <a:endParaRPr lang="en-US" sz="1300" dirty="0"/>
+          </a:p>
+        </p:txBody>
+      </p:sp>
+      <p:sp>
+        <p:nvSpPr>
+          <p:cNvPr id="29" name="Text 27"/>
+          <p:cNvSpPr/>
+          <p:nvPr/>
+        </p:nvSpPr>
+        <p:spPr>
+          <a:xfrm>
+            <a:off x="6400800" y="2587752"/>
+            <a:ext cx="1920240" cy="658368"/>
+          </a:xfrm>
+          <a:prstGeom prst="rect">
+            <a:avLst/>
+          </a:prstGeom>
+          <a:noFill/>
+          <a:ln/>
+        </p:spPr>
+        <p:txBody>
+          <a:bodyPr wrap="square" lIns="0" tIns="0" rIns="0" bIns="0" rtlCol="0" anchor="ctr"/>
+          <a:lstStyle/>
+          <a:p>
+            <a:pPr indent="0" marL="0">
+              <a:buNone/>
+            </a:pPr>
+            <a:r>
+              <a:rPr lang="en-US" sz="1100" dirty="0">
+                <a:solidFill>
+                  <a:srgbClr val="6B6660"/>
+                </a:solidFill>
+                <a:latin typeface="Calibri" pitchFamily="34" charset="0"/>
+                <a:ea typeface="Calibri" pitchFamily="34" charset="-122"/>
+                <a:cs typeface="Calibri" pitchFamily="34" charset="-120"/>
+              </a:rPr>
+              <a:t>Data with numbers (e.g. height)</a:t>
+            </a:r>
+            <a:endParaRPr lang="en-US" sz="1100" dirty="0"/>
           </a:p>
         </p:txBody>
       </p:sp>
@@ -1655,7 +2559,47 @@
         <p:spPr>
           <a:xfrm>
             <a:off x="0" y="0"/>
-            <a:ext cx="9144000" cy="54864"/>
+            <a:ext cx="9144000" cy="822960"/>
+          </a:xfrm>
+          <a:prstGeom prst="rect">
+            <a:avLst/>
+          </a:prstGeom>
+          <a:solidFill>
+            <a:srgbClr val="FFFFFF"/>
+          </a:solidFill>
+          <a:ln/>
+        </p:spPr>
+      </p:sp>
+      <p:sp>
+        <p:nvSpPr>
+          <p:cNvPr id="3" name="Shape 1"/>
+          <p:cNvSpPr/>
+          <p:nvPr/>
+        </p:nvSpPr>
+        <p:spPr>
+          <a:xfrm>
+            <a:off x="0" y="804672"/>
+            <a:ext cx="9144000" cy="27432"/>
+          </a:xfrm>
+          <a:prstGeom prst="rect">
+            <a:avLst/>
+          </a:prstGeom>
+          <a:solidFill>
+            <a:srgbClr val="E5E2DC"/>
+          </a:solidFill>
+          <a:ln/>
+        </p:spPr>
+      </p:sp>
+      <p:sp>
+        <p:nvSpPr>
+          <p:cNvPr id="4" name="Shape 2"/>
+          <p:cNvSpPr/>
+          <p:nvPr/>
+        </p:nvSpPr>
+        <p:spPr>
+          <a:xfrm>
+            <a:off x="548640" y="201168"/>
+            <a:ext cx="54864" cy="420624"/>
           </a:xfrm>
           <a:prstGeom prst="rect">
             <a:avLst/>
@@ -1668,14 +2612,14 @@
       </p:sp>
       <p:sp>
         <p:nvSpPr>
-          <p:cNvPr id="3" name="Text 1"/>
-          <p:cNvSpPr/>
-          <p:nvPr/>
-        </p:nvSpPr>
-        <p:spPr>
-          <a:xfrm>
-            <a:off x="7772400" y="4709160"/>
-            <a:ext cx="1097280" cy="320040"/>
+          <p:cNvPr id="5" name="Text 3"/>
+          <p:cNvSpPr/>
+          <p:nvPr/>
+        </p:nvSpPr>
+        <p:spPr>
+          <a:xfrm>
+            <a:off x="777240" y="137160"/>
+            <a:ext cx="7772400" cy="548640"/>
           </a:xfrm>
           <a:prstGeom prst="rect">
             <a:avLst/>
@@ -1684,53 +2628,14 @@
           <a:ln/>
         </p:spPr>
         <p:txBody>
-          <a:bodyPr wrap="square" rtlCol="0" anchor="ctr"/>
-          <a:lstStyle/>
-          <a:p>
-            <a:pPr algn="r" indent="0" marL="0">
-              <a:buNone/>
-            </a:pPr>
-            <a:r>
-              <a:rPr lang="en-US" sz="900" dirty="0">
-                <a:solidFill>
-                  <a:srgbClr val="6B6660"/>
-                </a:solidFill>
-                <a:latin typeface="Calibri" pitchFamily="34" charset="0"/>
-                <a:ea typeface="Calibri" pitchFamily="34" charset="-122"/>
-                <a:cs typeface="Calibri" pitchFamily="34" charset="-120"/>
-              </a:rPr>
-              <a:t>3 / 5</a:t>
-            </a:r>
-            <a:endParaRPr lang="en-US" sz="900" dirty="0"/>
-          </a:p>
-        </p:txBody>
-      </p:sp>
-      <p:sp>
-        <p:nvSpPr>
-          <p:cNvPr id="4" name="Text 2"/>
-          <p:cNvSpPr/>
-          <p:nvPr/>
-        </p:nvSpPr>
-        <p:spPr>
-          <a:xfrm>
-            <a:off x="457200" y="274320"/>
-            <a:ext cx="8229600" cy="640080"/>
-          </a:xfrm>
-          <a:prstGeom prst="rect">
-            <a:avLst/>
-          </a:prstGeom>
-          <a:noFill/>
-          <a:ln/>
-        </p:spPr>
-        <p:txBody>
-          <a:bodyPr wrap="square" rtlCol="0" anchor="ctr"/>
+          <a:bodyPr wrap="square" lIns="0" tIns="0" rIns="0" bIns="0" rtlCol="0" anchor="ctr"/>
           <a:lstStyle/>
           <a:p>
             <a:pPr indent="0" marL="0">
               <a:buNone/>
             </a:pPr>
             <a:r>
-              <a:rPr lang="en-US" sz="2600" b="1" dirty="0">
+              <a:rPr lang="en-US" sz="2000" b="1" dirty="0">
                 <a:solidFill>
                   <a:srgbClr val="1B2A4A"/>
                 </a:solidFill>
@@ -1740,20 +2645,20 @@
               </a:rPr>
               <a:t>Types of Data</a:t>
             </a:r>
-            <a:endParaRPr lang="en-US" sz="2600" dirty="0"/>
-          </a:p>
-        </p:txBody>
-      </p:sp>
-      <p:sp>
-        <p:nvSpPr>
-          <p:cNvPr id="5" name="Shape 3"/>
-          <p:cNvSpPr/>
-          <p:nvPr/>
-        </p:nvSpPr>
-        <p:spPr>
-          <a:xfrm>
-            <a:off x="457200" y="1188720"/>
-            <a:ext cx="2560320" cy="1828800"/>
+            <a:endParaRPr lang="en-US" sz="2000" dirty="0"/>
+          </a:p>
+        </p:txBody>
+      </p:sp>
+      <p:sp>
+        <p:nvSpPr>
+          <p:cNvPr id="6" name="Shape 4"/>
+          <p:cNvSpPr/>
+          <p:nvPr/>
+        </p:nvSpPr>
+        <p:spPr>
+          <a:xfrm>
+            <a:off x="548640" y="1051560"/>
+            <a:ext cx="3840480" cy="3474720"/>
           </a:xfrm>
           <a:prstGeom prst="rect">
             <a:avLst/>
@@ -1761,12 +2666,7 @@
           <a:solidFill>
             <a:srgbClr val="FFFFFF"/>
           </a:solidFill>
-          <a:ln w="12700">
-            <a:solidFill>
-              <a:srgbClr val="E5E2DC"/>
-            </a:solidFill>
-            <a:prstDash val="solid"/>
-          </a:ln>
+          <a:ln/>
           <a:effectLst>
             <a:outerShdw sx="100000" sy="100000" kx="0" ky="0" algn="bl" rotWithShape="0" blurRad="50800" dist="25400" dir="8100000">
               <a:srgbClr val="000000">
@@ -1778,14 +2678,14 @@
       </p:sp>
       <p:sp>
         <p:nvSpPr>
-          <p:cNvPr id="6" name="Shape 4"/>
-          <p:cNvSpPr/>
-          <p:nvPr/>
-        </p:nvSpPr>
-        <p:spPr>
-          <a:xfrm>
-            <a:off x="457200" y="1188720"/>
-            <a:ext cx="2560320" cy="54864"/>
+          <p:cNvPr id="7" name="Shape 5"/>
+          <p:cNvSpPr/>
+          <p:nvPr/>
+        </p:nvSpPr>
+        <p:spPr>
+          <a:xfrm>
+            <a:off x="548640" y="1051560"/>
+            <a:ext cx="3840480" cy="54864"/>
           </a:xfrm>
           <a:prstGeom prst="rect">
             <a:avLst/>
@@ -1798,14 +2698,14 @@
       </p:sp>
       <p:sp>
         <p:nvSpPr>
-          <p:cNvPr id="7" name="Text 5"/>
-          <p:cNvSpPr/>
-          <p:nvPr/>
-        </p:nvSpPr>
-        <p:spPr>
-          <a:xfrm>
-            <a:off x="594360" y="1325880"/>
-            <a:ext cx="2286000" cy="365760"/>
+          <p:cNvPr id="8" name="Text 6"/>
+          <p:cNvSpPr/>
+          <p:nvPr/>
+        </p:nvSpPr>
+        <p:spPr>
+          <a:xfrm>
+            <a:off x="777240" y="1188720"/>
+            <a:ext cx="3383280" cy="457200"/>
           </a:xfrm>
           <a:prstGeom prst="rect">
             <a:avLst/>
@@ -1814,53 +2714,78 @@
           <a:ln/>
         </p:spPr>
         <p:txBody>
-          <a:bodyPr wrap="square" rtlCol="0" anchor="ctr"/>
+          <a:bodyPr wrap="square" lIns="0" tIns="0" rIns="0" bIns="0" rtlCol="0" anchor="ctr"/>
           <a:lstStyle/>
           <a:p>
             <a:pPr indent="0" marL="0">
               <a:buNone/>
             </a:pPr>
             <a:r>
-              <a:rPr lang="en-US" sz="1400" b="1" dirty="0">
+              <a:rPr lang="en-US" sz="1500" b="1" dirty="0">
                 <a:solidFill>
                   <a:srgbClr val="1B2A4A"/>
+                </a:solidFill>
+                <a:latin typeface="Georgia" pitchFamily="34" charset="0"/>
+                <a:ea typeface="Georgia" pitchFamily="34" charset="-122"/>
+                <a:cs typeface="Georgia" pitchFamily="34" charset="-120"/>
+              </a:rPr>
+              <a:t>Qualitative (Categorical)</a:t>
+            </a:r>
+            <a:endParaRPr lang="en-US" sz="1500" dirty="0"/>
+          </a:p>
+        </p:txBody>
+      </p:sp>
+      <p:sp>
+        <p:nvSpPr>
+          <p:cNvPr id="9" name="Text 7"/>
+          <p:cNvSpPr/>
+          <p:nvPr/>
+        </p:nvSpPr>
+        <p:spPr>
+          <a:xfrm>
+            <a:off x="777240" y="1691640"/>
+            <a:ext cx="3383280" cy="2651760"/>
+          </a:xfrm>
+          <a:prstGeom prst="rect">
+            <a:avLst/>
+          </a:prstGeom>
+          <a:noFill/>
+          <a:ln/>
+        </p:spPr>
+        <p:txBody>
+          <a:bodyPr wrap="square" rtlCol="0" anchor="t"/>
+          <a:lstStyle/>
+          <a:p>
+            <a:pPr marL="342900" indent="-342900">
+              <a:spcAft>
+                <a:spcPts val="600"/>
+              </a:spcAft>
+              <a:buSzPct val="100000"/>
+              <a:buChar char="•"/>
+            </a:pPr>
+            <a:r>
+              <a:rPr lang="en-US" sz="1300" dirty="0">
+                <a:solidFill>
+                  <a:srgbClr val="3D3A36"/>
                 </a:solidFill>
                 <a:latin typeface="Calibri" pitchFamily="34" charset="0"/>
                 <a:ea typeface="Calibri" pitchFamily="34" charset="-122"/>
                 <a:cs typeface="Calibri" pitchFamily="34" charset="-120"/>
               </a:rPr>
-              <a:t>Qualitative</a:t>
-            </a:r>
-            <a:endParaRPr lang="en-US" sz="1400" dirty="0"/>
-          </a:p>
-        </p:txBody>
-      </p:sp>
-      <p:sp>
-        <p:nvSpPr>
-          <p:cNvPr id="8" name="Text 6"/>
-          <p:cNvSpPr/>
-          <p:nvPr/>
-        </p:nvSpPr>
-        <p:spPr>
-          <a:xfrm>
-            <a:off x="594360" y="1737360"/>
-            <a:ext cx="2286000" cy="1097280"/>
-          </a:xfrm>
-          <a:prstGeom prst="rect">
-            <a:avLst/>
-          </a:prstGeom>
-          <a:noFill/>
-          <a:ln/>
-        </p:spPr>
-        <p:txBody>
-          <a:bodyPr wrap="square" rtlCol="0" anchor="t"/>
-          <a:lstStyle/>
-          <a:p>
-            <a:pPr indent="0" marL="0">
-              <a:buNone/>
-            </a:pPr>
-            <a:r>
-              <a:rPr lang="en-US" sz="1100" dirty="0">
+              <a:t>Described in words or categories</a:t>
+            </a:r>
+            <a:endParaRPr lang="en-US" sz="1300" dirty="0"/>
+          </a:p>
+          <a:p>
+            <a:pPr marL="342900" indent="-342900">
+              <a:spcAft>
+                <a:spcPts val="600"/>
+              </a:spcAft>
+              <a:buSzPct val="100000"/>
+              <a:buChar char="•"/>
+            </a:pPr>
+            <a:r>
+              <a:rPr lang="en-US" sz="1300" dirty="0">
                 <a:solidFill>
                   <a:srgbClr val="3D3A36"/>
                 </a:solidFill>
@@ -1868,22 +2793,64 @@
                 <a:ea typeface="Calibri" pitchFamily="34" charset="-122"/>
                 <a:cs typeface="Calibri" pitchFamily="34" charset="-120"/>
               </a:rPr>
-              <a:t>Descriptive, non-numerical. Colours, names, opinions. Example: 'What is your favourite sport?' Answers: football, basketball, swimming.</a:t>
-            </a:r>
-            <a:endParaRPr lang="en-US" sz="1100" dirty="0"/>
-          </a:p>
-        </p:txBody>
-      </p:sp>
-      <p:sp>
-        <p:nvSpPr>
-          <p:cNvPr id="9" name="Shape 7"/>
-          <p:cNvSpPr/>
-          <p:nvPr/>
-        </p:nvSpPr>
-        <p:spPr>
-          <a:xfrm>
-            <a:off x="3291840" y="1188720"/>
-            <a:ext cx="2560320" cy="1828800"/>
+              <a:t>Examples: eye colour, favourite food</a:t>
+            </a:r>
+            <a:endParaRPr lang="en-US" sz="1300" dirty="0"/>
+          </a:p>
+          <a:p>
+            <a:pPr marL="342900" indent="-342900">
+              <a:spcAft>
+                <a:spcPts val="600"/>
+              </a:spcAft>
+              <a:buSzPct val="100000"/>
+              <a:buChar char="•"/>
+            </a:pPr>
+            <a:r>
+              <a:rPr lang="en-US" sz="1300" dirty="0">
+                <a:solidFill>
+                  <a:srgbClr val="3D3A36"/>
+                </a:solidFill>
+                <a:latin typeface="Calibri" pitchFamily="34" charset="0"/>
+                <a:ea typeface="Calibri" pitchFamily="34" charset="-122"/>
+                <a:cs typeface="Calibri" pitchFamily="34" charset="-120"/>
+              </a:rPr>
+              <a:t>Cannot do calculations with it</a:t>
+            </a:r>
+            <a:endParaRPr lang="en-US" sz="1300" dirty="0"/>
+          </a:p>
+          <a:p>
+            <a:pPr marL="342900" indent="-342900">
+              <a:spcAft>
+                <a:spcPts val="600"/>
+              </a:spcAft>
+              <a:buSzPct val="100000"/>
+              <a:buChar char="•"/>
+            </a:pPr>
+            <a:r>
+              <a:rPr lang="en-US" sz="1300" dirty="0">
+                <a:solidFill>
+                  <a:srgbClr val="3D3A36"/>
+                </a:solidFill>
+                <a:latin typeface="Calibri" pitchFamily="34" charset="0"/>
+                <a:ea typeface="Calibri" pitchFamily="34" charset="-122"/>
+                <a:cs typeface="Calibri" pitchFamily="34" charset="-120"/>
+              </a:rPr>
+              <a:t>Use bar charts to display</a:t>
+            </a:r>
+            <a:endParaRPr lang="en-US" sz="1300" dirty="0"/>
+          </a:p>
+        </p:txBody>
+      </p:sp>
+      <p:sp>
+        <p:nvSpPr>
+          <p:cNvPr id="10" name="Shape 8"/>
+          <p:cNvSpPr/>
+          <p:nvPr/>
+        </p:nvSpPr>
+        <p:spPr>
+          <a:xfrm>
+            <a:off x="4754880" y="1051560"/>
+            <a:ext cx="3840480" cy="3474720"/>
           </a:xfrm>
           <a:prstGeom prst="rect">
             <a:avLst/>
@@ -1891,12 +2858,7 @@
           <a:solidFill>
             <a:srgbClr val="FFFFFF"/>
           </a:solidFill>
-          <a:ln w="12700">
-            <a:solidFill>
-              <a:srgbClr val="E5E2DC"/>
-            </a:solidFill>
-            <a:prstDash val="solid"/>
-          </a:ln>
+          <a:ln/>
           <a:effectLst>
             <a:outerShdw sx="100000" sy="100000" kx="0" ky="0" algn="bl" rotWithShape="0" blurRad="50800" dist="25400" dir="8100000">
               <a:srgbClr val="000000">
@@ -1908,34 +2870,34 @@
       </p:sp>
       <p:sp>
         <p:nvSpPr>
-          <p:cNvPr id="10" name="Shape 8"/>
-          <p:cNvSpPr/>
-          <p:nvPr/>
-        </p:nvSpPr>
-        <p:spPr>
-          <a:xfrm>
-            <a:off x="3291840" y="1188720"/>
-            <a:ext cx="2560320" cy="54864"/>
-          </a:xfrm>
-          <a:prstGeom prst="rect">
-            <a:avLst/>
-          </a:prstGeom>
-          <a:solidFill>
-            <a:srgbClr val="2A9D8F"/>
-          </a:solidFill>
-          <a:ln/>
-        </p:spPr>
-      </p:sp>
-      <p:sp>
-        <p:nvSpPr>
-          <p:cNvPr id="11" name="Text 9"/>
-          <p:cNvSpPr/>
-          <p:nvPr/>
-        </p:nvSpPr>
-        <p:spPr>
-          <a:xfrm>
-            <a:off x="3429000" y="1325880"/>
-            <a:ext cx="2286000" cy="365760"/>
+          <p:cNvPr id="11" name="Shape 9"/>
+          <p:cNvSpPr/>
+          <p:nvPr/>
+        </p:nvSpPr>
+        <p:spPr>
+          <a:xfrm>
+            <a:off x="4754880" y="1051560"/>
+            <a:ext cx="3840480" cy="54864"/>
+          </a:xfrm>
+          <a:prstGeom prst="rect">
+            <a:avLst/>
+          </a:prstGeom>
+          <a:solidFill>
+            <a:srgbClr val="E9C46A"/>
+          </a:solidFill>
+          <a:ln/>
+        </p:spPr>
+      </p:sp>
+      <p:sp>
+        <p:nvSpPr>
+          <p:cNvPr id="12" name="Text 10"/>
+          <p:cNvSpPr/>
+          <p:nvPr/>
+        </p:nvSpPr>
+        <p:spPr>
+          <a:xfrm>
+            <a:off x="4983480" y="1188720"/>
+            <a:ext cx="3383280" cy="457200"/>
           </a:xfrm>
           <a:prstGeom prst="rect">
             <a:avLst/>
@@ -1944,53 +2906,78 @@
           <a:ln/>
         </p:spPr>
         <p:txBody>
-          <a:bodyPr wrap="square" rtlCol="0" anchor="ctr"/>
+          <a:bodyPr wrap="square" lIns="0" tIns="0" rIns="0" bIns="0" rtlCol="0" anchor="ctr"/>
           <a:lstStyle/>
           <a:p>
             <a:pPr indent="0" marL="0">
               <a:buNone/>
             </a:pPr>
             <a:r>
-              <a:rPr lang="en-US" sz="1400" b="1" dirty="0">
+              <a:rPr lang="en-US" sz="1500" b="1" dirty="0">
                 <a:solidFill>
                   <a:srgbClr val="1B2A4A"/>
+                </a:solidFill>
+                <a:latin typeface="Georgia" pitchFamily="34" charset="0"/>
+                <a:ea typeface="Georgia" pitchFamily="34" charset="-122"/>
+                <a:cs typeface="Georgia" pitchFamily="34" charset="-120"/>
+              </a:rPr>
+              <a:t>Quantitative (Numerical)</a:t>
+            </a:r>
+            <a:endParaRPr lang="en-US" sz="1500" dirty="0"/>
+          </a:p>
+        </p:txBody>
+      </p:sp>
+      <p:sp>
+        <p:nvSpPr>
+          <p:cNvPr id="13" name="Text 11"/>
+          <p:cNvSpPr/>
+          <p:nvPr/>
+        </p:nvSpPr>
+        <p:spPr>
+          <a:xfrm>
+            <a:off x="4983480" y="1691640"/>
+            <a:ext cx="3383280" cy="2651760"/>
+          </a:xfrm>
+          <a:prstGeom prst="rect">
+            <a:avLst/>
+          </a:prstGeom>
+          <a:noFill/>
+          <a:ln/>
+        </p:spPr>
+        <p:txBody>
+          <a:bodyPr wrap="square" rtlCol="0" anchor="t"/>
+          <a:lstStyle/>
+          <a:p>
+            <a:pPr marL="342900" indent="-342900">
+              <a:spcAft>
+                <a:spcPts val="600"/>
+              </a:spcAft>
+              <a:buSzPct val="100000"/>
+              <a:buChar char="•"/>
+            </a:pPr>
+            <a:r>
+              <a:rPr lang="en-US" sz="1300" dirty="0">
+                <a:solidFill>
+                  <a:srgbClr val="3D3A36"/>
                 </a:solidFill>
                 <a:latin typeface="Calibri" pitchFamily="34" charset="0"/>
                 <a:ea typeface="Calibri" pitchFamily="34" charset="-122"/>
                 <a:cs typeface="Calibri" pitchFamily="34" charset="-120"/>
               </a:rPr>
-              <a:t>Discrete</a:t>
-            </a:r>
-            <a:endParaRPr lang="en-US" sz="1400" dirty="0"/>
-          </a:p>
-        </p:txBody>
-      </p:sp>
-      <p:sp>
-        <p:nvSpPr>
-          <p:cNvPr id="12" name="Text 10"/>
-          <p:cNvSpPr/>
-          <p:nvPr/>
-        </p:nvSpPr>
-        <p:spPr>
-          <a:xfrm>
-            <a:off x="3429000" y="1737360"/>
-            <a:ext cx="2286000" cy="1097280"/>
-          </a:xfrm>
-          <a:prstGeom prst="rect">
-            <a:avLst/>
-          </a:prstGeom>
-          <a:noFill/>
-          <a:ln/>
-        </p:spPr>
-        <p:txBody>
-          <a:bodyPr wrap="square" rtlCol="0" anchor="t"/>
-          <a:lstStyle/>
-          <a:p>
-            <a:pPr indent="0" marL="0">
-              <a:buNone/>
-            </a:pPr>
-            <a:r>
-              <a:rPr lang="en-US" sz="1100" dirty="0">
+              <a:t>Measured with numbers</a:t>
+            </a:r>
+            <a:endParaRPr lang="en-US" sz="1300" dirty="0"/>
+          </a:p>
+          <a:p>
+            <a:pPr marL="342900" indent="-342900">
+              <a:spcAft>
+                <a:spcPts val="600"/>
+              </a:spcAft>
+              <a:buSzPct val="100000"/>
+              <a:buChar char="•"/>
+            </a:pPr>
+            <a:r>
+              <a:rPr lang="en-US" sz="1300" dirty="0">
                 <a:solidFill>
                   <a:srgbClr val="3D3A36"/>
                 </a:solidFill>
@@ -1998,129 +2985,41 @@
                 <a:ea typeface="Calibri" pitchFamily="34" charset="-122"/>
                 <a:cs typeface="Calibri" pitchFamily="34" charset="-120"/>
               </a:rPr>
-              <a:t>Countable numbers. Can only take specific values. Example: number of pets (0, 1, 2, 3...). You can't have 2.5 pets.</a:t>
-            </a:r>
-            <a:endParaRPr lang="en-US" sz="1100" dirty="0"/>
-          </a:p>
-        </p:txBody>
-      </p:sp>
-      <p:sp>
-        <p:nvSpPr>
-          <p:cNvPr id="13" name="Shape 11"/>
-          <p:cNvSpPr/>
-          <p:nvPr/>
-        </p:nvSpPr>
-        <p:spPr>
-          <a:xfrm>
-            <a:off x="6126480" y="1188720"/>
-            <a:ext cx="2560320" cy="1828800"/>
-          </a:xfrm>
-          <a:prstGeom prst="rect">
-            <a:avLst/>
-          </a:prstGeom>
-          <a:solidFill>
-            <a:srgbClr val="FFFFFF"/>
-          </a:solidFill>
-          <a:ln w="12700">
-            <a:solidFill>
-              <a:srgbClr val="E5E2DC"/>
-            </a:solidFill>
-            <a:prstDash val="solid"/>
-          </a:ln>
-          <a:effectLst>
-            <a:outerShdw sx="100000" sy="100000" kx="0" ky="0" algn="bl" rotWithShape="0" blurRad="50800" dist="25400" dir="8100000">
-              <a:srgbClr val="000000">
-                <a:alpha val="10000"/>
-              </a:srgbClr>
-            </a:outerShdw>
-          </a:effectLst>
-        </p:spPr>
-      </p:sp>
-      <p:sp>
-        <p:nvSpPr>
-          <p:cNvPr id="14" name="Shape 12"/>
-          <p:cNvSpPr/>
-          <p:nvPr/>
-        </p:nvSpPr>
-        <p:spPr>
-          <a:xfrm>
-            <a:off x="6126480" y="1188720"/>
-            <a:ext cx="2560320" cy="54864"/>
-          </a:xfrm>
-          <a:prstGeom prst="rect">
-            <a:avLst/>
-          </a:prstGeom>
-          <a:solidFill>
-            <a:srgbClr val="2A9D8F"/>
-          </a:solidFill>
-          <a:ln/>
-        </p:spPr>
-      </p:sp>
-      <p:sp>
-        <p:nvSpPr>
-          <p:cNvPr id="15" name="Text 13"/>
-          <p:cNvSpPr/>
-          <p:nvPr/>
-        </p:nvSpPr>
-        <p:spPr>
-          <a:xfrm>
-            <a:off x="6263640" y="1325880"/>
-            <a:ext cx="2286000" cy="365760"/>
-          </a:xfrm>
-          <a:prstGeom prst="rect">
-            <a:avLst/>
-          </a:prstGeom>
-          <a:noFill/>
-          <a:ln/>
-        </p:spPr>
-        <p:txBody>
-          <a:bodyPr wrap="square" rtlCol="0" anchor="ctr"/>
-          <a:lstStyle/>
-          <a:p>
-            <a:pPr indent="0" marL="0">
-              <a:buNone/>
-            </a:pPr>
-            <a:r>
-              <a:rPr lang="en-US" sz="1400" b="1" dirty="0">
-                <a:solidFill>
-                  <a:srgbClr val="1B2A4A"/>
+              <a:t>Discrete: counted (e.g. number of siblings)</a:t>
+            </a:r>
+            <a:endParaRPr lang="en-US" sz="1300" dirty="0"/>
+          </a:p>
+          <a:p>
+            <a:pPr marL="342900" indent="-342900">
+              <a:spcAft>
+                <a:spcPts val="600"/>
+              </a:spcAft>
+              <a:buSzPct val="100000"/>
+              <a:buChar char="•"/>
+            </a:pPr>
+            <a:r>
+              <a:rPr lang="en-US" sz="1300" dirty="0">
+                <a:solidFill>
+                  <a:srgbClr val="3D3A36"/>
                 </a:solidFill>
                 <a:latin typeface="Calibri" pitchFamily="34" charset="0"/>
                 <a:ea typeface="Calibri" pitchFamily="34" charset="-122"/>
                 <a:cs typeface="Calibri" pitchFamily="34" charset="-120"/>
               </a:rPr>
-              <a:t>Continuous</a:t>
-            </a:r>
-            <a:endParaRPr lang="en-US" sz="1400" dirty="0"/>
-          </a:p>
-        </p:txBody>
-      </p:sp>
-      <p:sp>
-        <p:nvSpPr>
-          <p:cNvPr id="16" name="Text 14"/>
-          <p:cNvSpPr/>
-          <p:nvPr/>
-        </p:nvSpPr>
-        <p:spPr>
-          <a:xfrm>
-            <a:off x="6263640" y="1737360"/>
-            <a:ext cx="2286000" cy="1097280"/>
-          </a:xfrm>
-          <a:prstGeom prst="rect">
-            <a:avLst/>
-          </a:prstGeom>
-          <a:noFill/>
-          <a:ln/>
-        </p:spPr>
-        <p:txBody>
-          <a:bodyPr wrap="square" rtlCol="0" anchor="t"/>
-          <a:lstStyle/>
-          <a:p>
-            <a:pPr indent="0" marL="0">
-              <a:buNone/>
-            </a:pPr>
-            <a:r>
-              <a:rPr lang="en-US" sz="1100" dirty="0">
+              <a:t>Continuous: measured (e.g. height)</a:t>
+            </a:r>
+            <a:endParaRPr lang="en-US" sz="1300" dirty="0"/>
+          </a:p>
+          <a:p>
+            <a:pPr marL="342900" indent="-342900">
+              <a:spcAft>
+                <a:spcPts val="600"/>
+              </a:spcAft>
+              <a:buSzPct val="100000"/>
+              <a:buChar char="•"/>
+            </a:pPr>
+            <a:r>
+              <a:rPr lang="en-US" sz="1300" dirty="0">
                 <a:solidFill>
                   <a:srgbClr val="3D3A36"/>
                 </a:solidFill>
@@ -2128,9 +3027,9 @@
                 <a:ea typeface="Calibri" pitchFamily="34" charset="-122"/>
                 <a:cs typeface="Calibri" pitchFamily="34" charset="-120"/>
               </a:rPr>
-              <a:t>Measured numbers. Can take ANY value in a range. Example: height (162.5 cm), temperature (37.2°C). Need measuring instruments.</a:t>
-            </a:r>
-            <a:endParaRPr lang="en-US" sz="1100" dirty="0"/>
+              <a:t>Can calculate averages</a:t>
+            </a:r>
+            <a:endParaRPr lang="en-US" sz="1300" dirty="0"/>
           </a:p>
         </p:txBody>
       </p:sp>
@@ -2175,7 +3074,47 @@
         <p:spPr>
           <a:xfrm>
             <a:off x="0" y="0"/>
-            <a:ext cx="9144000" cy="54864"/>
+            <a:ext cx="9144000" cy="822960"/>
+          </a:xfrm>
+          <a:prstGeom prst="rect">
+            <a:avLst/>
+          </a:prstGeom>
+          <a:solidFill>
+            <a:srgbClr val="FFFFFF"/>
+          </a:solidFill>
+          <a:ln/>
+        </p:spPr>
+      </p:sp>
+      <p:sp>
+        <p:nvSpPr>
+          <p:cNvPr id="3" name="Shape 1"/>
+          <p:cNvSpPr/>
+          <p:nvPr/>
+        </p:nvSpPr>
+        <p:spPr>
+          <a:xfrm>
+            <a:off x="0" y="804672"/>
+            <a:ext cx="9144000" cy="27432"/>
+          </a:xfrm>
+          <a:prstGeom prst="rect">
+            <a:avLst/>
+          </a:prstGeom>
+          <a:solidFill>
+            <a:srgbClr val="E5E2DC"/>
+          </a:solidFill>
+          <a:ln/>
+        </p:spPr>
+      </p:sp>
+      <p:sp>
+        <p:nvSpPr>
+          <p:cNvPr id="4" name="Shape 2"/>
+          <p:cNvSpPr/>
+          <p:nvPr/>
+        </p:nvSpPr>
+        <p:spPr>
+          <a:xfrm>
+            <a:off x="548640" y="201168"/>
+            <a:ext cx="54864" cy="420624"/>
           </a:xfrm>
           <a:prstGeom prst="rect">
             <a:avLst/>
@@ -2188,14 +3127,14 @@
       </p:sp>
       <p:sp>
         <p:nvSpPr>
-          <p:cNvPr id="3" name="Text 1"/>
-          <p:cNvSpPr/>
-          <p:nvPr/>
-        </p:nvSpPr>
-        <p:spPr>
-          <a:xfrm>
-            <a:off x="7772400" y="4709160"/>
-            <a:ext cx="1097280" cy="320040"/>
+          <p:cNvPr id="5" name="Text 3"/>
+          <p:cNvSpPr/>
+          <p:nvPr/>
+        </p:nvSpPr>
+        <p:spPr>
+          <a:xfrm>
+            <a:off x="777240" y="137160"/>
+            <a:ext cx="7772400" cy="548640"/>
           </a:xfrm>
           <a:prstGeom prst="rect">
             <a:avLst/>
@@ -2204,96 +3143,78 @@
           <a:ln/>
         </p:spPr>
         <p:txBody>
-          <a:bodyPr wrap="square" rtlCol="0" anchor="ctr"/>
-          <a:lstStyle/>
-          <a:p>
-            <a:pPr algn="r" indent="0" marL="0">
+          <a:bodyPr wrap="square" lIns="0" tIns="0" rIns="0" bIns="0" rtlCol="0" anchor="ctr"/>
+          <a:lstStyle/>
+          <a:p>
+            <a:pPr indent="0" marL="0">
               <a:buNone/>
             </a:pPr>
             <a:r>
-              <a:rPr lang="en-US" sz="900" dirty="0">
-                <a:solidFill>
-                  <a:srgbClr val="6B6660"/>
+              <a:rPr lang="en-US" sz="2000" b="1" dirty="0">
+                <a:solidFill>
+                  <a:srgbClr val="1B2A4A"/>
+                </a:solidFill>
+                <a:latin typeface="Georgia" pitchFamily="34" charset="0"/>
+                <a:ea typeface="Georgia" pitchFamily="34" charset="-122"/>
+                <a:cs typeface="Georgia" pitchFamily="34" charset="-120"/>
+              </a:rPr>
+              <a:t>Designing a Good Survey</a:t>
+            </a:r>
+            <a:endParaRPr lang="en-US" sz="2000" dirty="0"/>
+          </a:p>
+        </p:txBody>
+      </p:sp>
+      <p:sp>
+        <p:nvSpPr>
+          <p:cNvPr id="6" name="Text 4"/>
+          <p:cNvSpPr/>
+          <p:nvPr/>
+        </p:nvSpPr>
+        <p:spPr>
+          <a:xfrm>
+            <a:off x="731520" y="1051560"/>
+            <a:ext cx="7680960" cy="3108960"/>
+          </a:xfrm>
+          <a:prstGeom prst="rect">
+            <a:avLst/>
+          </a:prstGeom>
+          <a:noFill/>
+          <a:ln/>
+        </p:spPr>
+        <p:txBody>
+          <a:bodyPr wrap="square" rtlCol="0" anchor="t"/>
+          <a:lstStyle/>
+          <a:p>
+            <a:pPr marL="342900" indent="-342900">
+              <a:spcAft>
+                <a:spcPts val="800"/>
+              </a:spcAft>
+              <a:buSzPct val="100000"/>
+              <a:buChar char="•"/>
+            </a:pPr>
+            <a:r>
+              <a:rPr lang="en-US" sz="1500" dirty="0">
+                <a:solidFill>
+                  <a:srgbClr val="3D3A36"/>
                 </a:solidFill>
                 <a:latin typeface="Calibri" pitchFamily="34" charset="0"/>
                 <a:ea typeface="Calibri" pitchFamily="34" charset="-122"/>
                 <a:cs typeface="Calibri" pitchFamily="34" charset="-120"/>
               </a:rPr>
-              <a:t>4 / 5</a:t>
-            </a:r>
-            <a:endParaRPr lang="en-US" sz="900" dirty="0"/>
-          </a:p>
-        </p:txBody>
-      </p:sp>
-      <p:sp>
-        <p:nvSpPr>
-          <p:cNvPr id="4" name="Text 2"/>
-          <p:cNvSpPr/>
-          <p:nvPr/>
-        </p:nvSpPr>
-        <p:spPr>
-          <a:xfrm>
-            <a:off x="457200" y="274320"/>
-            <a:ext cx="8229600" cy="640080"/>
-          </a:xfrm>
-          <a:prstGeom prst="rect">
-            <a:avLst/>
-          </a:prstGeom>
-          <a:noFill/>
-          <a:ln/>
-        </p:spPr>
-        <p:txBody>
-          <a:bodyPr wrap="square" rtlCol="0" anchor="ctr"/>
-          <a:lstStyle/>
-          <a:p>
-            <a:pPr indent="0" marL="0">
-              <a:buNone/>
-            </a:pPr>
-            <a:r>
-              <a:rPr lang="en-US" sz="2600" b="1" dirty="0">
-                <a:solidFill>
-                  <a:srgbClr val="1B2A4A"/>
-                </a:solidFill>
-                <a:latin typeface="Georgia" pitchFamily="34" charset="0"/>
-                <a:ea typeface="Georgia" pitchFamily="34" charset="-122"/>
-                <a:cs typeface="Georgia" pitchFamily="34" charset="-120"/>
-              </a:rPr>
-              <a:t>Data Collection Methods</a:t>
-            </a:r>
-            <a:endParaRPr lang="en-US" sz="2600" dirty="0"/>
-          </a:p>
-        </p:txBody>
-      </p:sp>
-      <p:sp>
-        <p:nvSpPr>
-          <p:cNvPr id="5" name="Text 3"/>
-          <p:cNvSpPr/>
-          <p:nvPr/>
-        </p:nvSpPr>
-        <p:spPr>
-          <a:xfrm>
-            <a:off x="457200" y="1188720"/>
-            <a:ext cx="3840480" cy="3474720"/>
-          </a:xfrm>
-          <a:prstGeom prst="rect">
-            <a:avLst/>
-          </a:prstGeom>
-          <a:noFill/>
-          <a:ln/>
-        </p:spPr>
-        <p:txBody>
-          <a:bodyPr wrap="square" rtlCol="0" anchor="t"/>
-          <a:lstStyle/>
+              <a:t>Questions should be clear and easy to understand.</a:t>
+            </a:r>
+            <a:endParaRPr lang="en-US" sz="1500" dirty="0"/>
+          </a:p>
           <a:p>
             <a:pPr marL="342900" indent="-342900">
               <a:spcAft>
-                <a:spcPts val="600"/>
+                <a:spcPts val="800"/>
               </a:spcAft>
               <a:buSzPct val="100000"/>
               <a:buChar char="•"/>
             </a:pPr>
             <a:r>
-              <a:rPr lang="en-US" sz="1400" dirty="0">
+              <a:rPr lang="en-US" sz="1500" dirty="0">
                 <a:solidFill>
                   <a:srgbClr val="3D3A36"/>
                 </a:solidFill>
@@ -2301,20 +3222,20 @@
                 <a:ea typeface="Calibri" pitchFamily="34" charset="-122"/>
                 <a:cs typeface="Calibri" pitchFamily="34" charset="-120"/>
               </a:rPr>
-              <a:t>Surveys/questionnaires: ask questions to a sample</a:t>
-            </a:r>
-            <a:endParaRPr lang="en-US" sz="1400" dirty="0"/>
+              <a:t>Give response options (multiple choice) for easier analysis.</a:t>
+            </a:r>
+            <a:endParaRPr lang="en-US" sz="1500" dirty="0"/>
           </a:p>
           <a:p>
             <a:pPr marL="342900" indent="-342900">
               <a:spcAft>
-                <a:spcPts val="600"/>
+                <a:spcPts val="800"/>
               </a:spcAft>
               <a:buSzPct val="100000"/>
               <a:buChar char="•"/>
             </a:pPr>
             <a:r>
-              <a:rPr lang="en-US" sz="1400" dirty="0">
+              <a:rPr lang="en-US" sz="1500" dirty="0">
                 <a:solidFill>
                   <a:srgbClr val="3D3A36"/>
                 </a:solidFill>
@@ -2322,20 +3243,20 @@
                 <a:ea typeface="Calibri" pitchFamily="34" charset="-122"/>
                 <a:cs typeface="Calibri" pitchFamily="34" charset="-120"/>
               </a:rPr>
-              <a:t>Observation: watch and record what happens</a:t>
-            </a:r>
-            <a:endParaRPr lang="en-US" sz="1400" dirty="0"/>
+              <a:t>Avoid leading questions ('Don't you think...').</a:t>
+            </a:r>
+            <a:endParaRPr lang="en-US" sz="1500" dirty="0"/>
           </a:p>
           <a:p>
             <a:pPr marL="342900" indent="-342900">
               <a:spcAft>
-                <a:spcPts val="600"/>
+                <a:spcPts val="800"/>
               </a:spcAft>
               <a:buSzPct val="100000"/>
               <a:buChar char="•"/>
             </a:pPr>
             <a:r>
-              <a:rPr lang="en-US" sz="1400" dirty="0">
+              <a:rPr lang="en-US" sz="1500" dirty="0">
                 <a:solidFill>
                   <a:srgbClr val="3D3A36"/>
                 </a:solidFill>
@@ -2343,20 +3264,20 @@
                 <a:ea typeface="Calibri" pitchFamily="34" charset="-122"/>
                 <a:cs typeface="Calibri" pitchFamily="34" charset="-120"/>
               </a:rPr>
-              <a:t>Experiments: test variables, collect results</a:t>
-            </a:r>
-            <a:endParaRPr lang="en-US" sz="1400" dirty="0"/>
+              <a:t>Avoid overlapping categories (use 1–5, 6–10, not 1–5, 5–10).</a:t>
+            </a:r>
+            <a:endParaRPr lang="en-US" sz="1500" dirty="0"/>
           </a:p>
           <a:p>
             <a:pPr marL="342900" indent="-342900">
               <a:spcAft>
-                <a:spcPts val="600"/>
+                <a:spcPts val="800"/>
               </a:spcAft>
               <a:buSzPct val="100000"/>
               <a:buChar char="•"/>
             </a:pPr>
             <a:r>
-              <a:rPr lang="en-US" sz="1400" dirty="0">
+              <a:rPr lang="en-US" sz="1500" dirty="0">
                 <a:solidFill>
                   <a:srgbClr val="3D3A36"/>
                 </a:solidFill>
@@ -2364,56 +3285,30 @@
                 <a:ea typeface="Calibri" pitchFamily="34" charset="-122"/>
                 <a:cs typeface="Calibri" pitchFamily="34" charset="-120"/>
               </a:rPr>
-              <a:t>Databases/secondary data: use existing data sources</a:t>
-            </a:r>
-            <a:endParaRPr lang="en-US" sz="1400" dirty="0"/>
-          </a:p>
-          <a:p>
-            <a:pPr marL="342900" indent="-342900">
-              <a:spcAft>
-                <a:spcPts val="600"/>
-              </a:spcAft>
-              <a:buSzPct val="100000"/>
-              <a:buChar char="•"/>
-            </a:pPr>
-            <a:r>
-              <a:rPr lang="en-US" sz="1400" dirty="0">
-                <a:solidFill>
-                  <a:srgbClr val="3D3A36"/>
-                </a:solidFill>
-                <a:latin typeface="Calibri" pitchFamily="34" charset="0"/>
-                <a:ea typeface="Calibri" pitchFamily="34" charset="-122"/>
-                <a:cs typeface="Calibri" pitchFamily="34" charset="-120"/>
-              </a:rPr>
-              <a:t>Key: questions must be clear, unbiased, with limited options</a:t>
-            </a:r>
-            <a:endParaRPr lang="en-US" sz="1400" dirty="0"/>
-          </a:p>
-        </p:txBody>
-      </p:sp>
-      <p:sp>
-        <p:nvSpPr>
-          <p:cNvPr id="6" name="Shape 4"/>
-          <p:cNvSpPr/>
-          <p:nvPr/>
-        </p:nvSpPr>
-        <p:spPr>
-          <a:xfrm>
-            <a:off x="4846320" y="1188720"/>
-            <a:ext cx="3840480" cy="3474720"/>
-          </a:xfrm>
-          <a:prstGeom prst="rect">
-            <a:avLst/>
-          </a:prstGeom>
-          <a:solidFill>
-            <a:srgbClr val="FFFFFF"/>
-          </a:solidFill>
-          <a:ln w="12700">
-            <a:solidFill>
-              <a:srgbClr val="E5E2DC"/>
-            </a:solidFill>
-            <a:prstDash val="solid"/>
-          </a:ln>
+              <a:t>Ask enough people — at least 30 for reliable data.</a:t>
+            </a:r>
+            <a:endParaRPr lang="en-US" sz="1500" dirty="0"/>
+          </a:p>
+        </p:txBody>
+      </p:sp>
+      <p:sp>
+        <p:nvSpPr>
+          <p:cNvPr id="7" name="Shape 5"/>
+          <p:cNvSpPr/>
+          <p:nvPr/>
+        </p:nvSpPr>
+        <p:spPr>
+          <a:xfrm>
+            <a:off x="731520" y="4206240"/>
+            <a:ext cx="7680960" cy="640080"/>
+          </a:xfrm>
+          <a:prstGeom prst="rect">
+            <a:avLst/>
+          </a:prstGeom>
+          <a:solidFill>
+            <a:srgbClr val="E8F5F3"/>
+          </a:solidFill>
+          <a:ln/>
           <a:effectLst>
             <a:outerShdw sx="100000" sy="100000" kx="0" ky="0" algn="bl" rotWithShape="0" blurRad="50800" dist="25400" dir="8100000">
               <a:srgbClr val="000000">
@@ -2425,34 +3320,14 @@
       </p:sp>
       <p:sp>
         <p:nvSpPr>
-          <p:cNvPr id="7" name="Shape 5"/>
-          <p:cNvSpPr/>
-          <p:nvPr/>
-        </p:nvSpPr>
-        <p:spPr>
-          <a:xfrm>
-            <a:off x="4846320" y="1188720"/>
-            <a:ext cx="3840480" cy="54864"/>
-          </a:xfrm>
-          <a:prstGeom prst="rect">
-            <a:avLst/>
-          </a:prstGeom>
-          <a:solidFill>
-            <a:srgbClr val="2A9D8F"/>
-          </a:solidFill>
-          <a:ln/>
-        </p:spPr>
-      </p:sp>
-      <p:sp>
-        <p:nvSpPr>
           <p:cNvPr id="8" name="Text 6"/>
           <p:cNvSpPr/>
           <p:nvPr/>
         </p:nvSpPr>
         <p:spPr>
           <a:xfrm>
-            <a:off x="5120640" y="1371600"/>
-            <a:ext cx="3291840" cy="3108960"/>
+            <a:off x="914400" y="4251960"/>
+            <a:ext cx="7315200" cy="548640"/>
           </a:xfrm>
           <a:prstGeom prst="rect">
             <a:avLst/>
@@ -2461,46 +3336,28 @@
           <a:ln/>
         </p:spPr>
         <p:txBody>
-          <a:bodyPr wrap="square" rtlCol="0" anchor="t"/>
+          <a:bodyPr wrap="square" rtlCol="0" anchor="ctr"/>
           <a:lstStyle/>
           <a:p>
             <a:pPr indent="0" marL="0">
-              <a:spcAft>
-                <a:spcPts val="400"/>
-              </a:spcAft>
               <a:buNone/>
             </a:pPr>
             <a:r>
-              <a:rPr lang="en-US" sz="1600" b="1" dirty="0">
-                <a:solidFill>
-                  <a:srgbClr val="1B2A4A"/>
+              <a:rPr lang="en-US" sz="1200" b="1" dirty="0">
+                <a:solidFill>
+                  <a:srgbClr val="2A9D8F"/>
                 </a:solidFill>
                 <a:latin typeface="Calibri" pitchFamily="34" charset="0"/>
                 <a:ea typeface="Calibri" pitchFamily="34" charset="-122"/>
                 <a:cs typeface="Calibri" pitchFamily="34" charset="-120"/>
               </a:rPr>
-              <a:t>Organising Data</a:t>
-            </a:r>
-            <a:endParaRPr lang="en-US" sz="1600" dirty="0"/>
-          </a:p>
-          <a:p>
+              <a:t>Key Idea: </a:t>
+            </a:r>
             <a:pPr indent="0" marL="0">
-              <a:spcAft>
-                <a:spcPts val="400"/>
-              </a:spcAft>
               <a:buNone/>
             </a:pPr>
-            <a:endParaRPr lang="en-US" sz="1600" dirty="0"/>
-          </a:p>
-          <a:p>
-            <a:pPr indent="0" marL="0">
-              <a:spcAft>
-                <a:spcPts val="400"/>
-              </a:spcAft>
-              <a:buNone/>
-            </a:pPr>
-            <a:r>
-              <a:rPr lang="en-US" sz="1300" dirty="0">
+            <a:r>
+              <a:rPr lang="en-US" sz="1200" i="1" dirty="0">
                 <a:solidFill>
                   <a:srgbClr val="3D3A36"/>
                 </a:solidFill>
@@ -2508,89 +3365,9 @@
                 <a:ea typeface="Calibri" pitchFamily="34" charset="-122"/>
                 <a:cs typeface="Calibri" pitchFamily="34" charset="-120"/>
               </a:rPr>
-              <a:t>Tally charts: quick counting, group in fives</a:t>
-            </a:r>
-            <a:endParaRPr lang="en-US" sz="1600" dirty="0"/>
-          </a:p>
-          <a:p>
-            <a:pPr indent="0" marL="0">
-              <a:spcAft>
-                <a:spcPts val="400"/>
-              </a:spcAft>
-              <a:buNone/>
-            </a:pPr>
-            <a:r>
-              <a:rPr lang="en-US" sz="1300" dirty="0">
-                <a:solidFill>
-                  <a:srgbClr val="3D3A36"/>
-                </a:solidFill>
-                <a:latin typeface="Calibri" pitchFamily="34" charset="0"/>
-                <a:ea typeface="Calibri" pitchFamily="34" charset="-122"/>
-                <a:cs typeface="Calibri" pitchFamily="34" charset="-120"/>
-              </a:rPr>
-              <a:t>Frequency tables: list categories with their counts</a:t>
-            </a:r>
-            <a:endParaRPr lang="en-US" sz="1600" dirty="0"/>
-          </a:p>
-          <a:p>
-            <a:pPr indent="0" marL="0">
-              <a:spcAft>
-                <a:spcPts val="400"/>
-              </a:spcAft>
-              <a:buNone/>
-            </a:pPr>
-            <a:r>
-              <a:rPr lang="en-US" sz="1300" dirty="0">
-                <a:solidFill>
-                  <a:srgbClr val="3D3A36"/>
-                </a:solidFill>
-                <a:latin typeface="Calibri" pitchFamily="34" charset="0"/>
-                <a:ea typeface="Calibri" pitchFamily="34" charset="-122"/>
-                <a:cs typeface="Calibri" pitchFamily="34" charset="-120"/>
-              </a:rPr>
-              <a:t>Two-way tables: compare two categories</a:t>
-            </a:r>
-            <a:endParaRPr lang="en-US" sz="1600" dirty="0"/>
-          </a:p>
-          <a:p>
-            <a:pPr indent="0" marL="0">
-              <a:spcAft>
-                <a:spcPts val="400"/>
-              </a:spcAft>
-              <a:buNone/>
-            </a:pPr>
-            <a:r>
-              <a:rPr lang="en-US" sz="1300" dirty="0">
-                <a:solidFill>
-                  <a:srgbClr val="3D3A36"/>
-                </a:solidFill>
-                <a:latin typeface="Calibri" pitchFamily="34" charset="0"/>
-                <a:ea typeface="Calibri" pitchFamily="34" charset="-122"/>
-                <a:cs typeface="Calibri" pitchFamily="34" charset="-120"/>
-              </a:rPr>
-              <a:t>Grouped frequency tables: for continuous data (e.g. 0–9, 10–19, 20–29)</a:t>
-            </a:r>
-            <a:endParaRPr lang="en-US" sz="1600" dirty="0"/>
-          </a:p>
-          <a:p>
-            <a:pPr indent="0" marL="0">
-              <a:spcAft>
-                <a:spcPts val="400"/>
-              </a:spcAft>
-              <a:buNone/>
-            </a:pPr>
-            <a:r>
-              <a:rPr lang="en-US" sz="1300" dirty="0">
-                <a:solidFill>
-                  <a:srgbClr val="3D3A36"/>
-                </a:solidFill>
-                <a:latin typeface="Calibri" pitchFamily="34" charset="0"/>
-                <a:ea typeface="Calibri" pitchFamily="34" charset="-122"/>
-                <a:cs typeface="Calibri" pitchFamily="34" charset="-120"/>
-              </a:rPr>
-              <a:t>Choose groups of equal width, no gaps, no overlaps</a:t>
-            </a:r>
-            <a:endParaRPr lang="en-US" sz="1600" dirty="0"/>
+              <a:t>Bad question: 'Do you like sports?' Better: 'How many hours of sport do you do per week? 0–2, 3–5, 6+'</a:t>
+            </a:r>
+            <a:endParaRPr lang="en-US" sz="1200" dirty="0"/>
           </a:p>
         </p:txBody>
       </p:sp>
@@ -2608,7 +3385,7 @@
     <p:bg>
       <p:bgPr>
         <a:solidFill>
-          <a:srgbClr val="1B2A4A"/>
+          <a:srgbClr val="FAF8F5"/>
         </a:solidFill>
       </p:bgPr>
     </p:bg>
@@ -2635,27 +3412,67 @@
         <p:spPr>
           <a:xfrm>
             <a:off x="0" y="0"/>
-            <a:ext cx="109728" cy="5143500"/>
-          </a:xfrm>
-          <a:prstGeom prst="rect">
-            <a:avLst/>
-          </a:prstGeom>
-          <a:solidFill>
-            <a:srgbClr val="E9C46A"/>
-          </a:solidFill>
-          <a:ln/>
-        </p:spPr>
-      </p:sp>
-      <p:sp>
-        <p:nvSpPr>
-          <p:cNvPr id="3" name="Text 1"/>
-          <p:cNvSpPr/>
-          <p:nvPr/>
-        </p:nvSpPr>
-        <p:spPr>
-          <a:xfrm>
-            <a:off x="731520" y="457200"/>
-            <a:ext cx="7772400" cy="731520"/>
+            <a:ext cx="9144000" cy="822960"/>
+          </a:xfrm>
+          <a:prstGeom prst="rect">
+            <a:avLst/>
+          </a:prstGeom>
+          <a:solidFill>
+            <a:srgbClr val="FFFFFF"/>
+          </a:solidFill>
+          <a:ln/>
+        </p:spPr>
+      </p:sp>
+      <p:sp>
+        <p:nvSpPr>
+          <p:cNvPr id="3" name="Shape 1"/>
+          <p:cNvSpPr/>
+          <p:nvPr/>
+        </p:nvSpPr>
+        <p:spPr>
+          <a:xfrm>
+            <a:off x="0" y="804672"/>
+            <a:ext cx="9144000" cy="27432"/>
+          </a:xfrm>
+          <a:prstGeom prst="rect">
+            <a:avLst/>
+          </a:prstGeom>
+          <a:solidFill>
+            <a:srgbClr val="E5E2DC"/>
+          </a:solidFill>
+          <a:ln/>
+        </p:spPr>
+      </p:sp>
+      <p:sp>
+        <p:nvSpPr>
+          <p:cNvPr id="4" name="Shape 2"/>
+          <p:cNvSpPr/>
+          <p:nvPr/>
+        </p:nvSpPr>
+        <p:spPr>
+          <a:xfrm>
+            <a:off x="548640" y="201168"/>
+            <a:ext cx="54864" cy="420624"/>
+          </a:xfrm>
+          <a:prstGeom prst="rect">
+            <a:avLst/>
+          </a:prstGeom>
+          <a:solidFill>
+            <a:srgbClr val="2A9D8F"/>
+          </a:solidFill>
+          <a:ln/>
+        </p:spPr>
+      </p:sp>
+      <p:sp>
+        <p:nvSpPr>
+          <p:cNvPr id="5" name="Text 3"/>
+          <p:cNvSpPr/>
+          <p:nvPr/>
+        </p:nvSpPr>
+        <p:spPr>
+          <a:xfrm>
+            <a:off x="777240" y="137160"/>
+            <a:ext cx="7772400" cy="548640"/>
           </a:xfrm>
           <a:prstGeom prst="rect">
             <a:avLst/>
@@ -2664,37 +3481,37 @@
           <a:ln/>
         </p:spPr>
         <p:txBody>
-          <a:bodyPr wrap="square" rtlCol="0" anchor="ctr"/>
+          <a:bodyPr wrap="square" lIns="0" tIns="0" rIns="0" bIns="0" rtlCol="0" anchor="ctr"/>
           <a:lstStyle/>
           <a:p>
             <a:pPr indent="0" marL="0">
               <a:buNone/>
             </a:pPr>
             <a:r>
-              <a:rPr lang="en-US" sz="3200" b="1" dirty="0">
-                <a:solidFill>
-                  <a:srgbClr val="FFFFFF"/>
+              <a:rPr lang="en-US" sz="2000" b="1" dirty="0">
+                <a:solidFill>
+                  <a:srgbClr val="1B2A4A"/>
                 </a:solidFill>
                 <a:latin typeface="Georgia" pitchFamily="34" charset="0"/>
                 <a:ea typeface="Georgia" pitchFamily="34" charset="-122"/>
                 <a:cs typeface="Georgia" pitchFamily="34" charset="-120"/>
               </a:rPr>
-              <a:t>Key Takeaways</a:t>
-            </a:r>
-            <a:endParaRPr lang="en-US" sz="3200" dirty="0"/>
-          </a:p>
-        </p:txBody>
-      </p:sp>
-      <p:sp>
-        <p:nvSpPr>
-          <p:cNvPr id="4" name="Text 2"/>
-          <p:cNvSpPr/>
-          <p:nvPr/>
-        </p:nvSpPr>
-        <p:spPr>
-          <a:xfrm>
-            <a:off x="731520" y="1463040"/>
-            <a:ext cx="7772400" cy="3200400"/>
+              <a:t>Organising Data</a:t>
+            </a:r>
+            <a:endParaRPr lang="en-US" sz="2000" dirty="0"/>
+          </a:p>
+        </p:txBody>
+      </p:sp>
+      <p:sp>
+        <p:nvSpPr>
+          <p:cNvPr id="6" name="Text 4"/>
+          <p:cNvSpPr/>
+          <p:nvPr/>
+        </p:nvSpPr>
+        <p:spPr>
+          <a:xfrm>
+            <a:off x="731520" y="1051560"/>
+            <a:ext cx="7680960" cy="3108960"/>
           </a:xfrm>
           <a:prstGeom prst="rect">
             <a:avLst/>
@@ -2708,7 +3525,7 @@
           <a:p>
             <a:pPr marL="342900" indent="-342900">
               <a:spcAft>
-                <a:spcPts val="1000"/>
+                <a:spcPts val="800"/>
               </a:spcAft>
               <a:buSzPct val="100000"/>
               <a:buChar char="•"/>
@@ -2716,20 +3533,20 @@
             <a:r>
               <a:rPr lang="en-US" sz="1500" dirty="0">
                 <a:solidFill>
-                  <a:srgbClr val="CADCFC"/>
+                  <a:srgbClr val="3D3A36"/>
                 </a:solidFill>
                 <a:latin typeface="Calibri" pitchFamily="34" charset="0"/>
                 <a:ea typeface="Calibri" pitchFamily="34" charset="-122"/>
                 <a:cs typeface="Calibri" pitchFamily="34" charset="-120"/>
               </a:rPr>
-              <a:t>Qualitative = descriptive; quantitative = numerical (discrete or continuous)</a:t>
+              <a:t>Use a TALLY CHART: marks in groups of 5 (four lines + diagonal).</a:t>
             </a:r>
             <a:endParaRPr lang="en-US" sz="1500" dirty="0"/>
           </a:p>
           <a:p>
             <a:pPr marL="342900" indent="-342900">
               <a:spcAft>
-                <a:spcPts val="1000"/>
+                <a:spcPts val="800"/>
               </a:spcAft>
               <a:buSzPct val="100000"/>
               <a:buChar char="•"/>
@@ -2737,20 +3554,20 @@
             <a:r>
               <a:rPr lang="en-US" sz="1500" dirty="0">
                 <a:solidFill>
-                  <a:srgbClr val="CADCFC"/>
+                  <a:srgbClr val="3D3A36"/>
                 </a:solidFill>
                 <a:latin typeface="Calibri" pitchFamily="34" charset="0"/>
                 <a:ea typeface="Calibri" pitchFamily="34" charset="-122"/>
                 <a:cs typeface="Calibri" pitchFamily="34" charset="-120"/>
               </a:rPr>
-              <a:t>Good surveys: clear questions, no bias, appropriate sample size</a:t>
+              <a:t>Convert tallies to FREQUENCY (the count as a number).</a:t>
             </a:r>
             <a:endParaRPr lang="en-US" sz="1500" dirty="0"/>
           </a:p>
           <a:p>
             <a:pPr marL="342900" indent="-342900">
               <a:spcAft>
-                <a:spcPts val="1000"/>
+                <a:spcPts val="800"/>
               </a:spcAft>
               <a:buSzPct val="100000"/>
               <a:buChar char="•"/>
@@ -2758,20 +3575,20 @@
             <a:r>
               <a:rPr lang="en-US" sz="1500" dirty="0">
                 <a:solidFill>
-                  <a:srgbClr val="CADCFC"/>
+                  <a:srgbClr val="3D3A36"/>
                 </a:solidFill>
                 <a:latin typeface="Calibri" pitchFamily="34" charset="0"/>
                 <a:ea typeface="Calibri" pitchFamily="34" charset="-122"/>
                 <a:cs typeface="Calibri" pitchFamily="34" charset="-120"/>
               </a:rPr>
-              <a:t>Tally charts, frequency tables, two-way tables for organising</a:t>
+              <a:t>Use a FREQUENCY TABLE for neat, organised data.</a:t>
             </a:r>
             <a:endParaRPr lang="en-US" sz="1500" dirty="0"/>
           </a:p>
           <a:p>
             <a:pPr marL="342900" indent="-342900">
               <a:spcAft>
-                <a:spcPts val="1000"/>
+                <a:spcPts val="800"/>
               </a:spcAft>
               <a:buSzPct val="100000"/>
               <a:buChar char="•"/>
@@ -2779,20 +3596,20 @@
             <a:r>
               <a:rPr lang="en-US" sz="1500" dirty="0">
                 <a:solidFill>
-                  <a:srgbClr val="CADCFC"/>
+                  <a:srgbClr val="3D3A36"/>
                 </a:solidFill>
                 <a:latin typeface="Calibri" pitchFamily="34" charset="0"/>
                 <a:ea typeface="Calibri" pitchFamily="34" charset="-122"/>
                 <a:cs typeface="Calibri" pitchFamily="34" charset="-120"/>
               </a:rPr>
-              <a:t>Grouped data: equal width groups, no gaps or overlaps</a:t>
+              <a:t>Group data if there are too many different values (e.g. 0–10, 11–20).</a:t>
             </a:r>
             <a:endParaRPr lang="en-US" sz="1500" dirty="0"/>
           </a:p>
           <a:p>
             <a:pPr marL="342900" indent="-342900">
               <a:spcAft>
-                <a:spcPts val="1000"/>
+                <a:spcPts val="800"/>
               </a:spcAft>
               <a:buSzPct val="100000"/>
               <a:buChar char="•"/>
@@ -2800,18 +3617,110 @@
             <a:r>
               <a:rPr lang="en-US" sz="1500" dirty="0">
                 <a:solidFill>
-                  <a:srgbClr val="CADCFC"/>
+                  <a:srgbClr val="3D3A36"/>
                 </a:solidFill>
                 <a:latin typeface="Calibri" pitchFamily="34" charset="0"/>
                 <a:ea typeface="Calibri" pitchFamily="34" charset="-122"/>
                 <a:cs typeface="Calibri" pitchFamily="34" charset="-120"/>
               </a:rPr>
-              <a:t>Always consider whether data collection method is fair and reliable</a:t>
+              <a:t>Always include a TOTAL row/column to check your work.</a:t>
             </a:r>
             <a:endParaRPr lang="en-US" sz="1500" dirty="0"/>
           </a:p>
         </p:txBody>
       </p:sp>
+    </p:spTree>
+  </p:cSld>
+  <p:clrMapOvr>
+    <a:masterClrMapping/>
+  </p:clrMapOvr>
+</p:sld>
+</file>
+
+<file path=ppt/slides/slide6.xml><?xml version="1.0" encoding="utf-8"?>
+<p:sld xmlns:a="http://schemas.openxmlformats.org/drawingml/2006/main" xmlns:r="http://schemas.openxmlformats.org/officeDocument/2006/relationships" xmlns:p="http://schemas.openxmlformats.org/presentationml/2006/main">
+  <p:cSld name="Slide 6">
+    <p:bg>
+      <p:bgPr>
+        <a:solidFill>
+          <a:srgbClr val="FAF8F5"/>
+        </a:solidFill>
+      </p:bgPr>
+    </p:bg>
+    <p:spTree>
+      <p:nvGrpSpPr>
+        <p:cNvPr id="1" name=""/>
+        <p:cNvGrpSpPr/>
+        <p:nvPr/>
+      </p:nvGrpSpPr>
+      <p:grpSpPr>
+        <a:xfrm>
+          <a:off x="0" y="0"/>
+          <a:ext cx="0" cy="0"/>
+          <a:chOff x="0" y="0"/>
+          <a:chExt cx="0" cy="0"/>
+        </a:xfrm>
+      </p:grpSpPr>
+      <p:sp>
+        <p:nvSpPr>
+          <p:cNvPr id="2" name="Shape 0"/>
+          <p:cNvSpPr/>
+          <p:nvPr/>
+        </p:nvSpPr>
+        <p:spPr>
+          <a:xfrm>
+            <a:off x="0" y="0"/>
+            <a:ext cx="9144000" cy="822960"/>
+          </a:xfrm>
+          <a:prstGeom prst="rect">
+            <a:avLst/>
+          </a:prstGeom>
+          <a:solidFill>
+            <a:srgbClr val="FFFFFF"/>
+          </a:solidFill>
+          <a:ln/>
+        </p:spPr>
+      </p:sp>
+      <p:sp>
+        <p:nvSpPr>
+          <p:cNvPr id="3" name="Shape 1"/>
+          <p:cNvSpPr/>
+          <p:nvPr/>
+        </p:nvSpPr>
+        <p:spPr>
+          <a:xfrm>
+            <a:off x="0" y="804672"/>
+            <a:ext cx="9144000" cy="27432"/>
+          </a:xfrm>
+          <a:prstGeom prst="rect">
+            <a:avLst/>
+          </a:prstGeom>
+          <a:solidFill>
+            <a:srgbClr val="E5E2DC"/>
+          </a:solidFill>
+          <a:ln/>
+        </p:spPr>
+      </p:sp>
+      <p:sp>
+        <p:nvSpPr>
+          <p:cNvPr id="4" name="Shape 2"/>
+          <p:cNvSpPr/>
+          <p:nvPr/>
+        </p:nvSpPr>
+        <p:spPr>
+          <a:xfrm>
+            <a:off x="548640" y="201168"/>
+            <a:ext cx="54864" cy="420624"/>
+          </a:xfrm>
+          <a:prstGeom prst="rect">
+            <a:avLst/>
+          </a:prstGeom>
+          <a:solidFill>
+            <a:srgbClr val="2A9D8F"/>
+          </a:solidFill>
+          <a:ln/>
+        </p:spPr>
+      </p:sp>
       <p:sp>
         <p:nvSpPr>
           <p:cNvPr id="5" name="Text 3"/>
@@ -2820,8 +3729,8 @@
         </p:nvSpPr>
         <p:spPr>
           <a:xfrm>
-            <a:off x="731520" y="4572000"/>
-            <a:ext cx="7772400" cy="365760"/>
+            <a:off x="777240" y="137160"/>
+            <a:ext cx="7772400" cy="548640"/>
           </a:xfrm>
           <a:prstGeom prst="rect">
             <a:avLst/>
@@ -2830,24 +3739,783 @@
           <a:ln/>
         </p:spPr>
         <p:txBody>
-          <a:bodyPr wrap="square" rtlCol="0" anchor="ctr"/>
+          <a:bodyPr wrap="square" lIns="0" tIns="0" rIns="0" bIns="0" rtlCol="0" anchor="ctr"/>
           <a:lstStyle/>
           <a:p>
             <a:pPr indent="0" marL="0">
               <a:buNone/>
             </a:pPr>
             <a:r>
-              <a:rPr lang="en-US" sz="1100" dirty="0">
-                <a:solidFill>
-                  <a:srgbClr val="E9C46A"/>
+              <a:rPr lang="en-US" sz="2000" b="1" dirty="0">
+                <a:solidFill>
+                  <a:srgbClr val="1B2A4A"/>
+                </a:solidFill>
+                <a:latin typeface="Georgia" pitchFamily="34" charset="0"/>
+                <a:ea typeface="Georgia" pitchFamily="34" charset="-122"/>
+                <a:cs typeface="Georgia" pitchFamily="34" charset="-120"/>
+              </a:rPr>
+              <a:t>Check Your Understanding</a:t>
+            </a:r>
+            <a:endParaRPr lang="en-US" sz="2000" dirty="0"/>
+          </a:p>
+        </p:txBody>
+      </p:sp>
+      <p:sp>
+        <p:nvSpPr>
+          <p:cNvPr id="6" name="Shape 4"/>
+          <p:cNvSpPr/>
+          <p:nvPr/>
+        </p:nvSpPr>
+        <p:spPr>
+          <a:xfrm>
+            <a:off x="731520" y="1051560"/>
+            <a:ext cx="7680960" cy="438912"/>
+          </a:xfrm>
+          <a:prstGeom prst="rect">
+            <a:avLst/>
+          </a:prstGeom>
+          <a:solidFill>
+            <a:srgbClr val="FFFFFF"/>
+          </a:solidFill>
+          <a:ln/>
+        </p:spPr>
+      </p:sp>
+      <p:sp>
+        <p:nvSpPr>
+          <p:cNvPr id="7" name="Text 5"/>
+          <p:cNvSpPr/>
+          <p:nvPr/>
+        </p:nvSpPr>
+        <p:spPr>
+          <a:xfrm>
+            <a:off x="868680" y="1051560"/>
+            <a:ext cx="320040" cy="438912"/>
+          </a:xfrm>
+          <a:prstGeom prst="rect">
+            <a:avLst/>
+          </a:prstGeom>
+          <a:noFill/>
+          <a:ln/>
+        </p:spPr>
+        <p:txBody>
+          <a:bodyPr wrap="square" rtlCol="0" anchor="ctr"/>
+          <a:lstStyle/>
+          <a:p>
+            <a:pPr indent="0" marL="0">
+              <a:buNone/>
+            </a:pPr>
+            <a:r>
+              <a:rPr lang="en-US" sz="1400" dirty="0">
+                <a:solidFill>
+                  <a:srgbClr val="2A9D8F"/>
+                </a:solidFill>
+              </a:rPr>
+              <a:t>☐</a:t>
+            </a:r>
+            <a:endParaRPr lang="en-US" sz="1400" dirty="0"/>
+          </a:p>
+        </p:txBody>
+      </p:sp>
+      <p:sp>
+        <p:nvSpPr>
+          <p:cNvPr id="8" name="Text 6"/>
+          <p:cNvSpPr/>
+          <p:nvPr/>
+        </p:nvSpPr>
+        <p:spPr>
+          <a:xfrm>
+            <a:off x="1234440" y="1051560"/>
+            <a:ext cx="6949440" cy="438912"/>
+          </a:xfrm>
+          <a:prstGeom prst="rect">
+            <a:avLst/>
+          </a:prstGeom>
+          <a:noFill/>
+          <a:ln/>
+        </p:spPr>
+        <p:txBody>
+          <a:bodyPr wrap="square" rtlCol="0" anchor="ctr"/>
+          <a:lstStyle/>
+          <a:p>
+            <a:pPr indent="0" marL="0">
+              <a:buNone/>
+            </a:pPr>
+            <a:r>
+              <a:rPr lang="en-US" sz="1300" dirty="0">
+                <a:solidFill>
+                  <a:srgbClr val="3D3A36"/>
                 </a:solidFill>
                 <a:latin typeface="Calibri" pitchFamily="34" charset="0"/>
                 <a:ea typeface="Calibri" pitchFamily="34" charset="-122"/>
                 <a:cs typeface="Calibri" pitchFamily="34" charset="-120"/>
               </a:rPr>
+              <a:t>I can distinguish between qualitative and quantitative data</a:t>
+            </a:r>
+            <a:endParaRPr lang="en-US" sz="1300" dirty="0"/>
+          </a:p>
+        </p:txBody>
+      </p:sp>
+      <p:sp>
+        <p:nvSpPr>
+          <p:cNvPr id="9" name="Shape 7"/>
+          <p:cNvSpPr/>
+          <p:nvPr/>
+        </p:nvSpPr>
+        <p:spPr>
+          <a:xfrm>
+            <a:off x="731520" y="1554480"/>
+            <a:ext cx="7680960" cy="438912"/>
+          </a:xfrm>
+          <a:prstGeom prst="rect">
+            <a:avLst/>
+          </a:prstGeom>
+          <a:solidFill>
+            <a:srgbClr val="F8F6F3"/>
+          </a:solidFill>
+          <a:ln/>
+        </p:spPr>
+      </p:sp>
+      <p:sp>
+        <p:nvSpPr>
+          <p:cNvPr id="10" name="Text 8"/>
+          <p:cNvSpPr/>
+          <p:nvPr/>
+        </p:nvSpPr>
+        <p:spPr>
+          <a:xfrm>
+            <a:off x="868680" y="1554480"/>
+            <a:ext cx="320040" cy="438912"/>
+          </a:xfrm>
+          <a:prstGeom prst="rect">
+            <a:avLst/>
+          </a:prstGeom>
+          <a:noFill/>
+          <a:ln/>
+        </p:spPr>
+        <p:txBody>
+          <a:bodyPr wrap="square" rtlCol="0" anchor="ctr"/>
+          <a:lstStyle/>
+          <a:p>
+            <a:pPr indent="0" marL="0">
+              <a:buNone/>
+            </a:pPr>
+            <a:r>
+              <a:rPr lang="en-US" sz="1400" dirty="0">
+                <a:solidFill>
+                  <a:srgbClr val="2A9D8F"/>
+                </a:solidFill>
+              </a:rPr>
+              <a:t>☐</a:t>
+            </a:r>
+            <a:endParaRPr lang="en-US" sz="1400" dirty="0"/>
+          </a:p>
+        </p:txBody>
+      </p:sp>
+      <p:sp>
+        <p:nvSpPr>
+          <p:cNvPr id="11" name="Text 9"/>
+          <p:cNvSpPr/>
+          <p:nvPr/>
+        </p:nvSpPr>
+        <p:spPr>
+          <a:xfrm>
+            <a:off x="1234440" y="1554480"/>
+            <a:ext cx="6949440" cy="438912"/>
+          </a:xfrm>
+          <a:prstGeom prst="rect">
+            <a:avLst/>
+          </a:prstGeom>
+          <a:noFill/>
+          <a:ln/>
+        </p:spPr>
+        <p:txBody>
+          <a:bodyPr wrap="square" rtlCol="0" anchor="ctr"/>
+          <a:lstStyle/>
+          <a:p>
+            <a:pPr indent="0" marL="0">
+              <a:buNone/>
+            </a:pPr>
+            <a:r>
+              <a:rPr lang="en-US" sz="1300" dirty="0">
+                <a:solidFill>
+                  <a:srgbClr val="3D3A36"/>
+                </a:solidFill>
+                <a:latin typeface="Calibri" pitchFamily="34" charset="0"/>
+                <a:ea typeface="Calibri" pitchFamily="34" charset="-122"/>
+                <a:cs typeface="Calibri" pitchFamily="34" charset="-120"/>
+              </a:rPr>
+              <a:t>I can design clear survey questions with response categories</a:t>
+            </a:r>
+            <a:endParaRPr lang="en-US" sz="1300" dirty="0"/>
+          </a:p>
+        </p:txBody>
+      </p:sp>
+      <p:sp>
+        <p:nvSpPr>
+          <p:cNvPr id="12" name="Shape 10"/>
+          <p:cNvSpPr/>
+          <p:nvPr/>
+        </p:nvSpPr>
+        <p:spPr>
+          <a:xfrm>
+            <a:off x="731520" y="2057400"/>
+            <a:ext cx="7680960" cy="438912"/>
+          </a:xfrm>
+          <a:prstGeom prst="rect">
+            <a:avLst/>
+          </a:prstGeom>
+          <a:solidFill>
+            <a:srgbClr val="FFFFFF"/>
+          </a:solidFill>
+          <a:ln/>
+        </p:spPr>
+      </p:sp>
+      <p:sp>
+        <p:nvSpPr>
+          <p:cNvPr id="13" name="Text 11"/>
+          <p:cNvSpPr/>
+          <p:nvPr/>
+        </p:nvSpPr>
+        <p:spPr>
+          <a:xfrm>
+            <a:off x="868680" y="2057400"/>
+            <a:ext cx="320040" cy="438912"/>
+          </a:xfrm>
+          <a:prstGeom prst="rect">
+            <a:avLst/>
+          </a:prstGeom>
+          <a:noFill/>
+          <a:ln/>
+        </p:spPr>
+        <p:txBody>
+          <a:bodyPr wrap="square" rtlCol="0" anchor="ctr"/>
+          <a:lstStyle/>
+          <a:p>
+            <a:pPr indent="0" marL="0">
+              <a:buNone/>
+            </a:pPr>
+            <a:r>
+              <a:rPr lang="en-US" sz="1400" dirty="0">
+                <a:solidFill>
+                  <a:srgbClr val="2A9D8F"/>
+                </a:solidFill>
+              </a:rPr>
+              <a:t>☐</a:t>
+            </a:r>
+            <a:endParaRPr lang="en-US" sz="1400" dirty="0"/>
+          </a:p>
+        </p:txBody>
+      </p:sp>
+      <p:sp>
+        <p:nvSpPr>
+          <p:cNvPr id="14" name="Text 12"/>
+          <p:cNvSpPr/>
+          <p:nvPr/>
+        </p:nvSpPr>
+        <p:spPr>
+          <a:xfrm>
+            <a:off x="1234440" y="2057400"/>
+            <a:ext cx="6949440" cy="438912"/>
+          </a:xfrm>
+          <a:prstGeom prst="rect">
+            <a:avLst/>
+          </a:prstGeom>
+          <a:noFill/>
+          <a:ln/>
+        </p:spPr>
+        <p:txBody>
+          <a:bodyPr wrap="square" rtlCol="0" anchor="ctr"/>
+          <a:lstStyle/>
+          <a:p>
+            <a:pPr indent="0" marL="0">
+              <a:buNone/>
+            </a:pPr>
+            <a:r>
+              <a:rPr lang="en-US" sz="1300" dirty="0">
+                <a:solidFill>
+                  <a:srgbClr val="3D3A36"/>
+                </a:solidFill>
+                <a:latin typeface="Calibri" pitchFamily="34" charset="0"/>
+                <a:ea typeface="Calibri" pitchFamily="34" charset="-122"/>
+                <a:cs typeface="Calibri" pitchFamily="34" charset="-120"/>
+              </a:rPr>
+              <a:t>I can use tally charts and frequency tables</a:t>
+            </a:r>
+            <a:endParaRPr lang="en-US" sz="1300" dirty="0"/>
+          </a:p>
+        </p:txBody>
+      </p:sp>
+      <p:sp>
+        <p:nvSpPr>
+          <p:cNvPr id="15" name="Shape 13"/>
+          <p:cNvSpPr/>
+          <p:nvPr/>
+        </p:nvSpPr>
+        <p:spPr>
+          <a:xfrm>
+            <a:off x="731520" y="2560320"/>
+            <a:ext cx="7680960" cy="438912"/>
+          </a:xfrm>
+          <a:prstGeom prst="rect">
+            <a:avLst/>
+          </a:prstGeom>
+          <a:solidFill>
+            <a:srgbClr val="F8F6F3"/>
+          </a:solidFill>
+          <a:ln/>
+        </p:spPr>
+      </p:sp>
+      <p:sp>
+        <p:nvSpPr>
+          <p:cNvPr id="16" name="Text 14"/>
+          <p:cNvSpPr/>
+          <p:nvPr/>
+        </p:nvSpPr>
+        <p:spPr>
+          <a:xfrm>
+            <a:off x="868680" y="2560320"/>
+            <a:ext cx="320040" cy="438912"/>
+          </a:xfrm>
+          <a:prstGeom prst="rect">
+            <a:avLst/>
+          </a:prstGeom>
+          <a:noFill/>
+          <a:ln/>
+        </p:spPr>
+        <p:txBody>
+          <a:bodyPr wrap="square" rtlCol="0" anchor="ctr"/>
+          <a:lstStyle/>
+          <a:p>
+            <a:pPr indent="0" marL="0">
+              <a:buNone/>
+            </a:pPr>
+            <a:r>
+              <a:rPr lang="en-US" sz="1400" dirty="0">
+                <a:solidFill>
+                  <a:srgbClr val="2A9D8F"/>
+                </a:solidFill>
+              </a:rPr>
+              <a:t>☐</a:t>
+            </a:r>
+            <a:endParaRPr lang="en-US" sz="1400" dirty="0"/>
+          </a:p>
+        </p:txBody>
+      </p:sp>
+      <p:sp>
+        <p:nvSpPr>
+          <p:cNvPr id="17" name="Text 15"/>
+          <p:cNvSpPr/>
+          <p:nvPr/>
+        </p:nvSpPr>
+        <p:spPr>
+          <a:xfrm>
+            <a:off x="1234440" y="2560320"/>
+            <a:ext cx="6949440" cy="438912"/>
+          </a:xfrm>
+          <a:prstGeom prst="rect">
+            <a:avLst/>
+          </a:prstGeom>
+          <a:noFill/>
+          <a:ln/>
+        </p:spPr>
+        <p:txBody>
+          <a:bodyPr wrap="square" rtlCol="0" anchor="ctr"/>
+          <a:lstStyle/>
+          <a:p>
+            <a:pPr indent="0" marL="0">
+              <a:buNone/>
+            </a:pPr>
+            <a:r>
+              <a:rPr lang="en-US" sz="1300" dirty="0">
+                <a:solidFill>
+                  <a:srgbClr val="3D3A36"/>
+                </a:solidFill>
+                <a:latin typeface="Calibri" pitchFamily="34" charset="0"/>
+                <a:ea typeface="Calibri" pitchFamily="34" charset="-122"/>
+                <a:cs typeface="Calibri" pitchFamily="34" charset="-120"/>
+              </a:rPr>
+              <a:t>I know how to group data appropriately</a:t>
+            </a:r>
+            <a:endParaRPr lang="en-US" sz="1300" dirty="0"/>
+          </a:p>
+        </p:txBody>
+      </p:sp>
+      <p:sp>
+        <p:nvSpPr>
+          <p:cNvPr id="18" name="Shape 16"/>
+          <p:cNvSpPr/>
+          <p:nvPr/>
+        </p:nvSpPr>
+        <p:spPr>
+          <a:xfrm>
+            <a:off x="731520" y="3063240"/>
+            <a:ext cx="7680960" cy="438912"/>
+          </a:xfrm>
+          <a:prstGeom prst="rect">
+            <a:avLst/>
+          </a:prstGeom>
+          <a:solidFill>
+            <a:srgbClr val="FFFFFF"/>
+          </a:solidFill>
+          <a:ln/>
+        </p:spPr>
+      </p:sp>
+      <p:sp>
+        <p:nvSpPr>
+          <p:cNvPr id="19" name="Text 17"/>
+          <p:cNvSpPr/>
+          <p:nvPr/>
+        </p:nvSpPr>
+        <p:spPr>
+          <a:xfrm>
+            <a:off x="868680" y="3063240"/>
+            <a:ext cx="320040" cy="438912"/>
+          </a:xfrm>
+          <a:prstGeom prst="rect">
+            <a:avLst/>
+          </a:prstGeom>
+          <a:noFill/>
+          <a:ln/>
+        </p:spPr>
+        <p:txBody>
+          <a:bodyPr wrap="square" rtlCol="0" anchor="ctr"/>
+          <a:lstStyle/>
+          <a:p>
+            <a:pPr indent="0" marL="0">
+              <a:buNone/>
+            </a:pPr>
+            <a:r>
+              <a:rPr lang="en-US" sz="1400" dirty="0">
+                <a:solidFill>
+                  <a:srgbClr val="2A9D8F"/>
+                </a:solidFill>
+              </a:rPr>
+              <a:t>☐</a:t>
+            </a:r>
+            <a:endParaRPr lang="en-US" sz="1400" dirty="0"/>
+          </a:p>
+        </p:txBody>
+      </p:sp>
+      <p:sp>
+        <p:nvSpPr>
+          <p:cNvPr id="20" name="Text 18"/>
+          <p:cNvSpPr/>
+          <p:nvPr/>
+        </p:nvSpPr>
+        <p:spPr>
+          <a:xfrm>
+            <a:off x="1234440" y="3063240"/>
+            <a:ext cx="6949440" cy="438912"/>
+          </a:xfrm>
+          <a:prstGeom prst="rect">
+            <a:avLst/>
+          </a:prstGeom>
+          <a:noFill/>
+          <a:ln/>
+        </p:spPr>
+        <p:txBody>
+          <a:bodyPr wrap="square" rtlCol="0" anchor="ctr"/>
+          <a:lstStyle/>
+          <a:p>
+            <a:pPr indent="0" marL="0">
+              <a:buNone/>
+            </a:pPr>
+            <a:r>
+              <a:rPr lang="en-US" sz="1300" dirty="0">
+                <a:solidFill>
+                  <a:srgbClr val="3D3A36"/>
+                </a:solidFill>
+                <a:latin typeface="Calibri" pitchFamily="34" charset="0"/>
+                <a:ea typeface="Calibri" pitchFamily="34" charset="-122"/>
+                <a:cs typeface="Calibri" pitchFamily="34" charset="-120"/>
+              </a:rPr>
+              <a:t>I can organise data for analysis</a:t>
+            </a:r>
+            <a:endParaRPr lang="en-US" sz="1300" dirty="0"/>
+          </a:p>
+        </p:txBody>
+      </p:sp>
+      <p:sp>
+        <p:nvSpPr>
+          <p:cNvPr id="21" name="Shape 19"/>
+          <p:cNvSpPr/>
+          <p:nvPr/>
+        </p:nvSpPr>
+        <p:spPr>
+          <a:xfrm>
+            <a:off x="731520" y="3749040"/>
+            <a:ext cx="7680960" cy="594360"/>
+          </a:xfrm>
+          <a:prstGeom prst="rect">
+            <a:avLst/>
+          </a:prstGeom>
+          <a:solidFill>
+            <a:srgbClr val="E8F5F3"/>
+          </a:solidFill>
+          <a:ln/>
+          <a:effectLst>
+            <a:outerShdw sx="100000" sy="100000" kx="0" ky="0" algn="bl" rotWithShape="0" blurRad="50800" dist="25400" dir="8100000">
+              <a:srgbClr val="000000">
+                <a:alpha val="10000"/>
+              </a:srgbClr>
+            </a:outerShdw>
+          </a:effectLst>
+        </p:spPr>
+      </p:sp>
+      <p:sp>
+        <p:nvSpPr>
+          <p:cNvPr id="22" name="Text 20"/>
+          <p:cNvSpPr/>
+          <p:nvPr/>
+        </p:nvSpPr>
+        <p:spPr>
+          <a:xfrm>
+            <a:off x="914400" y="3749040"/>
+            <a:ext cx="7315200" cy="594360"/>
+          </a:xfrm>
+          <a:prstGeom prst="rect">
+            <a:avLst/>
+          </a:prstGeom>
+          <a:noFill/>
+          <a:ln/>
+        </p:spPr>
+        <p:txBody>
+          <a:bodyPr wrap="square" rtlCol="0" anchor="ctr"/>
+          <a:lstStyle/>
+          <a:p>
+            <a:pPr indent="0" marL="0">
+              <a:buNone/>
+            </a:pPr>
+            <a:r>
+              <a:rPr lang="en-US" sz="1200" b="1" dirty="0">
+                <a:solidFill>
+                  <a:srgbClr val="2A9D8F"/>
+                </a:solidFill>
+                <a:latin typeface="Calibri" pitchFamily="34" charset="0"/>
+                <a:ea typeface="Calibri" pitchFamily="34" charset="-122"/>
+                <a:cs typeface="Calibri" pitchFamily="34" charset="-120"/>
+              </a:rPr>
+              <a:t>Key Idea: </a:t>
+            </a:r>
+            <a:pPr indent="0" marL="0">
+              <a:buNone/>
+            </a:pPr>
+            <a:r>
+              <a:rPr lang="en-US" sz="1200" i="1" dirty="0">
+                <a:solidFill>
+                  <a:srgbClr val="3D3A36"/>
+                </a:solidFill>
+                <a:latin typeface="Calibri" pitchFamily="34" charset="0"/>
+                <a:ea typeface="Calibri" pitchFamily="34" charset="-122"/>
+                <a:cs typeface="Calibri" pitchFamily="34" charset="-120"/>
+              </a:rPr>
+              <a:t>Good data collection leads to reliable results — plan your survey carefully.</a:t>
+            </a:r>
+            <a:endParaRPr lang="en-US" sz="1200" dirty="0"/>
+          </a:p>
+        </p:txBody>
+      </p:sp>
+    </p:spTree>
+  </p:cSld>
+  <p:clrMapOvr>
+    <a:masterClrMapping/>
+  </p:clrMapOvr>
+</p:sld>
+</file>
+
+<file path=ppt/slides/slide7.xml><?xml version="1.0" encoding="utf-8"?>
+<p:sld xmlns:a="http://schemas.openxmlformats.org/drawingml/2006/main" xmlns:r="http://schemas.openxmlformats.org/officeDocument/2006/relationships" xmlns:p="http://schemas.openxmlformats.org/presentationml/2006/main">
+  <p:cSld name="Slide 7">
+    <p:spTree>
+      <p:nvGrpSpPr>
+        <p:cNvPr id="1" name=""/>
+        <p:cNvGrpSpPr/>
+        <p:nvPr/>
+      </p:nvGrpSpPr>
+      <p:grpSpPr>
+        <a:xfrm>
+          <a:off x="0" y="0"/>
+          <a:ext cx="0" cy="0"/>
+          <a:chOff x="0" y="0"/>
+          <a:chExt cx="0" cy="0"/>
+        </a:xfrm>
+      </p:grpSpPr>
+      <p:sp>
+        <p:nvSpPr>
+          <p:cNvPr id="2" name="Shape 0"/>
+          <p:cNvSpPr/>
+          <p:nvPr/>
+        </p:nvSpPr>
+        <p:spPr>
+          <a:xfrm>
+            <a:off x="0" y="0"/>
+            <a:ext cx="9144000" cy="5143500"/>
+          </a:xfrm>
+          <a:prstGeom prst="rect">
+            <a:avLst/>
+          </a:prstGeom>
+          <a:solidFill>
+            <a:srgbClr val="1B2A4A"/>
+          </a:solidFill>
+          <a:ln/>
+        </p:spPr>
+      </p:sp>
+      <p:sp>
+        <p:nvSpPr>
+          <p:cNvPr id="3" name="Shape 1"/>
+          <p:cNvSpPr/>
+          <p:nvPr/>
+        </p:nvSpPr>
+        <p:spPr>
+          <a:xfrm>
+            <a:off x="0" y="4777740"/>
+            <a:ext cx="9144000" cy="365760"/>
+          </a:xfrm>
+          <a:prstGeom prst="rect">
+            <a:avLst/>
+          </a:prstGeom>
+          <a:solidFill>
+            <a:srgbClr val="2A9D8F"/>
+          </a:solidFill>
+          <a:ln/>
+        </p:spPr>
+      </p:sp>
+      <p:sp>
+        <p:nvSpPr>
+          <p:cNvPr id="4" name="Shape 2"/>
+          <p:cNvSpPr/>
+          <p:nvPr/>
+        </p:nvSpPr>
+        <p:spPr>
+          <a:xfrm>
+            <a:off x="-914400" y="-914400"/>
+            <a:ext cx="3657600" cy="3657600"/>
+          </a:xfrm>
+          <a:prstGeom prst="ellipse">
+            <a:avLst/>
+          </a:prstGeom>
+          <a:solidFill>
+            <a:srgbClr val="2A9D8F">
+              <a:alpha val="10000"/>
+            </a:srgbClr>
+          </a:solidFill>
+          <a:ln/>
+        </p:spPr>
+      </p:sp>
+      <p:sp>
+        <p:nvSpPr>
+          <p:cNvPr id="5" name="Text 3"/>
+          <p:cNvSpPr/>
+          <p:nvPr/>
+        </p:nvSpPr>
+        <p:spPr>
+          <a:xfrm>
+            <a:off x="731520" y="1463040"/>
+            <a:ext cx="7680960" cy="822960"/>
+          </a:xfrm>
+          <a:prstGeom prst="rect">
+            <a:avLst/>
+          </a:prstGeom>
+          <a:noFill/>
+          <a:ln/>
+        </p:spPr>
+        <p:txBody>
+          <a:bodyPr wrap="square" rtlCol="0" anchor="ctr"/>
+          <a:lstStyle/>
+          <a:p>
+            <a:pPr algn="ctr" indent="0" marL="0">
+              <a:buNone/>
+            </a:pPr>
+            <a:r>
+              <a:rPr lang="en-US" sz="3400" b="1" dirty="0">
+                <a:solidFill>
+                  <a:srgbClr val="FFFFFF"/>
+                </a:solidFill>
+                <a:latin typeface="Georgia" pitchFamily="34" charset="0"/>
+                <a:ea typeface="Georgia" pitchFamily="34" charset="-122"/>
+                <a:cs typeface="Georgia" pitchFamily="34" charset="-120"/>
+              </a:rPr>
+              <a:t>Review &amp; Practise</a:t>
+            </a:r>
+            <a:endParaRPr lang="en-US" sz="3400" dirty="0"/>
+          </a:p>
+        </p:txBody>
+      </p:sp>
+      <p:sp>
+        <p:nvSpPr>
+          <p:cNvPr id="6" name="Text 4"/>
+          <p:cNvSpPr/>
+          <p:nvPr/>
+        </p:nvSpPr>
+        <p:spPr>
+          <a:xfrm>
+            <a:off x="731520" y="2468880"/>
+            <a:ext cx="7680960" cy="457200"/>
+          </a:xfrm>
+          <a:prstGeom prst="rect">
+            <a:avLst/>
+          </a:prstGeom>
+          <a:noFill/>
+          <a:ln/>
+        </p:spPr>
+        <p:txBody>
+          <a:bodyPr wrap="square" rtlCol="0" anchor="ctr"/>
+          <a:lstStyle/>
+          <a:p>
+            <a:pPr algn="ctr" indent="0" marL="0">
+              <a:buNone/>
+            </a:pPr>
+            <a:r>
+              <a:rPr lang="en-US" sz="1800" dirty="0">
+                <a:solidFill>
+                  <a:srgbClr val="2A9D8F"/>
+                </a:solidFill>
+                <a:latin typeface="Calibri" pitchFamily="34" charset="0"/>
+                <a:ea typeface="Calibri" pitchFamily="34" charset="-122"/>
+                <a:cs typeface="Calibri" pitchFamily="34" charset="-120"/>
+              </a:rPr>
               <a:t>mrzocchi.com</a:t>
             </a:r>
-            <a:endParaRPr lang="en-US" sz="1100" dirty="0"/>
+            <a:endParaRPr lang="en-US" sz="1800" dirty="0"/>
+          </a:p>
+        </p:txBody>
+      </p:sp>
+      <p:sp>
+        <p:nvSpPr>
+          <p:cNvPr id="7" name="Text 5"/>
+          <p:cNvSpPr/>
+          <p:nvPr/>
+        </p:nvSpPr>
+        <p:spPr>
+          <a:xfrm>
+            <a:off x="731520" y="3108960"/>
+            <a:ext cx="7680960" cy="457200"/>
+          </a:xfrm>
+          <a:prstGeom prst="rect">
+            <a:avLst/>
+          </a:prstGeom>
+          <a:noFill/>
+          <a:ln/>
+        </p:spPr>
+        <p:txBody>
+          <a:bodyPr wrap="square" rtlCol="0" anchor="ctr"/>
+          <a:lstStyle/>
+          <a:p>
+            <a:pPr algn="ctr" indent="0" marL="0">
+              <a:buNone/>
+            </a:pPr>
+            <a:r>
+              <a:rPr lang="en-US" sz="1300" dirty="0">
+                <a:solidFill>
+                  <a:srgbClr val="9B9690"/>
+                </a:solidFill>
+                <a:latin typeface="Calibri" pitchFamily="34" charset="0"/>
+                <a:ea typeface="Calibri" pitchFamily="34" charset="-122"/>
+                <a:cs typeface="Calibri" pitchFamily="34" charset="-120"/>
+              </a:rPr>
+              <a:t>Use the Self-Quiz, Review Games, and Practice Builder to test yourself.</a:t>
+            </a:r>
+            <a:endParaRPr lang="en-US" sz="1300" dirty="0"/>
           </a:p>
         </p:txBody>
       </p:sp>
